--- a/Presentation_TP_USGS_Earthquake_AI_FINAL.pptx
+++ b/Presentation_TP_USGS_Earthquake_AI_FINAL.pptx
@@ -362,7 +362,7 @@
           <a:p>
             <a:fld id="{C1FF6DA9-008F-8B48-92A6-B652298478BF}" type="slidenum">
               <a:rPr lang="en-US" smtClean="0"/>
-              <a:t>‹n°›</a:t>
+              <a:t>‹N°›</a:t>
             </a:fld>
             <a:endParaRPr lang="en-US"/>
           </a:p>
@@ -530,7 +530,7 @@
           <a:p>
             <a:fld id="{C1FF6DA9-008F-8B48-92A6-B652298478BF}" type="slidenum">
               <a:rPr lang="en-US" smtClean="0"/>
-              <a:t>‹n°›</a:t>
+              <a:t>‹N°›</a:t>
             </a:fld>
             <a:endParaRPr lang="en-US"/>
           </a:p>
@@ -708,7 +708,7 @@
           <a:p>
             <a:fld id="{C1FF6DA9-008F-8B48-92A6-B652298478BF}" type="slidenum">
               <a:rPr lang="en-US" smtClean="0"/>
-              <a:t>‹n°›</a:t>
+              <a:t>‹N°›</a:t>
             </a:fld>
             <a:endParaRPr lang="en-US"/>
           </a:p>
@@ -876,7 +876,7 @@
           <a:p>
             <a:fld id="{C1FF6DA9-008F-8B48-92A6-B652298478BF}" type="slidenum">
               <a:rPr lang="en-US" smtClean="0"/>
-              <a:t>‹n°›</a:t>
+              <a:t>‹N°›</a:t>
             </a:fld>
             <a:endParaRPr lang="en-US"/>
           </a:p>
@@ -1121,7 +1121,7 @@
           <a:p>
             <a:fld id="{C1FF6DA9-008F-8B48-92A6-B652298478BF}" type="slidenum">
               <a:rPr lang="en-US" smtClean="0"/>
-              <a:t>‹n°›</a:t>
+              <a:t>‹N°›</a:t>
             </a:fld>
             <a:endParaRPr lang="en-US"/>
           </a:p>
@@ -1406,7 +1406,7 @@
           <a:p>
             <a:fld id="{C1FF6DA9-008F-8B48-92A6-B652298478BF}" type="slidenum">
               <a:rPr lang="en-US" smtClean="0"/>
-              <a:t>‹n°›</a:t>
+              <a:t>‹N°›</a:t>
             </a:fld>
             <a:endParaRPr lang="en-US"/>
           </a:p>
@@ -1825,7 +1825,7 @@
           <a:p>
             <a:fld id="{C1FF6DA9-008F-8B48-92A6-B652298478BF}" type="slidenum">
               <a:rPr lang="en-US" smtClean="0"/>
-              <a:t>‹n°›</a:t>
+              <a:t>‹N°›</a:t>
             </a:fld>
             <a:endParaRPr lang="en-US"/>
           </a:p>
@@ -1942,7 +1942,7 @@
           <a:p>
             <a:fld id="{C1FF6DA9-008F-8B48-92A6-B652298478BF}" type="slidenum">
               <a:rPr lang="en-US" smtClean="0"/>
-              <a:t>‹n°›</a:t>
+              <a:t>‹N°›</a:t>
             </a:fld>
             <a:endParaRPr lang="en-US"/>
           </a:p>
@@ -2037,7 +2037,7 @@
           <a:p>
             <a:fld id="{C1FF6DA9-008F-8B48-92A6-B652298478BF}" type="slidenum">
               <a:rPr lang="en-US" smtClean="0"/>
-              <a:t>‹n°›</a:t>
+              <a:t>‹N°›</a:t>
             </a:fld>
             <a:endParaRPr lang="en-US"/>
           </a:p>
@@ -2312,7 +2312,7 @@
           <a:p>
             <a:fld id="{C1FF6DA9-008F-8B48-92A6-B652298478BF}" type="slidenum">
               <a:rPr lang="en-US" smtClean="0"/>
-              <a:t>‹n°›</a:t>
+              <a:t>‹N°›</a:t>
             </a:fld>
             <a:endParaRPr lang="en-US"/>
           </a:p>
@@ -2564,7 +2564,7 @@
           <a:p>
             <a:fld id="{C1FF6DA9-008F-8B48-92A6-B652298478BF}" type="slidenum">
               <a:rPr lang="en-US" smtClean="0"/>
-              <a:t>‹n°›</a:t>
+              <a:t>‹N°›</a:t>
             </a:fld>
             <a:endParaRPr lang="en-US"/>
           </a:p>
@@ -2811,7 +2811,7 @@
           <a:p>
             <a:fld id="{C1FF6DA9-008F-8B48-92A6-B652298478BF}" type="slidenum">
               <a:rPr lang="en-US" smtClean="0"/>
-              <a:t>‹n°›</a:t>
+              <a:t>‹N°›</a:t>
             </a:fld>
             <a:endParaRPr lang="en-US"/>
           </a:p>
@@ -10688,7 +10688,7 @@
         <p:spPr>
           <a:xfrm>
             <a:off x="7891271" y="3867911"/>
-            <a:ext cx="3282696" cy="1399032"/>
+            <a:ext cx="3282696" cy="938719"/>
           </a:xfrm>
           <a:prstGeom prst="rect">
             <a:avLst/>
@@ -10703,15 +10703,88 @@
           <a:p>
             <a:pPr algn="l"/>
             <a:r>
-              <a:rPr sz="1100" b="0">
+              <a:rPr sz="1100" b="0" dirty="0">
                 <a:solidFill>
                   <a:srgbClr val="232B32"/>
                 </a:solidFill>
                 <a:latin typeface="Aptos"/>
               </a:rPr>
-              <a:t>Tracking URI utilisé dans les notebooks :
-http://194.238.26.226:5000
-But : conserver l’historique des expériences et justifier le choix du champion.</a:t>
+              <a:t>Tracking URI </a:t>
+            </a:r>
+            <a:r>
+              <a:rPr lang="fr-CA" sz="1100" b="0" dirty="0">
+                <a:solidFill>
+                  <a:srgbClr val="232B32"/>
+                </a:solidFill>
+                <a:latin typeface="Aptos"/>
+              </a:rPr>
+              <a:t>utilisé</a:t>
+            </a:r>
+            <a:r>
+              <a:rPr sz="1100" b="0" dirty="0">
+                <a:solidFill>
+                  <a:srgbClr val="232B32"/>
+                </a:solidFill>
+                <a:latin typeface="Aptos"/>
+              </a:rPr>
+              <a:t> dans les notebooks :
+</a:t>
+            </a:r>
+            <a:r>
+              <a:rPr sz="1100" b="0" dirty="0">
+                <a:solidFill>
+                  <a:srgbClr val="232B32"/>
+                </a:solidFill>
+                <a:latin typeface="Aptos"/>
+                <a:hlinkClick r:id="rId2"/>
+              </a:rPr>
+              <a:t>http://194.238.26.226:5000</a:t>
+            </a:r>
+            <a:r>
+              <a:rPr sz="1100" b="0" dirty="0">
+                <a:solidFill>
+                  <a:srgbClr val="232B32"/>
+                </a:solidFill>
+                <a:latin typeface="Aptos"/>
+              </a:rPr>
+              <a:t>
+But : conserver </a:t>
+            </a:r>
+            <a:r>
+              <a:rPr lang="fr-CA" sz="1100" b="0" dirty="0">
+                <a:solidFill>
+                  <a:srgbClr val="232B32"/>
+                </a:solidFill>
+                <a:latin typeface="Aptos"/>
+              </a:rPr>
+              <a:t>l’historique</a:t>
+            </a:r>
+            <a:r>
+              <a:rPr sz="1100" b="0" dirty="0">
+                <a:solidFill>
+                  <a:srgbClr val="232B32"/>
+                </a:solidFill>
+                <a:latin typeface="Aptos"/>
+              </a:rPr>
+              <a:t> des </a:t>
+            </a:r>
+            <a:r>
+              <a:rPr lang="fr-CA" sz="1100" b="0" dirty="0">
+                <a:solidFill>
+                  <a:srgbClr val="232B32"/>
+                </a:solidFill>
+                <a:latin typeface="Aptos"/>
+              </a:rPr>
+              <a:t>expériences</a:t>
+            </a:r>
+            <a:r>
+              <a:rPr sz="1100" b="0" dirty="0">
+                <a:solidFill>
+                  <a:srgbClr val="232B32"/>
+                </a:solidFill>
+                <a:latin typeface="Aptos"/>
+              </a:rPr>
+              <a:t> et justifier le choix du champion.</a:t>
             </a:r>
           </a:p>
         </p:txBody>
@@ -13012,8 +13085,8 @@
         </p:nvSpPr>
         <p:spPr>
           <a:xfrm>
-            <a:off x="7799831" y="3685032"/>
-            <a:ext cx="3557016" cy="758952"/>
+            <a:off x="7781544" y="3588479"/>
+            <a:ext cx="3557016" cy="430887"/>
           </a:xfrm>
           <a:prstGeom prst="rect">
             <a:avLst/>
@@ -13028,14 +13101,21 @@
           <a:p>
             <a:pPr algn="l"/>
             <a:r>
-              <a:rPr sz="1100" b="0">
+              <a:rPr sz="1100" b="0" dirty="0">
                 <a:solidFill>
                   <a:srgbClr val="232B32"/>
                 </a:solidFill>
                 <a:latin typeface="Aptos"/>
+                <a:hlinkClick r:id="rId2"/>
               </a:rPr>
               <a:t>https://usgs-earthquake-ai-9zbupyrcn6cwtmhms5xa9p.streamlit.app/</a:t>
             </a:r>
+            <a:endParaRPr sz="1100" b="0" dirty="0">
+              <a:solidFill>
+                <a:srgbClr val="232B32"/>
+              </a:solidFill>
+              <a:latin typeface="Aptos"/>
+            </a:endParaRPr>
           </a:p>
         </p:txBody>
       </p:sp>
@@ -14166,48 +14246,13 @@
       </p:cxnSp>
       <p:sp>
         <p:nvSpPr>
-          <p:cNvPr id="27" name="TextBox 26"/>
-          <p:cNvSpPr txBox="1"/>
-          <p:nvPr/>
-        </p:nvSpPr>
-        <p:spPr>
-          <a:xfrm>
-            <a:off x="685800" y="4160520"/>
-            <a:ext cx="3108960" cy="320040"/>
-          </a:xfrm>
-          <a:prstGeom prst="rect">
-            <a:avLst/>
-          </a:prstGeom>
-          <a:noFill/>
-        </p:spPr>
-        <p:txBody>
-          <a:bodyPr wrap="square" anchor="t">
-            <a:spAutoFit/>
-          </a:bodyPr>
-          <a:lstStyle/>
-          <a:p>
-            <a:pPr algn="l"/>
-            <a:r>
-              <a:rPr sz="1700" b="1">
-                <a:solidFill>
-                  <a:srgbClr val="36A2BF"/>
-                </a:solidFill>
-                <a:latin typeface="Aptos"/>
-              </a:rPr>
-              <a:t>Message à défendre à l’oral</a:t>
-            </a:r>
-          </a:p>
-        </p:txBody>
-      </p:sp>
-      <p:sp>
-        <p:nvSpPr>
           <p:cNvPr id="28" name="TextBox 27"/>
           <p:cNvSpPr txBox="1"/>
           <p:nvPr/>
         </p:nvSpPr>
         <p:spPr>
           <a:xfrm>
-            <a:off x="685800" y="4617720"/>
+            <a:off x="685800" y="4232295"/>
             <a:ext cx="10698480" cy="960120"/>
           </a:xfrm>
           <a:prstGeom prst="rect">

--- a/Presentation_TP_USGS_Earthquake_AI_FINAL.pptx
+++ b/Presentation_TP_USGS_Earthquake_AI_FINAL.pptx
@@ -320,7 +320,7 @@
           <a:p>
             <a:fld id="{5BCAD085-E8A6-8845-BD4E-CB4CCA059FC4}" type="datetimeFigureOut">
               <a:rPr lang="en-US" smtClean="0"/>
-              <a:t>10/7/2026</a:t>
+              <a:t>10/12/2026</a:t>
             </a:fld>
             <a:endParaRPr lang="en-US"/>
           </a:p>
@@ -488,7 +488,7 @@
           <a:p>
             <a:fld id="{5BCAD085-E8A6-8845-BD4E-CB4CCA059FC4}" type="datetimeFigureOut">
               <a:rPr lang="en-US" smtClean="0"/>
-              <a:t>10/7/2026</a:t>
+              <a:t>10/12/2026</a:t>
             </a:fld>
             <a:endParaRPr lang="en-US"/>
           </a:p>
@@ -666,7 +666,7 @@
           <a:p>
             <a:fld id="{5BCAD085-E8A6-8845-BD4E-CB4CCA059FC4}" type="datetimeFigureOut">
               <a:rPr lang="en-US" smtClean="0"/>
-              <a:t>10/7/2026</a:t>
+              <a:t>10/12/2026</a:t>
             </a:fld>
             <a:endParaRPr lang="en-US"/>
           </a:p>
@@ -834,7 +834,7 @@
           <a:p>
             <a:fld id="{5BCAD085-E8A6-8845-BD4E-CB4CCA059FC4}" type="datetimeFigureOut">
               <a:rPr lang="en-US" smtClean="0"/>
-              <a:t>10/7/2026</a:t>
+              <a:t>10/12/2026</a:t>
             </a:fld>
             <a:endParaRPr lang="en-US"/>
           </a:p>
@@ -1079,7 +1079,7 @@
           <a:p>
             <a:fld id="{5BCAD085-E8A6-8845-BD4E-CB4CCA059FC4}" type="datetimeFigureOut">
               <a:rPr lang="en-US" smtClean="0"/>
-              <a:t>10/7/2026</a:t>
+              <a:t>10/12/2026</a:t>
             </a:fld>
             <a:endParaRPr lang="en-US"/>
           </a:p>
@@ -1364,7 +1364,7 @@
           <a:p>
             <a:fld id="{5BCAD085-E8A6-8845-BD4E-CB4CCA059FC4}" type="datetimeFigureOut">
               <a:rPr lang="en-US" smtClean="0"/>
-              <a:t>10/7/2026</a:t>
+              <a:t>10/12/2026</a:t>
             </a:fld>
             <a:endParaRPr lang="en-US"/>
           </a:p>
@@ -1783,7 +1783,7 @@
           <a:p>
             <a:fld id="{5BCAD085-E8A6-8845-BD4E-CB4CCA059FC4}" type="datetimeFigureOut">
               <a:rPr lang="en-US" smtClean="0"/>
-              <a:t>10/7/2026</a:t>
+              <a:t>10/12/2026</a:t>
             </a:fld>
             <a:endParaRPr lang="en-US"/>
           </a:p>
@@ -1900,7 +1900,7 @@
           <a:p>
             <a:fld id="{5BCAD085-E8A6-8845-BD4E-CB4CCA059FC4}" type="datetimeFigureOut">
               <a:rPr lang="en-US" smtClean="0"/>
-              <a:t>10/7/2026</a:t>
+              <a:t>10/12/2026</a:t>
             </a:fld>
             <a:endParaRPr lang="en-US"/>
           </a:p>
@@ -1995,7 +1995,7 @@
           <a:p>
             <a:fld id="{5BCAD085-E8A6-8845-BD4E-CB4CCA059FC4}" type="datetimeFigureOut">
               <a:rPr lang="en-US" smtClean="0"/>
-              <a:t>10/7/2026</a:t>
+              <a:t>10/12/2026</a:t>
             </a:fld>
             <a:endParaRPr lang="en-US"/>
           </a:p>
@@ -2270,7 +2270,7 @@
           <a:p>
             <a:fld id="{5BCAD085-E8A6-8845-BD4E-CB4CCA059FC4}" type="datetimeFigureOut">
               <a:rPr lang="en-US" smtClean="0"/>
-              <a:t>10/7/2026</a:t>
+              <a:t>10/12/2026</a:t>
             </a:fld>
             <a:endParaRPr lang="en-US"/>
           </a:p>
@@ -2522,7 +2522,7 @@
           <a:p>
             <a:fld id="{5BCAD085-E8A6-8845-BD4E-CB4CCA059FC4}" type="datetimeFigureOut">
               <a:rPr lang="en-US" smtClean="0"/>
-              <a:t>10/7/2026</a:t>
+              <a:t>10/12/2026</a:t>
             </a:fld>
             <a:endParaRPr lang="en-US"/>
           </a:p>
@@ -2733,7 +2733,7 @@
           <a:p>
             <a:fld id="{5BCAD085-E8A6-8845-BD4E-CB4CCA059FC4}" type="datetimeFigureOut">
               <a:rPr lang="en-US" smtClean="0"/>
-              <a:t>10/7/2026</a:t>
+              <a:t>10/12/2026</a:t>
             </a:fld>
             <a:endParaRPr lang="en-US"/>
           </a:p>
@@ -3929,63 +3929,83 @@
         <p:spPr>
           <a:xfrm>
             <a:off x="731520" y="5091761"/>
-            <a:ext cx="10607040" cy="307777"/>
-          </a:xfrm>
-          <a:prstGeom prst="rect">
-            <a:avLst/>
-          </a:prstGeom>
-          <a:noFill/>
-        </p:spPr>
-        <p:txBody>
-          <a:bodyPr wrap="square" anchor="t">
-            <a:spAutoFit/>
-          </a:bodyPr>
-          <a:lstStyle/>
+            <a:ext cx="10607040" cy="738664"/>
+          </a:xfrm>
+          <a:prstGeom prst="rect">
+            <a:avLst/>
+          </a:prstGeom>
+          <a:noFill/>
+        </p:spPr>
+        <p:txBody>
+          <a:bodyPr wrap="square" anchor="t">
+            <a:spAutoFit/>
+          </a:bodyPr>
+          <a:lstStyle/>
+          <a:p>
+            <a:r>
+              <a:rPr lang="fr-CA" sz="1400" b="1" dirty="0">
+                <a:solidFill>
+                  <a:srgbClr val="FFFFFF"/>
+                </a:solidFill>
+                <a:latin typeface="Aptos"/>
+              </a:rPr>
+              <a:t>Technique d’apprentissage automatique 420-74</a:t>
+            </a:r>
+          </a:p>
           <a:p>
             <a:pPr algn="l"/>
-            <a:r>
-              <a:rPr sz="1400" b="1" dirty="0">
-                <a:solidFill>
-                  <a:srgbClr val="FFFFFF"/>
-                </a:solidFill>
-                <a:latin typeface="Aptos"/>
-              </a:rPr>
-              <a:t>Données USGS 2025  •  Classification  •  </a:t>
-            </a:r>
-            <a:r>
-              <a:rPr sz="1400" b="1" dirty="0" err="1">
-                <a:solidFill>
-                  <a:srgbClr val="FFFFFF"/>
-                </a:solidFill>
-                <a:latin typeface="Aptos"/>
-              </a:rPr>
-              <a:t>Régression</a:t>
-            </a:r>
-            <a:r>
-              <a:rPr sz="1400" b="1" dirty="0">
-                <a:solidFill>
-                  <a:srgbClr val="FFFFFF"/>
-                </a:solidFill>
-                <a:latin typeface="Aptos"/>
-              </a:rPr>
-              <a:t>  •  </a:t>
-            </a:r>
-            <a:r>
-              <a:rPr sz="1400" b="1" dirty="0" err="1">
-                <a:solidFill>
-                  <a:srgbClr val="FFFFFF"/>
-                </a:solidFill>
-                <a:latin typeface="Aptos"/>
-              </a:rPr>
-              <a:t>Règles</a:t>
-            </a:r>
-            <a:endParaRPr sz="1400" b="1" dirty="0">
+            <a:endParaRPr lang="fr-CA" sz="1400" b="1" dirty="0">
               <a:solidFill>
                 <a:srgbClr val="FFFFFF"/>
               </a:solidFill>
               <a:latin typeface="Aptos"/>
             </a:endParaRPr>
           </a:p>
+          <a:p>
+            <a:pPr algn="l"/>
+            <a:r>
+              <a:rPr sz="1400" b="1" dirty="0">
+                <a:solidFill>
+                  <a:srgbClr val="FFFFFF"/>
+                </a:solidFill>
+                <a:latin typeface="Aptos"/>
+              </a:rPr>
+              <a:t>Données USGS 2025  •  Classification  •  </a:t>
+            </a:r>
+            <a:r>
+              <a:rPr sz="1400" b="1" dirty="0" err="1">
+                <a:solidFill>
+                  <a:srgbClr val="FFFFFF"/>
+                </a:solidFill>
+                <a:latin typeface="Aptos"/>
+              </a:rPr>
+              <a:t>Régression</a:t>
+            </a:r>
+            <a:r>
+              <a:rPr sz="1400" b="1" dirty="0">
+                <a:solidFill>
+                  <a:srgbClr val="FFFFFF"/>
+                </a:solidFill>
+                <a:latin typeface="Aptos"/>
+              </a:rPr>
+              <a:t>  •  </a:t>
+            </a:r>
+            <a:r>
+              <a:rPr sz="1400" b="1" dirty="0" err="1">
+                <a:solidFill>
+                  <a:srgbClr val="FFFFFF"/>
+                </a:solidFill>
+                <a:latin typeface="Aptos"/>
+              </a:rPr>
+              <a:t>Règles</a:t>
+            </a:r>
+            <a:endParaRPr lang="fr-CA" sz="1400" b="1" dirty="0">
+              <a:solidFill>
+                <a:srgbClr val="FFFFFF"/>
+              </a:solidFill>
+              <a:latin typeface="Aptos"/>
+            </a:endParaRPr>
+          </a:p>
         </p:txBody>
       </p:sp>
       <p:sp>
@@ -4067,26 +4087,58 @@
           <a:p>
             <a:pPr algn="ctr"/>
             <a:r>
-              <a:rPr lang="fr-CA" sz="1400" b="0" dirty="0">
+              <a:rPr lang="fr-CA" sz="1400" b="1" dirty="0">
                 <a:solidFill>
                   <a:schemeClr val="bg1"/>
                 </a:solidFill>
-                <a:latin typeface="Aptos"/>
-              </a:rPr>
-              <a:t> et </a:t>
-            </a:r>
+              </a:rPr>
+              <a:t>Tarek </a:t>
+            </a:r>
+            <a:r>
+              <a:rPr lang="fr-CA" sz="1400" b="1" dirty="0" err="1">
+                <a:solidFill>
+                  <a:schemeClr val="bg1"/>
+                </a:solidFill>
+              </a:rPr>
+              <a:t>Alsemaan</a:t>
+            </a:r>
+            <a:endParaRPr lang="fr-CA" sz="1400" b="1" dirty="0">
+              <a:solidFill>
+                <a:schemeClr val="bg1"/>
+              </a:solidFill>
+            </a:endParaRPr>
           </a:p>
           <a:p>
             <a:pPr algn="ctr"/>
             <a:r>
-              <a:rPr lang="fr-CA" sz="1400" b="0" dirty="0">
+              <a:rPr lang="fr-CA" sz="1400" b="1" dirty="0" err="1">
                 <a:solidFill>
                   <a:schemeClr val="bg1"/>
                 </a:solidFill>
-                <a:latin typeface="Aptos"/>
-              </a:rPr>
-              <a:t>Tarek Alsemaan</a:t>
-            </a:r>
+              </a:rPr>
+              <a:t>Nejib</a:t>
+            </a:r>
+            <a:r>
+              <a:rPr lang="fr-CA" sz="1400" b="1" dirty="0">
+                <a:solidFill>
+                  <a:schemeClr val="bg1"/>
+                </a:solidFill>
+              </a:rPr>
+              <a:t> </a:t>
+            </a:r>
+            <a:r>
+              <a:rPr lang="fr-CA" sz="1400" b="1" dirty="0" err="1">
+                <a:solidFill>
+                  <a:schemeClr val="bg1"/>
+                </a:solidFill>
+              </a:rPr>
+              <a:t>Mlaihi</a:t>
+            </a:r>
+            <a:endParaRPr lang="fr-CA" sz="1400" b="1" dirty="0">
+              <a:solidFill>
+                <a:schemeClr val="bg1"/>
+              </a:solidFill>
+            </a:endParaRPr>
           </a:p>
           <a:p>
             <a:pPr algn="ctr"/>
@@ -14355,8 +14407,8 @@
         </p:nvSpPr>
         <p:spPr>
           <a:xfrm>
-            <a:off x="594360" y="384048"/>
-            <a:ext cx="10698480" cy="502920"/>
+            <a:off x="685800" y="377018"/>
+            <a:ext cx="10698480" cy="523220"/>
           </a:xfrm>
           <a:prstGeom prst="rect">
             <a:avLst/>
@@ -14371,14 +14423,20 @@
           <a:p>
             <a:pPr algn="l"/>
             <a:r>
-              <a:rPr sz="2800" b="1">
+              <a:rPr lang="fr-CA" sz="2800" b="1" dirty="0">
                 <a:solidFill>
                   <a:srgbClr val="0F2238"/>
                 </a:solidFill>
                 <a:latin typeface="Aptos"/>
               </a:rPr>
-              <a:t>Le TP en une vue</a:t>
-            </a:r>
+              <a:t>Objectif:</a:t>
+            </a:r>
+            <a:endParaRPr sz="2800" b="1" dirty="0">
+              <a:solidFill>
+                <a:srgbClr val="0F2238"/>
+              </a:solidFill>
+              <a:latin typeface="Aptos"/>
+            </a:endParaRPr>
           </a:p>
         </p:txBody>
       </p:sp>
@@ -14434,8 +14492,8 @@
         </p:nvSpPr>
         <p:spPr>
           <a:xfrm>
-            <a:off x="594360" y="1060704"/>
-            <a:ext cx="10881360" cy="384048"/>
+            <a:off x="594360" y="1030986"/>
+            <a:ext cx="10881360" cy="461665"/>
           </a:xfrm>
           <a:prstGeom prst="rect">
             <a:avLst/>
@@ -14450,14 +14508,20 @@
           <a:p>
             <a:pPr algn="l"/>
             <a:r>
-              <a:rPr sz="1200" b="0">
+              <a:rPr lang="fr-CA" sz="1200" b="0" dirty="0">
                 <a:solidFill>
                   <a:srgbClr val="626F7B"/>
                 </a:solidFill>
                 <a:latin typeface="Aptos"/>
               </a:rPr>
-              <a:t>Chaque notebook répond à une question différente — donc les métriques importantes changent.</a:t>
-            </a:r>
+              <a:t>Développer, évaluer et comparer des modèles supervisés de classification et de régression linéaire, utiliser la validation croisée pour valider leurs performances, suivre les expérimentations avec MLflow et sélectionner le modèle champion selon les métriques d'évaluation.</a:t>
+            </a:r>
+            <a:endParaRPr sz="1200" b="0" dirty="0">
+              <a:solidFill>
+                <a:srgbClr val="626F7B"/>
+              </a:solidFill>
+              <a:latin typeface="Aptos"/>
+            </a:endParaRPr>
           </a:p>
         </p:txBody>
       </p:sp>
@@ -16527,7 +16591,7 @@
         <p:spPr>
           <a:xfrm>
             <a:off x="594360" y="1060704"/>
-            <a:ext cx="10881360" cy="384048"/>
+            <a:ext cx="10881360" cy="1754326"/>
           </a:xfrm>
           <a:prstGeom prst="rect">
             <a:avLst/>
@@ -16542,14 +16606,413 @@
           <a:p>
             <a:pPr algn="l"/>
             <a:r>
-              <a:rPr sz="1200" b="0">
+              <a:rPr sz="1200" b="1" dirty="0">
                 <a:solidFill>
                   <a:srgbClr val="626F7B"/>
                 </a:solidFill>
                 <a:latin typeface="Aptos"/>
               </a:rPr>
-              <a:t>Objectif : Faible / Moyen / Élevé. Classe Élevé très rare : 29 cas dans le test.</a:t>
-            </a:r>
+              <a:t>Objectif : </a:t>
+            </a:r>
+            <a:r>
+              <a:rPr lang="fr-CA" sz="1200" dirty="0"/>
+              <a:t>Entrainer et évaluer et comparer des modèles d’apprentissage automatique supervisé (classification) pour prédire le </a:t>
+            </a:r>
+            <a:r>
+              <a:rPr lang="fr-CA" sz="1200" b="1" dirty="0"/>
+              <a:t>niveau de risque des séismes</a:t>
+            </a:r>
+            <a:r>
+              <a:rPr lang="fr-CA" sz="1200" dirty="0"/>
+              <a:t> en fonction de leur magnitude. </a:t>
+            </a:r>
+            <a:r>
+              <a:rPr sz="1200" b="0" dirty="0" err="1">
+                <a:solidFill>
+                  <a:srgbClr val="626F7B"/>
+                </a:solidFill>
+                <a:latin typeface="Aptos"/>
+              </a:rPr>
+              <a:t>Faible</a:t>
+            </a:r>
+            <a:r>
+              <a:rPr sz="1200" b="0" dirty="0">
+                <a:solidFill>
+                  <a:srgbClr val="626F7B"/>
+                </a:solidFill>
+                <a:latin typeface="Aptos"/>
+              </a:rPr>
+              <a:t> / </a:t>
+            </a:r>
+            <a:r>
+              <a:rPr sz="1200" b="0" dirty="0" err="1">
+                <a:solidFill>
+                  <a:srgbClr val="626F7B"/>
+                </a:solidFill>
+                <a:latin typeface="Aptos"/>
+              </a:rPr>
+              <a:t>Moyen</a:t>
+            </a:r>
+            <a:r>
+              <a:rPr sz="1200" b="0" dirty="0">
+                <a:solidFill>
+                  <a:srgbClr val="626F7B"/>
+                </a:solidFill>
+                <a:latin typeface="Aptos"/>
+              </a:rPr>
+              <a:t> / </a:t>
+            </a:r>
+            <a:r>
+              <a:rPr sz="1200" b="0" dirty="0" err="1">
+                <a:solidFill>
+                  <a:srgbClr val="626F7B"/>
+                </a:solidFill>
+                <a:latin typeface="Aptos"/>
+              </a:rPr>
+              <a:t>Élevé</a:t>
+            </a:r>
+            <a:r>
+              <a:rPr sz="1200" b="0" dirty="0">
+                <a:solidFill>
+                  <a:srgbClr val="626F7B"/>
+                </a:solidFill>
+                <a:latin typeface="Aptos"/>
+              </a:rPr>
+              <a:t>. </a:t>
+            </a:r>
+            <a:endParaRPr lang="fr-CA" sz="1200" b="0" dirty="0">
+              <a:solidFill>
+                <a:srgbClr val="626F7B"/>
+              </a:solidFill>
+              <a:latin typeface="Aptos"/>
+            </a:endParaRPr>
+          </a:p>
+          <a:p>
+            <a:pPr algn="l"/>
+            <a:endParaRPr lang="fr-CA" sz="1200" dirty="0">
+              <a:solidFill>
+                <a:srgbClr val="626F7B"/>
+              </a:solidFill>
+              <a:latin typeface="Aptos"/>
+            </a:endParaRPr>
+          </a:p>
+          <a:p>
+            <a:pPr algn="l"/>
+            <a:r>
+              <a:rPr lang="fr-CA" sz="1200" b="1" dirty="0">
+                <a:solidFill>
+                  <a:srgbClr val="626F7B"/>
+                </a:solidFill>
+                <a:latin typeface="Aptos"/>
+              </a:rPr>
+              <a:t>Variables conservées :</a:t>
+            </a:r>
+            <a:r>
+              <a:rPr lang="fr-CA" sz="1200" dirty="0">
+                <a:solidFill>
+                  <a:srgbClr val="626F7B"/>
+                </a:solidFill>
+                <a:latin typeface="Aptos"/>
+              </a:rPr>
+              <a:t> Le modèle s'appuie sur des données géophysiques et spatiales (</a:t>
+            </a:r>
+            <a:r>
+              <a:rPr lang="fr-CA" sz="1200" b="1" dirty="0">
+                <a:solidFill>
+                  <a:srgbClr val="626F7B"/>
+                </a:solidFill>
+                <a:latin typeface="Aptos"/>
+              </a:rPr>
+              <a:t>latitude</a:t>
+            </a:r>
+            <a:r>
+              <a:rPr lang="fr-CA" sz="1200" dirty="0">
+                <a:solidFill>
+                  <a:srgbClr val="626F7B"/>
+                </a:solidFill>
+                <a:latin typeface="Aptos"/>
+              </a:rPr>
+              <a:t>, </a:t>
+            </a:r>
+            <a:r>
+              <a:rPr lang="fr-CA" sz="1200" b="1" dirty="0">
+                <a:solidFill>
+                  <a:srgbClr val="626F7B"/>
+                </a:solidFill>
+                <a:latin typeface="Aptos"/>
+              </a:rPr>
+              <a:t>longitude</a:t>
+            </a:r>
+            <a:r>
+              <a:rPr lang="fr-CA" sz="1200" dirty="0">
+                <a:solidFill>
+                  <a:srgbClr val="626F7B"/>
+                </a:solidFill>
+                <a:latin typeface="Aptos"/>
+              </a:rPr>
+              <a:t>, </a:t>
+            </a:r>
+            <a:r>
+              <a:rPr lang="fr-CA" sz="1200" b="1" dirty="0" err="1">
+                <a:solidFill>
+                  <a:srgbClr val="626F7B"/>
+                </a:solidFill>
+                <a:latin typeface="Aptos"/>
+              </a:rPr>
+              <a:t>depth</a:t>
+            </a:r>
+            <a:r>
+              <a:rPr lang="fr-CA" sz="1200" dirty="0">
+                <a:solidFill>
+                  <a:srgbClr val="626F7B"/>
+                </a:solidFill>
+                <a:latin typeface="Aptos"/>
+              </a:rPr>
+              <a:t>), </a:t>
+            </a:r>
+          </a:p>
+          <a:p>
+            <a:pPr algn="l"/>
+            <a:r>
+              <a:rPr lang="fr-CA" sz="1200" dirty="0">
+                <a:solidFill>
+                  <a:srgbClr val="626F7B"/>
+                </a:solidFill>
+                <a:latin typeface="Aptos"/>
+              </a:rPr>
+              <a:t>des métriques de qualité de mesure (</a:t>
+            </a:r>
+            <a:r>
+              <a:rPr lang="fr-CA" sz="1200" b="1" dirty="0" err="1">
+                <a:solidFill>
+                  <a:srgbClr val="626F7B"/>
+                </a:solidFill>
+                <a:latin typeface="Aptos"/>
+              </a:rPr>
+              <a:t>dmin</a:t>
+            </a:r>
+            <a:r>
+              <a:rPr lang="fr-CA" sz="1200" dirty="0">
+                <a:solidFill>
+                  <a:srgbClr val="626F7B"/>
+                </a:solidFill>
+                <a:latin typeface="Aptos"/>
+              </a:rPr>
+              <a:t>, </a:t>
+            </a:r>
+            <a:r>
+              <a:rPr lang="fr-CA" sz="1200" b="1" dirty="0">
+                <a:solidFill>
+                  <a:srgbClr val="626F7B"/>
+                </a:solidFill>
+                <a:latin typeface="Aptos"/>
+              </a:rPr>
+              <a:t>gap</a:t>
+            </a:r>
+            <a:r>
+              <a:rPr lang="fr-CA" sz="1200" dirty="0">
+                <a:solidFill>
+                  <a:srgbClr val="626F7B"/>
+                </a:solidFill>
+                <a:latin typeface="Aptos"/>
+              </a:rPr>
+              <a:t>, </a:t>
+            </a:r>
+            <a:r>
+              <a:rPr lang="fr-CA" sz="1200" b="1" dirty="0" err="1">
+                <a:solidFill>
+                  <a:srgbClr val="626F7B"/>
+                </a:solidFill>
+                <a:latin typeface="Aptos"/>
+              </a:rPr>
+              <a:t>rms</a:t>
+            </a:r>
+            <a:r>
+              <a:rPr lang="fr-CA" sz="1200" dirty="0">
+                <a:solidFill>
+                  <a:srgbClr val="626F7B"/>
+                </a:solidFill>
+                <a:latin typeface="Aptos"/>
+              </a:rPr>
+              <a:t>, </a:t>
+            </a:r>
+            <a:r>
+              <a:rPr lang="fr-CA" sz="1200" b="1" dirty="0" err="1">
+                <a:solidFill>
+                  <a:srgbClr val="626F7B"/>
+                </a:solidFill>
+                <a:latin typeface="Aptos"/>
+              </a:rPr>
+              <a:t>nst</a:t>
+            </a:r>
+            <a:r>
+              <a:rPr lang="fr-CA" sz="1200" dirty="0">
+                <a:solidFill>
+                  <a:srgbClr val="626F7B"/>
+                </a:solidFill>
+                <a:latin typeface="Aptos"/>
+              </a:rPr>
+              <a:t>) et des contextes techniques (</a:t>
+            </a:r>
+            <a:r>
+              <a:rPr lang="fr-CA" sz="1200" b="1" dirty="0">
+                <a:solidFill>
+                  <a:srgbClr val="626F7B"/>
+                </a:solidFill>
+                <a:latin typeface="Aptos"/>
+              </a:rPr>
+              <a:t>net</a:t>
+            </a:r>
+            <a:r>
+              <a:rPr lang="fr-CA" sz="1200" dirty="0">
+                <a:solidFill>
+                  <a:srgbClr val="626F7B"/>
+                </a:solidFill>
+                <a:latin typeface="Aptos"/>
+              </a:rPr>
+              <a:t>, </a:t>
+            </a:r>
+            <a:r>
+              <a:rPr lang="fr-CA" sz="1200" b="1" dirty="0" err="1">
+                <a:solidFill>
+                  <a:srgbClr val="626F7B"/>
+                </a:solidFill>
+                <a:latin typeface="Aptos"/>
+              </a:rPr>
+              <a:t>magType</a:t>
+            </a:r>
+            <a:r>
+              <a:rPr lang="fr-CA" sz="1200" dirty="0">
+                <a:solidFill>
+                  <a:srgbClr val="626F7B"/>
+                </a:solidFill>
+                <a:latin typeface="Aptos"/>
+              </a:rPr>
+              <a:t>, type).</a:t>
+            </a:r>
+          </a:p>
+          <a:p>
+            <a:pPr algn="l"/>
+            <a:endParaRPr lang="fr-CA" sz="1200" dirty="0">
+              <a:solidFill>
+                <a:srgbClr val="626F7B"/>
+              </a:solidFill>
+              <a:latin typeface="Aptos"/>
+            </a:endParaRPr>
+          </a:p>
+          <a:p>
+            <a:pPr algn="l"/>
+            <a:r>
+              <a:rPr lang="fr-CA" sz="1200" b="1" dirty="0">
+                <a:solidFill>
+                  <a:srgbClr val="626F7B"/>
+                </a:solidFill>
+                <a:latin typeface="Aptos"/>
+              </a:rPr>
+              <a:t>Exclusion de la cible et des identifiants : </a:t>
+            </a:r>
+            <a:r>
+              <a:rPr lang="fr-CA" sz="1200" dirty="0">
+                <a:solidFill>
+                  <a:srgbClr val="626F7B"/>
+                </a:solidFill>
+                <a:latin typeface="Aptos"/>
+              </a:rPr>
+              <a:t>La variable source </a:t>
+            </a:r>
+            <a:r>
+              <a:rPr lang="fr-CA" sz="1200" b="1" dirty="0" err="1">
+                <a:solidFill>
+                  <a:srgbClr val="626F7B"/>
+                </a:solidFill>
+                <a:latin typeface="Aptos"/>
+              </a:rPr>
+              <a:t>mag</a:t>
+            </a:r>
+            <a:r>
+              <a:rPr lang="fr-CA" sz="1200" dirty="0">
+                <a:solidFill>
+                  <a:srgbClr val="626F7B"/>
+                </a:solidFill>
+                <a:latin typeface="Aptos"/>
+              </a:rPr>
+              <a:t> est retirée (puisqu'elle a servi à construire la cible),</a:t>
+            </a:r>
+          </a:p>
+          <a:p>
+            <a:pPr algn="l"/>
+            <a:r>
+              <a:rPr lang="fr-CA" sz="1200" dirty="0">
+                <a:solidFill>
+                  <a:srgbClr val="626F7B"/>
+                </a:solidFill>
+                <a:latin typeface="Aptos"/>
+              </a:rPr>
+              <a:t> tout comme les identifiants uniques (</a:t>
+            </a:r>
+            <a:r>
+              <a:rPr lang="fr-CA" sz="1200" b="1" dirty="0">
+                <a:solidFill>
+                  <a:srgbClr val="626F7B"/>
+                </a:solidFill>
+                <a:latin typeface="Aptos"/>
+              </a:rPr>
+              <a:t>url</a:t>
+            </a:r>
+            <a:r>
+              <a:rPr lang="fr-CA" sz="1200" dirty="0">
+                <a:solidFill>
+                  <a:srgbClr val="626F7B"/>
+                </a:solidFill>
+                <a:latin typeface="Aptos"/>
+              </a:rPr>
+              <a:t>, </a:t>
+            </a:r>
+            <a:r>
+              <a:rPr lang="fr-CA" sz="1200" b="1" dirty="0" err="1">
+                <a:solidFill>
+                  <a:srgbClr val="626F7B"/>
+                </a:solidFill>
+                <a:latin typeface="Aptos"/>
+              </a:rPr>
+              <a:t>event_id</a:t>
+            </a:r>
+            <a:r>
+              <a:rPr lang="fr-CA" sz="1200" dirty="0">
+                <a:solidFill>
+                  <a:srgbClr val="626F7B"/>
+                </a:solidFill>
+                <a:latin typeface="Aptos"/>
+              </a:rPr>
+              <a:t>, etc.) et les variables à variance nulle (</a:t>
+            </a:r>
+            <a:r>
+              <a:rPr lang="fr-CA" sz="1200" b="1" dirty="0" err="1">
+                <a:solidFill>
+                  <a:srgbClr val="626F7B"/>
+                </a:solidFill>
+                <a:latin typeface="Aptos"/>
+              </a:rPr>
+              <a:t>year</a:t>
+            </a:r>
+            <a:r>
+              <a:rPr lang="fr-CA" sz="1200" dirty="0">
+                <a:solidFill>
+                  <a:srgbClr val="626F7B"/>
+                </a:solidFill>
+                <a:latin typeface="Aptos"/>
+              </a:rPr>
+              <a:t>).</a:t>
+            </a:r>
+          </a:p>
+          <a:p>
+            <a:pPr algn="l"/>
+            <a:endParaRPr sz="1200" b="0" dirty="0">
+              <a:solidFill>
+                <a:srgbClr val="626F7B"/>
+              </a:solidFill>
+              <a:latin typeface="Aptos"/>
+            </a:endParaRPr>
           </a:p>
         </p:txBody>
       </p:sp>
@@ -16596,7 +17059,7 @@
         </p:nvSpPr>
         <p:spPr>
           <a:xfrm>
-            <a:off x="640080" y="1389888"/>
+            <a:off x="640080" y="2668079"/>
             <a:ext cx="2194560" cy="658368"/>
           </a:xfrm>
           <a:prstGeom prst="roundRect">
@@ -16629,8 +17092,8 @@
           <a:bodyPr rtlCol="0" anchor="ctr"/>
           <a:lstStyle/>
           <a:p>
-            <a:pPr algn="ctr"/>
-            <a:endParaRPr/>
+            <a:pPr algn="justLow"/>
+            <a:endParaRPr dirty="0"/>
           </a:p>
         </p:txBody>
       </p:sp>
@@ -16642,7 +17105,7 @@
         </p:nvSpPr>
         <p:spPr>
           <a:xfrm>
-            <a:off x="749808" y="1481328"/>
+            <a:off x="710480" y="2897172"/>
             <a:ext cx="1141171" cy="228600"/>
           </a:xfrm>
           <a:prstGeom prst="rect">
@@ -16656,9 +17119,9 @@
           </a:bodyPr>
           <a:lstStyle/>
           <a:p>
-            <a:pPr algn="l"/>
-            <a:r>
-              <a:rPr sz="900" b="1">
+            <a:pPr algn="just"/>
+            <a:r>
+              <a:rPr sz="900" b="1" dirty="0">
                 <a:solidFill>
                   <a:srgbClr val="626F7B"/>
                 </a:solidFill>
@@ -16677,21 +17140,21 @@
         </p:nvSpPr>
         <p:spPr>
           <a:xfrm>
-            <a:off x="1781251" y="1463040"/>
-            <a:ext cx="921715" cy="461665"/>
-          </a:xfrm>
-          <a:prstGeom prst="rect">
-            <a:avLst/>
-          </a:prstGeom>
-          <a:noFill/>
-        </p:spPr>
-        <p:txBody>
-          <a:bodyPr wrap="square" anchor="t">
-            <a:spAutoFit/>
-          </a:bodyPr>
-          <a:lstStyle/>
-          <a:p>
-            <a:pPr algn="r"/>
+            <a:off x="1469432" y="2878884"/>
+            <a:ext cx="1294789" cy="276999"/>
+          </a:xfrm>
+          <a:prstGeom prst="rect">
+            <a:avLst/>
+          </a:prstGeom>
+          <a:noFill/>
+        </p:spPr>
+        <p:txBody>
+          <a:bodyPr wrap="square" anchor="t">
+            <a:spAutoFit/>
+          </a:bodyPr>
+          <a:lstStyle/>
+          <a:p>
+            <a:pPr algn="justLow"/>
             <a:r>
               <a:rPr sz="1200" b="1" dirty="0">
                 <a:solidFill>
@@ -16712,7 +17175,7 @@
         </p:nvSpPr>
         <p:spPr>
           <a:xfrm>
-            <a:off x="2971800" y="1389888"/>
+            <a:off x="2971800" y="2668079"/>
             <a:ext cx="1965960" cy="658368"/>
           </a:xfrm>
           <a:prstGeom prst="roundRect">
@@ -16758,7 +17221,7 @@
         </p:nvSpPr>
         <p:spPr>
           <a:xfrm>
-            <a:off x="3081528" y="1481328"/>
+            <a:off x="3042200" y="2877503"/>
             <a:ext cx="1022299" cy="228600"/>
           </a:xfrm>
           <a:prstGeom prst="rect">
@@ -16774,7 +17237,7 @@
           <a:p>
             <a:pPr algn="l"/>
             <a:r>
-              <a:rPr sz="900" b="1">
+              <a:rPr sz="900" b="1" dirty="0">
                 <a:solidFill>
                   <a:srgbClr val="626F7B"/>
                 </a:solidFill>
@@ -16793,8 +17256,8 @@
         </p:nvSpPr>
         <p:spPr>
           <a:xfrm>
-            <a:off x="3994099" y="1463040"/>
-            <a:ext cx="825703" cy="274320"/>
+            <a:off x="3876116" y="2859215"/>
+            <a:ext cx="943660" cy="307777"/>
           </a:xfrm>
           <a:prstGeom prst="rect">
             <a:avLst/>
@@ -16809,7 +17272,7 @@
           <a:p>
             <a:pPr algn="r"/>
             <a:r>
-              <a:rPr sz="1700" b="1">
+              <a:rPr sz="1400" b="1" dirty="0">
                 <a:solidFill>
                   <a:srgbClr val="215E91"/>
                 </a:solidFill>
@@ -16828,7 +17291,7 @@
         </p:nvSpPr>
         <p:spPr>
           <a:xfrm>
-            <a:off x="5074920" y="1389888"/>
+            <a:off x="5074920" y="2668079"/>
             <a:ext cx="1965960" cy="658368"/>
           </a:xfrm>
           <a:prstGeom prst="roundRect">
@@ -16874,8 +17337,8 @@
         </p:nvSpPr>
         <p:spPr>
           <a:xfrm>
-            <a:off x="5184648" y="1481328"/>
-            <a:ext cx="1022299" cy="228600"/>
+            <a:off x="5088818" y="2856419"/>
+            <a:ext cx="1115339" cy="276999"/>
           </a:xfrm>
           <a:prstGeom prst="rect">
             <a:avLst/>
@@ -16890,7 +17353,7 @@
           <a:p>
             <a:pPr algn="l"/>
             <a:r>
-              <a:rPr sz="900" b="1">
+              <a:rPr sz="1200" b="1" dirty="0">
                 <a:solidFill>
                   <a:srgbClr val="626F7B"/>
                 </a:solidFill>
@@ -16909,30 +17372,54 @@
         </p:nvSpPr>
         <p:spPr>
           <a:xfrm>
-            <a:off x="6097219" y="1463040"/>
-            <a:ext cx="825703" cy="274320"/>
-          </a:xfrm>
-          <a:prstGeom prst="rect">
-            <a:avLst/>
-          </a:prstGeom>
-          <a:noFill/>
-        </p:spPr>
-        <p:txBody>
-          <a:bodyPr wrap="square" anchor="t">
-            <a:spAutoFit/>
-          </a:bodyPr>
-          <a:lstStyle/>
-          <a:p>
-            <a:pPr algn="r"/>
-            <a:r>
-              <a:rPr sz="1700" b="1">
+            <a:off x="6132296" y="2812122"/>
+            <a:ext cx="839895" cy="353943"/>
+          </a:xfrm>
+          <a:prstGeom prst="rect">
+            <a:avLst/>
+          </a:prstGeom>
+          <a:noFill/>
+        </p:spPr>
+        <p:txBody>
+          <a:bodyPr wrap="square" anchor="t">
+            <a:spAutoFit/>
+          </a:bodyPr>
+          <a:lstStyle/>
+          <a:p>
+            <a:pPr algn="ctr"/>
+            <a:r>
+              <a:rPr sz="1400" b="1" dirty="0">
                 <a:solidFill>
                   <a:srgbClr val="2E7D5A"/>
                 </a:solidFill>
                 <a:latin typeface="Aptos"/>
               </a:rPr>
-              <a:t>90,92 %</a:t>
-            </a:r>
+              <a:t>90,92</a:t>
+            </a:r>
+            <a:r>
+              <a:rPr sz="1700" b="1" dirty="0">
+                <a:solidFill>
+                  <a:srgbClr val="2E7D5A"/>
+                </a:solidFill>
+                <a:latin typeface="Aptos"/>
+              </a:rPr>
+              <a:t> </a:t>
+            </a:r>
+            <a:r>
+              <a:rPr sz="1400" b="1" dirty="0">
+                <a:solidFill>
+                  <a:srgbClr val="2E7D5A"/>
+                </a:solidFill>
+                <a:latin typeface="Aptos"/>
+              </a:rPr>
+              <a:t>%</a:t>
+            </a:r>
+            <a:endParaRPr sz="1700" b="1" dirty="0">
+              <a:solidFill>
+                <a:srgbClr val="2E7D5A"/>
+              </a:solidFill>
+              <a:latin typeface="Aptos"/>
+            </a:endParaRPr>
           </a:p>
         </p:txBody>
       </p:sp>
@@ -16944,7 +17431,7 @@
         </p:nvSpPr>
         <p:spPr>
           <a:xfrm>
-            <a:off x="7178040" y="1389888"/>
+            <a:off x="7178040" y="2668079"/>
             <a:ext cx="1965960" cy="658368"/>
           </a:xfrm>
           <a:prstGeom prst="roundRect">
@@ -16990,8 +17477,8 @@
         </p:nvSpPr>
         <p:spPr>
           <a:xfrm>
-            <a:off x="7287768" y="1481328"/>
-            <a:ext cx="1022299" cy="228600"/>
+            <a:off x="7260959" y="2848111"/>
+            <a:ext cx="1022299" cy="276999"/>
           </a:xfrm>
           <a:prstGeom prst="rect">
             <a:avLst/>
@@ -17006,7 +17493,7 @@
           <a:p>
             <a:pPr algn="l"/>
             <a:r>
-              <a:rPr sz="900" b="1">
+              <a:rPr sz="1200" b="1" dirty="0">
                 <a:solidFill>
                   <a:srgbClr val="626F7B"/>
                 </a:solidFill>
@@ -17025,23 +17512,23 @@
         </p:nvSpPr>
         <p:spPr>
           <a:xfrm>
-            <a:off x="8200339" y="1463040"/>
-            <a:ext cx="825703" cy="274320"/>
-          </a:xfrm>
-          <a:prstGeom prst="rect">
-            <a:avLst/>
-          </a:prstGeom>
-          <a:noFill/>
-        </p:spPr>
-        <p:txBody>
-          <a:bodyPr wrap="square" anchor="t">
-            <a:spAutoFit/>
-          </a:bodyPr>
-          <a:lstStyle/>
-          <a:p>
-            <a:pPr algn="r"/>
-            <a:r>
-              <a:rPr sz="1700" b="1">
+            <a:off x="8015084" y="2840648"/>
+            <a:ext cx="1019861" cy="307777"/>
+          </a:xfrm>
+          <a:prstGeom prst="rect">
+            <a:avLst/>
+          </a:prstGeom>
+          <a:noFill/>
+        </p:spPr>
+        <p:txBody>
+          <a:bodyPr wrap="square" anchor="t">
+            <a:spAutoFit/>
+          </a:bodyPr>
+          <a:lstStyle/>
+          <a:p>
+            <a:pPr algn="ctr"/>
+            <a:r>
+              <a:rPr sz="1400" b="1" dirty="0">
                 <a:solidFill>
                   <a:srgbClr val="36A2BF"/>
                 </a:solidFill>
@@ -17060,7 +17547,7 @@
         </p:nvSpPr>
         <p:spPr>
           <a:xfrm>
-            <a:off x="9281160" y="1389888"/>
+            <a:off x="9281160" y="2668079"/>
             <a:ext cx="1965960" cy="658368"/>
           </a:xfrm>
           <a:prstGeom prst="roundRect">
@@ -17106,30 +17593,53 @@
         </p:nvSpPr>
         <p:spPr>
           <a:xfrm>
-            <a:off x="9390888" y="1481328"/>
-            <a:ext cx="1022299" cy="228600"/>
-          </a:xfrm>
-          <a:prstGeom prst="rect">
-            <a:avLst/>
-          </a:prstGeom>
-          <a:noFill/>
-        </p:spPr>
-        <p:txBody>
-          <a:bodyPr wrap="square" anchor="t">
-            <a:spAutoFit/>
-          </a:bodyPr>
-          <a:lstStyle/>
-          <a:p>
-            <a:pPr algn="l"/>
-            <a:r>
-              <a:rPr sz="900" b="1">
+            <a:off x="9390888" y="2867671"/>
+            <a:ext cx="2194560" cy="276999"/>
+          </a:xfrm>
+          <a:prstGeom prst="rect">
+            <a:avLst/>
+          </a:prstGeom>
+          <a:noFill/>
+        </p:spPr>
+        <p:txBody>
+          <a:bodyPr wrap="square" numCol="2" anchor="t">
+            <a:spAutoFit/>
+          </a:bodyPr>
+          <a:lstStyle/>
+          <a:p>
+            <a:r>
+              <a:rPr sz="1200" b="1" dirty="0">
                 <a:solidFill>
                   <a:srgbClr val="626F7B"/>
                 </a:solidFill>
                 <a:latin typeface="Aptos"/>
               </a:rPr>
-              <a:t>Recall Élevé</a:t>
-            </a:r>
+              <a:t>Recall</a:t>
+            </a:r>
+            <a:r>
+              <a:rPr lang="fr-CA" sz="1200" b="1" dirty="0">
+                <a:solidFill>
+                  <a:srgbClr val="626F7B"/>
+                </a:solidFill>
+                <a:latin typeface="Aptos"/>
+              </a:rPr>
+              <a:t> É</a:t>
+            </a:r>
+            <a:r>
+              <a:rPr sz="1200" b="1" dirty="0" err="1">
+                <a:solidFill>
+                  <a:srgbClr val="626F7B"/>
+                </a:solidFill>
+                <a:latin typeface="Aptos"/>
+              </a:rPr>
+              <a:t>levé</a:t>
+            </a:r>
+            <a:endParaRPr sz="1200" b="1" dirty="0">
+              <a:solidFill>
+                <a:srgbClr val="626F7B"/>
+              </a:solidFill>
+              <a:latin typeface="Aptos"/>
+            </a:endParaRPr>
           </a:p>
         </p:txBody>
       </p:sp>
@@ -17141,23 +17651,23 @@
         </p:nvSpPr>
         <p:spPr>
           <a:xfrm>
-            <a:off x="10303459" y="1463040"/>
-            <a:ext cx="825703" cy="274320"/>
-          </a:xfrm>
-          <a:prstGeom prst="rect">
-            <a:avLst/>
-          </a:prstGeom>
-          <a:noFill/>
-        </p:spPr>
-        <p:txBody>
-          <a:bodyPr wrap="square" anchor="t">
-            <a:spAutoFit/>
-          </a:bodyPr>
-          <a:lstStyle/>
-          <a:p>
-            <a:pPr algn="r"/>
-            <a:r>
-              <a:rPr sz="1700" b="1">
+            <a:off x="10475697" y="2819887"/>
+            <a:ext cx="663271" cy="307777"/>
+          </a:xfrm>
+          <a:prstGeom prst="rect">
+            <a:avLst/>
+          </a:prstGeom>
+          <a:noFill/>
+        </p:spPr>
+        <p:txBody>
+          <a:bodyPr wrap="square" numCol="2" anchor="t">
+            <a:spAutoFit/>
+          </a:bodyPr>
+          <a:lstStyle/>
+          <a:p>
+            <a:pPr algn="ctr"/>
+            <a:r>
+              <a:rPr sz="1400" b="1" dirty="0">
                 <a:solidFill>
                   <a:srgbClr val="B44141"/>
                 </a:solidFill>
@@ -17174,10 +17684,16 @@
           <p:cNvGraphicFramePr>
             <a:graphicFrameLocks noGrp="1"/>
           </p:cNvGraphicFramePr>
-          <p:nvPr/>
+          <p:nvPr>
+            <p:extLst>
+              <p:ext uri="{D42A27DB-BD31-4B8C-83A1-F6EECF244321}">
+                <p14:modId xmlns:p14="http://schemas.microsoft.com/office/powerpoint/2010/main" val="1640312836"/>
+              </p:ext>
+            </p:extLst>
+          </p:nvPr>
         </p:nvGraphicFramePr>
         <p:xfrm>
-          <a:off x="640080" y="2331720"/>
+          <a:off x="733093" y="3653126"/>
           <a:ext cx="5440680" cy="2423160"/>
         </p:xfrm>
         <a:graphic>
@@ -17399,7 +17915,7 @@
                     <a:p>
                       <a:pPr algn="ctr"/>
                       <a:r>
-                        <a:rPr sz="1100" b="0">
+                        <a:rPr sz="1100" b="0" dirty="0">
                           <a:solidFill>
                             <a:srgbClr val="232B32"/>
                           </a:solidFill>
@@ -17620,7 +18136,7 @@
                     <a:p>
                       <a:pPr algn="ctr"/>
                       <a:r>
-                        <a:rPr sz="1100" b="0">
+                        <a:rPr sz="1100" b="1" dirty="0">
                           <a:solidFill>
                             <a:srgbClr val="232B32"/>
                           </a:solidFill>
@@ -17689,7 +18205,7 @@
                     <a:p>
                       <a:pPr algn="ctr"/>
                       <a:r>
-                        <a:rPr sz="1100" b="0">
+                        <a:rPr sz="1100" b="0" dirty="0">
                           <a:solidFill>
                             <a:srgbClr val="232B32"/>
                           </a:solidFill>
@@ -17723,8 +18239,8 @@
         </p:nvSpPr>
         <p:spPr>
           <a:xfrm>
-            <a:off x="6537960" y="2331720"/>
-            <a:ext cx="4709160" cy="2423160"/>
+            <a:off x="6509578" y="3602245"/>
+            <a:ext cx="4389120" cy="1362456"/>
           </a:xfrm>
           <a:prstGeom prst="roundRect">
             <a:avLst/>
@@ -17769,7 +18285,7 @@
         </p:nvSpPr>
         <p:spPr>
           <a:xfrm>
-            <a:off x="6702552" y="2478024"/>
+            <a:off x="6702552" y="3746386"/>
             <a:ext cx="4379976" cy="320040"/>
           </a:xfrm>
           <a:prstGeom prst="rect">
@@ -17804,8 +18320,8 @@
         </p:nvSpPr>
         <p:spPr>
           <a:xfrm>
-            <a:off x="6702552" y="2862072"/>
-            <a:ext cx="4379976" cy="1764792"/>
+            <a:off x="6702552" y="4041946"/>
+            <a:ext cx="4152261" cy="938719"/>
           </a:xfrm>
           <a:prstGeom prst="rect">
             <a:avLst/>
@@ -17820,14 +18336,38 @@
           <a:p>
             <a:pPr algn="l"/>
             <a:r>
-              <a:rPr sz="1100" b="0">
+              <a:rPr lang="fr-CA" sz="1100" b="0" dirty="0">
                 <a:solidFill>
                   <a:srgbClr val="232B32"/>
                 </a:solidFill>
                 <a:latin typeface="Aptos"/>
               </a:rPr>
-              <a:t>Le notebook choisit le champion avec le F1 macro moyen en validation croisée. Random Forest obtient le meilleur compromis et un recall élevé sur la classe rare.</a:t>
-            </a:r>
+              <a:t>Le modèle champion a été retenu sur la base du score F1 macro moyen calculé lors de la validation croisée. Parmi les modèles évalués, </a:t>
+            </a:r>
+            <a:r>
+              <a:rPr lang="fr-CA" sz="1100" b="0" dirty="0" err="1">
+                <a:solidFill>
+                  <a:srgbClr val="232B32"/>
+                </a:solidFill>
+                <a:latin typeface="Aptos"/>
+              </a:rPr>
+              <a:t>Random</a:t>
+            </a:r>
+            <a:r>
+              <a:rPr lang="fr-CA" sz="1100" b="0" dirty="0">
+                <a:solidFill>
+                  <a:srgbClr val="232B32"/>
+                </a:solidFill>
+                <a:latin typeface="Aptos"/>
+              </a:rPr>
+              <a:t> Forest offre les meilleures performances globales tout en maintenant un rappel élevé pour la classe minoritaire.</a:t>
+            </a:r>
+            <a:endParaRPr sz="1100" b="0" dirty="0">
+              <a:solidFill>
+                <a:srgbClr val="232B32"/>
+              </a:solidFill>
+              <a:latin typeface="Aptos"/>
+            </a:endParaRPr>
           </a:p>
         </p:txBody>
       </p:sp>
@@ -17839,7 +18379,7 @@
         </p:nvSpPr>
         <p:spPr>
           <a:xfrm>
-            <a:off x="6675120" y="5029200"/>
+            <a:off x="6675120" y="5176683"/>
             <a:ext cx="4389120" cy="292608"/>
           </a:xfrm>
           <a:prstGeom prst="rect">
@@ -17875,7 +18415,7 @@
         <p:spPr>
           <a:xfrm>
             <a:off x="6675120" y="5413248"/>
-            <a:ext cx="4389120" cy="658368"/>
+            <a:ext cx="4389120" cy="1015663"/>
           </a:xfrm>
           <a:prstGeom prst="rect">
             <a:avLst/>
@@ -17890,14 +18430,56 @@
           <a:p>
             <a:pPr algn="l"/>
             <a:r>
-              <a:rPr sz="1200" b="0">
+              <a:rPr lang="fr-CA" sz="1200" b="0" dirty="0">
                 <a:solidFill>
                   <a:srgbClr val="232B32"/>
                 </a:solidFill>
                 <a:latin typeface="Aptos"/>
               </a:rPr>
-              <a:t>Rater un vrai séisme « Élevé » est plus grave qu’une alerte supplémentaire. On privilégie donc le recall, tout en surveillant la faible precision de la classe Élevé (0,15).</a:t>
-            </a:r>
+              <a:t>Dans ce contexte, manquer un séisme appartenant à la classe « Élevé » est considéré comme plus critique que de générer une fausse alerte. Par conséquent, l'accent est mis sur l'optimisation du rappel (</a:t>
+            </a:r>
+            <a:r>
+              <a:rPr lang="fr-CA" sz="1200" b="0" dirty="0" err="1">
+                <a:solidFill>
+                  <a:srgbClr val="232B32"/>
+                </a:solidFill>
+                <a:latin typeface="Aptos"/>
+              </a:rPr>
+              <a:t>recall</a:t>
+            </a:r>
+            <a:r>
+              <a:rPr lang="fr-CA" sz="1200" b="0" dirty="0">
+                <a:solidFill>
+                  <a:srgbClr val="232B32"/>
+                </a:solidFill>
+                <a:latin typeface="Aptos"/>
+              </a:rPr>
+              <a:t>), tout en tenant compte de la faible précision (</a:t>
+            </a:r>
+            <a:r>
+              <a:rPr lang="fr-CA" sz="1200" b="0" dirty="0" err="1">
+                <a:solidFill>
+                  <a:srgbClr val="232B32"/>
+                </a:solidFill>
+                <a:latin typeface="Aptos"/>
+              </a:rPr>
+              <a:t>precision</a:t>
+            </a:r>
+            <a:r>
+              <a:rPr lang="fr-CA" sz="1200" b="0" dirty="0">
+                <a:solidFill>
+                  <a:srgbClr val="232B32"/>
+                </a:solidFill>
+                <a:latin typeface="Aptos"/>
+              </a:rPr>
+              <a:t>) observée pour cette classe (0,15).</a:t>
+            </a:r>
+            <a:endParaRPr sz="1200" b="0" dirty="0">
+              <a:solidFill>
+                <a:srgbClr val="232B32"/>
+              </a:solidFill>
+              <a:latin typeface="Aptos"/>
+            </a:endParaRPr>
           </a:p>
         </p:txBody>
       </p:sp>
@@ -19820,7 +20402,7 @@
         <p:spPr>
           <a:xfrm>
             <a:off x="7040880" y="4800600"/>
-            <a:ext cx="4251960" cy="1005840"/>
+            <a:ext cx="4251960" cy="1417320"/>
           </a:xfrm>
           <a:prstGeom prst="roundRect">
             <a:avLst/>

--- a/Presentation_TP_USGS_Earthquake_AI_FINAL.pptx
+++ b/Presentation_TP_USGS_Earthquake_AI_FINAL.pptx
@@ -19651,8 +19651,8 @@
         </p:nvSpPr>
         <p:spPr>
           <a:xfrm>
-            <a:off x="594360" y="1060704"/>
-            <a:ext cx="10881360" cy="384048"/>
+            <a:off x="502920" y="1168072"/>
+            <a:ext cx="10881360" cy="1200329"/>
           </a:xfrm>
           <a:prstGeom prst="rect">
             <a:avLst/>
@@ -19667,14 +19667,128 @@
           <a:p>
             <a:pPr algn="l"/>
             <a:r>
-              <a:rPr sz="1200" b="0">
+              <a:rPr lang="fr-CA" sz="1200" b="1" dirty="0">
                 <a:solidFill>
                   <a:srgbClr val="626F7B"/>
                 </a:solidFill>
                 <a:latin typeface="Aptos"/>
               </a:rPr>
-              <a:t>Comparaison de trois algorithmes d’ensemble sur un problème multiclasses déséquilibré.</a:t>
-            </a:r>
+              <a:t>Objectif:</a:t>
+            </a:r>
+            <a:r>
+              <a:rPr lang="fr-CA" sz="1200" b="0" dirty="0">
+                <a:solidFill>
+                  <a:srgbClr val="626F7B"/>
+                </a:solidFill>
+                <a:latin typeface="Aptos"/>
+              </a:rPr>
+              <a:t> Entraîner et d'évaluer des modèles de classification par Machine Learning pour prédire des catégories de facteurs de risque des séismes à partir d'un jeu de données de l'USGS.</a:t>
+            </a:r>
+          </a:p>
+          <a:p>
+            <a:pPr algn="l"/>
+            <a:endParaRPr lang="fr-CA" sz="1200" dirty="0">
+              <a:solidFill>
+                <a:srgbClr val="626F7B"/>
+              </a:solidFill>
+              <a:latin typeface="Aptos"/>
+            </a:endParaRPr>
+          </a:p>
+          <a:p>
+            <a:pPr algn="l"/>
+            <a:r>
+              <a:rPr lang="fr-CA" sz="1200" b="0" dirty="0">
+                <a:solidFill>
+                  <a:srgbClr val="626F7B"/>
+                </a:solidFill>
+                <a:latin typeface="Aptos"/>
+              </a:rPr>
+              <a:t>Construction d'une variable cible sur mesure (</a:t>
+            </a:r>
+            <a:r>
+              <a:rPr lang="fr-CA" sz="1200" b="1" dirty="0" err="1">
+                <a:solidFill>
+                  <a:srgbClr val="626F7B"/>
+                </a:solidFill>
+                <a:latin typeface="Aptos"/>
+              </a:rPr>
+              <a:t>target_risk_category</a:t>
+            </a:r>
+            <a:r>
+              <a:rPr lang="fr-CA" sz="1200" b="0" dirty="0">
+                <a:solidFill>
+                  <a:srgbClr val="626F7B"/>
+                </a:solidFill>
+                <a:latin typeface="Aptos"/>
+              </a:rPr>
+              <a:t>) : </a:t>
+            </a:r>
+          </a:p>
+          <a:p>
+            <a:pPr algn="l"/>
+            <a:r>
+              <a:rPr lang="fr-CA" sz="1200" b="0" dirty="0">
+                <a:solidFill>
+                  <a:srgbClr val="626F7B"/>
+                </a:solidFill>
+                <a:latin typeface="Aptos"/>
+              </a:rPr>
+              <a:t>La  segmentation </a:t>
+            </a:r>
+            <a:r>
+              <a:rPr lang="fr-CA" sz="1200" dirty="0">
+                <a:solidFill>
+                  <a:srgbClr val="626F7B"/>
+                </a:solidFill>
+                <a:latin typeface="Aptos"/>
+              </a:rPr>
+              <a:t>d</a:t>
+            </a:r>
+            <a:r>
+              <a:rPr lang="fr-CA" sz="1200" b="0" dirty="0">
+                <a:solidFill>
+                  <a:srgbClr val="626F7B"/>
+                </a:solidFill>
+                <a:latin typeface="Aptos"/>
+              </a:rPr>
+              <a:t>es séismes en 5 catégories hiérarchisées (Risque Tsunami, Forte Secousse, Forte Exposition, Faible Profondeur, Risque Modéré ou Faible)</a:t>
+            </a:r>
+          </a:p>
+          <a:p>
+            <a:pPr algn="l"/>
+            <a:r>
+              <a:rPr lang="fr-CA" sz="1200" b="0" dirty="0">
+                <a:solidFill>
+                  <a:srgbClr val="626F7B"/>
+                </a:solidFill>
+                <a:latin typeface="Aptos"/>
+              </a:rPr>
+              <a:t>basées sur des règles métier (magnitude, profondeur, intensité MMI, alertes, etc.) tout en évitant les fuites de données (data </a:t>
+            </a:r>
+            <a:r>
+              <a:rPr lang="fr-CA" sz="1200" b="0" dirty="0" err="1">
+                <a:solidFill>
+                  <a:srgbClr val="626F7B"/>
+                </a:solidFill>
+                <a:latin typeface="Aptos"/>
+              </a:rPr>
+              <a:t>leakage</a:t>
+            </a:r>
+            <a:r>
+              <a:rPr lang="fr-CA" sz="1200" b="0" dirty="0">
+                <a:solidFill>
+                  <a:srgbClr val="626F7B"/>
+                </a:solidFill>
+                <a:latin typeface="Aptos"/>
+              </a:rPr>
+              <a:t>).</a:t>
+            </a:r>
+            <a:endParaRPr sz="1200" b="0" dirty="0">
+              <a:solidFill>
+                <a:srgbClr val="626F7B"/>
+              </a:solidFill>
+              <a:latin typeface="Aptos"/>
+            </a:endParaRPr>
           </a:p>
         </p:txBody>
       </p:sp>
@@ -19719,10 +19833,16 @@
           <p:cNvGraphicFramePr>
             <a:graphicFrameLocks noGrp="1"/>
           </p:cNvGraphicFramePr>
-          <p:nvPr/>
+          <p:nvPr>
+            <p:extLst>
+              <p:ext uri="{D42A27DB-BD31-4B8C-83A1-F6EECF244321}">
+                <p14:modId xmlns:p14="http://schemas.microsoft.com/office/powerpoint/2010/main" val="260021514"/>
+              </p:ext>
+            </p:extLst>
+          </p:nvPr>
         </p:nvGraphicFramePr>
         <p:xfrm>
-          <a:off x="685800" y="1600200"/>
+          <a:off x="685800" y="3438834"/>
           <a:ext cx="5897880" cy="2468880"/>
         </p:xfrm>
         <a:graphic>
@@ -20135,7 +20255,7 @@
                     <a:p>
                       <a:pPr algn="ctr"/>
                       <a:r>
-                        <a:rPr sz="1200" b="0">
+                        <a:rPr sz="1200" b="0" dirty="0">
                           <a:solidFill>
                             <a:srgbClr val="232B32"/>
                           </a:solidFill>
@@ -20169,8 +20289,8 @@
         </p:nvSpPr>
         <p:spPr>
           <a:xfrm>
-            <a:off x="7040880" y="1600200"/>
-            <a:ext cx="4251960" cy="1325880"/>
+            <a:off x="7040880" y="2632590"/>
+            <a:ext cx="4251960" cy="1181821"/>
           </a:xfrm>
           <a:prstGeom prst="roundRect">
             <a:avLst/>
@@ -20215,7 +20335,7 @@
         </p:nvSpPr>
         <p:spPr>
           <a:xfrm>
-            <a:off x="7205472" y="1746504"/>
+            <a:off x="7205472" y="2680574"/>
             <a:ext cx="3922776" cy="320040"/>
           </a:xfrm>
           <a:prstGeom prst="rect">
@@ -20250,7 +20370,7 @@
         </p:nvSpPr>
         <p:spPr>
           <a:xfrm>
-            <a:off x="7205472" y="2130552"/>
+            <a:off x="7205472" y="3064622"/>
             <a:ext cx="3922776" cy="667512"/>
           </a:xfrm>
           <a:prstGeom prst="rect">
@@ -20285,8 +20405,8 @@
         </p:nvSpPr>
         <p:spPr>
           <a:xfrm>
-            <a:off x="7040880" y="3154680"/>
-            <a:ext cx="4251960" cy="1417320"/>
+            <a:off x="7040880" y="4019916"/>
+            <a:ext cx="4251960" cy="1145451"/>
           </a:xfrm>
           <a:prstGeom prst="roundRect">
             <a:avLst/>
@@ -20331,7 +20451,7 @@
         </p:nvSpPr>
         <p:spPr>
           <a:xfrm>
-            <a:off x="7205472" y="3300984"/>
+            <a:off x="7205472" y="4048236"/>
             <a:ext cx="3922776" cy="320040"/>
           </a:xfrm>
           <a:prstGeom prst="rect">
@@ -20366,7 +20486,7 @@
         </p:nvSpPr>
         <p:spPr>
           <a:xfrm>
-            <a:off x="7205472" y="3685032"/>
+            <a:off x="7205472" y="4432284"/>
             <a:ext cx="3922776" cy="758952"/>
           </a:xfrm>
           <a:prstGeom prst="rect">
@@ -20401,8 +20521,8 @@
         </p:nvSpPr>
         <p:spPr>
           <a:xfrm>
-            <a:off x="7040880" y="4800600"/>
-            <a:ext cx="4251960" cy="1417320"/>
+            <a:off x="7040880" y="5469192"/>
+            <a:ext cx="4251960" cy="1072217"/>
           </a:xfrm>
           <a:prstGeom prst="roundRect">
             <a:avLst/>
@@ -20447,7 +20567,7 @@
         </p:nvSpPr>
         <p:spPr>
           <a:xfrm>
-            <a:off x="7205472" y="4946904"/>
+            <a:off x="7205472" y="5517176"/>
             <a:ext cx="3922776" cy="320040"/>
           </a:xfrm>
           <a:prstGeom prst="rect">
@@ -20482,7 +20602,7 @@
         </p:nvSpPr>
         <p:spPr>
           <a:xfrm>
-            <a:off x="7205472" y="5330952"/>
+            <a:off x="7205472" y="5901224"/>
             <a:ext cx="3922776" cy="347472"/>
           </a:xfrm>
           <a:prstGeom prst="rect">

--- a/Presentation_TP_USGS_Earthquake_AI_FINAL.pptx
+++ b/Presentation_TP_USGS_Earthquake_AI_FINAL.pptx
@@ -4396,8 +4396,8 @@
         </p:nvSpPr>
         <p:spPr>
           <a:xfrm>
-            <a:off x="749808" y="1508760"/>
-            <a:ext cx="1164945" cy="228600"/>
+            <a:off x="749808" y="1587416"/>
+            <a:ext cx="995781" cy="276999"/>
           </a:xfrm>
           <a:prstGeom prst="rect">
             <a:avLst/>
@@ -4412,7 +4412,7 @@
           <a:p>
             <a:pPr algn="l"/>
             <a:r>
-              <a:rPr sz="900" b="1">
+              <a:rPr sz="1200" b="1" dirty="0">
                 <a:solidFill>
                   <a:srgbClr val="626F7B"/>
                 </a:solidFill>
@@ -4431,23 +4431,22 @@
         </p:nvSpPr>
         <p:spPr>
           <a:xfrm>
-            <a:off x="1805025" y="1490472"/>
-            <a:ext cx="940917" cy="274320"/>
-          </a:xfrm>
-          <a:prstGeom prst="rect">
-            <a:avLst/>
-          </a:prstGeom>
-          <a:noFill/>
-        </p:spPr>
-        <p:txBody>
-          <a:bodyPr wrap="square" anchor="t">
-            <a:spAutoFit/>
-          </a:bodyPr>
-          <a:lstStyle/>
-          <a:p>
-            <a:pPr algn="r"/>
-            <a:r>
-              <a:rPr sz="1700" b="1">
+            <a:off x="1774449" y="1473393"/>
+            <a:ext cx="1134770" cy="523220"/>
+          </a:xfrm>
+          <a:prstGeom prst="rect">
+            <a:avLst/>
+          </a:prstGeom>
+          <a:noFill/>
+        </p:spPr>
+        <p:txBody>
+          <a:bodyPr wrap="square" anchor="t">
+            <a:spAutoFit/>
+          </a:bodyPr>
+          <a:lstStyle/>
+          <a:p>
+            <a:r>
+              <a:rPr sz="1400" b="1" dirty="0">
                 <a:solidFill>
                   <a:srgbClr val="2E7D5A"/>
                 </a:solidFill>
@@ -4512,8 +4511,8 @@
         </p:nvSpPr>
         <p:spPr>
           <a:xfrm>
-            <a:off x="3172968" y="1508760"/>
-            <a:ext cx="1022299" cy="228600"/>
+            <a:off x="3172968" y="1577584"/>
+            <a:ext cx="1022299" cy="307777"/>
           </a:xfrm>
           <a:prstGeom prst="rect">
             <a:avLst/>
@@ -4528,7 +4527,7 @@
           <a:p>
             <a:pPr algn="l"/>
             <a:r>
-              <a:rPr sz="900" b="1">
+              <a:rPr sz="1400" b="1" dirty="0">
                 <a:solidFill>
                   <a:srgbClr val="626F7B"/>
                 </a:solidFill>
@@ -4547,8 +4546,8 @@
         </p:nvSpPr>
         <p:spPr>
           <a:xfrm>
-            <a:off x="4085539" y="1490472"/>
-            <a:ext cx="825703" cy="274320"/>
+            <a:off x="3760445" y="1559296"/>
+            <a:ext cx="1052475" cy="353943"/>
           </a:xfrm>
           <a:prstGeom prst="rect">
             <a:avLst/>
@@ -4563,7 +4562,7 @@
           <a:p>
             <a:pPr algn="r"/>
             <a:r>
-              <a:rPr sz="1700" b="1">
+              <a:rPr sz="1700" b="1" dirty="0">
                 <a:solidFill>
                   <a:srgbClr val="215E91"/>
                 </a:solidFill>
@@ -4628,8 +4627,8 @@
         </p:nvSpPr>
         <p:spPr>
           <a:xfrm>
-            <a:off x="5321808" y="1508760"/>
-            <a:ext cx="1022299" cy="228600"/>
+            <a:off x="5321808" y="1587417"/>
+            <a:ext cx="619963" cy="307777"/>
           </a:xfrm>
           <a:prstGeom prst="rect">
             <a:avLst/>
@@ -4644,7 +4643,7 @@
           <a:p>
             <a:pPr algn="l"/>
             <a:r>
-              <a:rPr sz="900" b="1">
+              <a:rPr sz="1400" b="1" dirty="0">
                 <a:solidFill>
                   <a:srgbClr val="626F7B"/>
                 </a:solidFill>
@@ -4652,6 +4651,12 @@
               </a:rPr>
               <a:t>MAE</a:t>
             </a:r>
+            <a:endParaRPr sz="900" b="1" dirty="0">
+              <a:solidFill>
+                <a:srgbClr val="626F7B"/>
+              </a:solidFill>
+              <a:latin typeface="Aptos"/>
+            </a:endParaRPr>
           </a:p>
         </p:txBody>
       </p:sp>
@@ -4663,8 +4668,8 @@
         </p:nvSpPr>
         <p:spPr>
           <a:xfrm>
-            <a:off x="6234379" y="1490472"/>
-            <a:ext cx="825703" cy="274320"/>
+            <a:off x="5815525" y="1554480"/>
+            <a:ext cx="1236269" cy="353943"/>
           </a:xfrm>
           <a:prstGeom prst="rect">
             <a:avLst/>
@@ -4679,7 +4684,7 @@
           <a:p>
             <a:pPr algn="r"/>
             <a:r>
-              <a:rPr sz="1700" b="1">
+              <a:rPr sz="1700" b="1" dirty="0">
                 <a:solidFill>
                   <a:srgbClr val="36A2BF"/>
                 </a:solidFill>
@@ -4744,8 +4749,8 @@
         </p:nvSpPr>
         <p:spPr>
           <a:xfrm>
-            <a:off x="7470648" y="1508760"/>
-            <a:ext cx="1022299" cy="228600"/>
+            <a:off x="7470648" y="1567752"/>
+            <a:ext cx="1022299" cy="338554"/>
           </a:xfrm>
           <a:prstGeom prst="rect">
             <a:avLst/>
@@ -4760,7 +4765,7 @@
           <a:p>
             <a:pPr algn="l"/>
             <a:r>
-              <a:rPr sz="900" b="1">
+              <a:rPr sz="1600" b="1" dirty="0">
                 <a:solidFill>
                   <a:srgbClr val="626F7B"/>
                 </a:solidFill>
@@ -4768,6 +4773,12 @@
               </a:rPr>
               <a:t>RMSE</a:t>
             </a:r>
+            <a:endParaRPr sz="900" b="1" dirty="0">
+              <a:solidFill>
+                <a:srgbClr val="626F7B"/>
+              </a:solidFill>
+              <a:latin typeface="Aptos"/>
+            </a:endParaRPr>
           </a:p>
         </p:txBody>
       </p:sp>
@@ -4779,8 +4790,8 @@
         </p:nvSpPr>
         <p:spPr>
           <a:xfrm>
-            <a:off x="8383219" y="1490472"/>
-            <a:ext cx="825703" cy="274320"/>
+            <a:off x="8130830" y="1579415"/>
+            <a:ext cx="1022299" cy="353943"/>
           </a:xfrm>
           <a:prstGeom prst="rect">
             <a:avLst/>
@@ -4795,7 +4806,7 @@
           <a:p>
             <a:pPr algn="r"/>
             <a:r>
-              <a:rPr sz="1700" b="1">
+              <a:rPr sz="1700" b="1" dirty="0">
                 <a:solidFill>
                   <a:srgbClr val="B44141"/>
                 </a:solidFill>
@@ -4861,7 +4872,7 @@
         <p:spPr>
           <a:xfrm>
             <a:off x="9619488" y="1508760"/>
-            <a:ext cx="1022299" cy="228600"/>
+            <a:ext cx="1022299" cy="523220"/>
           </a:xfrm>
           <a:prstGeom prst="rect">
             <a:avLst/>
@@ -4876,13 +4887,40 @@
           <a:p>
             <a:pPr algn="l"/>
             <a:r>
-              <a:rPr sz="900" b="1">
+              <a:rPr sz="1400" b="1" dirty="0">
                 <a:solidFill>
                   <a:srgbClr val="626F7B"/>
                 </a:solidFill>
                 <a:latin typeface="Aptos"/>
               </a:rPr>
-              <a:t>RMSE pertes +</a:t>
+              <a:t>RMSE</a:t>
+            </a:r>
+            <a:r>
+              <a:rPr sz="900" b="1" dirty="0">
+                <a:solidFill>
+                  <a:srgbClr val="626F7B"/>
+                </a:solidFill>
+                <a:latin typeface="Aptos"/>
+              </a:rPr>
+              <a:t> </a:t>
+            </a:r>
+            <a:r>
+              <a:rPr sz="1400" b="1" dirty="0" err="1">
+                <a:solidFill>
+                  <a:srgbClr val="626F7B"/>
+                </a:solidFill>
+                <a:latin typeface="Aptos"/>
+              </a:rPr>
+              <a:t>pertes</a:t>
+            </a:r>
+            <a:r>
+              <a:rPr sz="900" b="1" dirty="0">
+                <a:solidFill>
+                  <a:srgbClr val="626F7B"/>
+                </a:solidFill>
+                <a:latin typeface="Aptos"/>
+              </a:rPr>
+              <a:t> +</a:t>
             </a:r>
           </a:p>
         </p:txBody>
@@ -4895,23 +4933,22 @@
         </p:nvSpPr>
         <p:spPr>
           <a:xfrm>
-            <a:off x="10532059" y="1490472"/>
-            <a:ext cx="825703" cy="274320"/>
-          </a:xfrm>
-          <a:prstGeom prst="rect">
-            <a:avLst/>
-          </a:prstGeom>
-          <a:noFill/>
-        </p:spPr>
-        <p:txBody>
-          <a:bodyPr wrap="square" anchor="t">
-            <a:spAutoFit/>
-          </a:bodyPr>
-          <a:lstStyle/>
-          <a:p>
-            <a:pPr algn="r"/>
-            <a:r>
-              <a:rPr sz="1700" b="1">
+            <a:off x="10404240" y="1569128"/>
+            <a:ext cx="1053389" cy="353943"/>
+          </a:xfrm>
+          <a:prstGeom prst="rect">
+            <a:avLst/>
+          </a:prstGeom>
+          <a:noFill/>
+        </p:spPr>
+        <p:txBody>
+          <a:bodyPr wrap="square" anchor="t">
+            <a:spAutoFit/>
+          </a:bodyPr>
+          <a:lstStyle/>
+          <a:p>
+            <a:r>
+              <a:rPr sz="1700" b="1" dirty="0">
                 <a:solidFill>
                   <a:srgbClr val="B44141"/>
                 </a:solidFill>

--- a/Presentation_TP_USGS_Earthquake_AI_FINAL.pptx
+++ b/Presentation_TP_USGS_Earthquake_AI_FINAL.pptx
@@ -17258,8 +17258,8 @@
         </p:nvSpPr>
         <p:spPr>
           <a:xfrm>
-            <a:off x="3042200" y="2877503"/>
-            <a:ext cx="1022299" cy="228600"/>
+            <a:off x="3042200" y="2730011"/>
+            <a:ext cx="1022299" cy="523220"/>
           </a:xfrm>
           <a:prstGeom prst="rect">
             <a:avLst/>
@@ -17274,7 +17274,7 @@
           <a:p>
             <a:pPr algn="l"/>
             <a:r>
-              <a:rPr sz="900" b="1" dirty="0">
+              <a:rPr sz="1400" b="1" dirty="0">
                 <a:solidFill>
                   <a:srgbClr val="626F7B"/>
                 </a:solidFill>

--- a/Presentation_TP_USGS_Earthquake_AI_FINAL.pptx
+++ b/Presentation_TP_USGS_Earthquake_AI_FINAL.pptx
@@ -320,7 +320,7 @@
           <a:p>
             <a:fld id="{5BCAD085-E8A6-8845-BD4E-CB4CCA059FC4}" type="datetimeFigureOut">
               <a:rPr lang="en-US" smtClean="0"/>
-              <a:t>10/12/2026</a:t>
+              <a:t>10/14/2026</a:t>
             </a:fld>
             <a:endParaRPr lang="en-US"/>
           </a:p>
@@ -488,7 +488,7 @@
           <a:p>
             <a:fld id="{5BCAD085-E8A6-8845-BD4E-CB4CCA059FC4}" type="datetimeFigureOut">
               <a:rPr lang="en-US" smtClean="0"/>
-              <a:t>10/12/2026</a:t>
+              <a:t>10/14/2026</a:t>
             </a:fld>
             <a:endParaRPr lang="en-US"/>
           </a:p>
@@ -666,7 +666,7 @@
           <a:p>
             <a:fld id="{5BCAD085-E8A6-8845-BD4E-CB4CCA059FC4}" type="datetimeFigureOut">
               <a:rPr lang="en-US" smtClean="0"/>
-              <a:t>10/12/2026</a:t>
+              <a:t>10/14/2026</a:t>
             </a:fld>
             <a:endParaRPr lang="en-US"/>
           </a:p>
@@ -834,7 +834,7 @@
           <a:p>
             <a:fld id="{5BCAD085-E8A6-8845-BD4E-CB4CCA059FC4}" type="datetimeFigureOut">
               <a:rPr lang="en-US" smtClean="0"/>
-              <a:t>10/12/2026</a:t>
+              <a:t>10/14/2026</a:t>
             </a:fld>
             <a:endParaRPr lang="en-US"/>
           </a:p>
@@ -1079,7 +1079,7 @@
           <a:p>
             <a:fld id="{5BCAD085-E8A6-8845-BD4E-CB4CCA059FC4}" type="datetimeFigureOut">
               <a:rPr lang="en-US" smtClean="0"/>
-              <a:t>10/12/2026</a:t>
+              <a:t>10/14/2026</a:t>
             </a:fld>
             <a:endParaRPr lang="en-US"/>
           </a:p>
@@ -1364,7 +1364,7 @@
           <a:p>
             <a:fld id="{5BCAD085-E8A6-8845-BD4E-CB4CCA059FC4}" type="datetimeFigureOut">
               <a:rPr lang="en-US" smtClean="0"/>
-              <a:t>10/12/2026</a:t>
+              <a:t>10/14/2026</a:t>
             </a:fld>
             <a:endParaRPr lang="en-US"/>
           </a:p>
@@ -1783,7 +1783,7 @@
           <a:p>
             <a:fld id="{5BCAD085-E8A6-8845-BD4E-CB4CCA059FC4}" type="datetimeFigureOut">
               <a:rPr lang="en-US" smtClean="0"/>
-              <a:t>10/12/2026</a:t>
+              <a:t>10/14/2026</a:t>
             </a:fld>
             <a:endParaRPr lang="en-US"/>
           </a:p>
@@ -1900,7 +1900,7 @@
           <a:p>
             <a:fld id="{5BCAD085-E8A6-8845-BD4E-CB4CCA059FC4}" type="datetimeFigureOut">
               <a:rPr lang="en-US" smtClean="0"/>
-              <a:t>10/12/2026</a:t>
+              <a:t>10/14/2026</a:t>
             </a:fld>
             <a:endParaRPr lang="en-US"/>
           </a:p>
@@ -1995,7 +1995,7 @@
           <a:p>
             <a:fld id="{5BCAD085-E8A6-8845-BD4E-CB4CCA059FC4}" type="datetimeFigureOut">
               <a:rPr lang="en-US" smtClean="0"/>
-              <a:t>10/12/2026</a:t>
+              <a:t>10/14/2026</a:t>
             </a:fld>
             <a:endParaRPr lang="en-US"/>
           </a:p>
@@ -2270,7 +2270,7 @@
           <a:p>
             <a:fld id="{5BCAD085-E8A6-8845-BD4E-CB4CCA059FC4}" type="datetimeFigureOut">
               <a:rPr lang="en-US" smtClean="0"/>
-              <a:t>10/12/2026</a:t>
+              <a:t>10/14/2026</a:t>
             </a:fld>
             <a:endParaRPr lang="en-US"/>
           </a:p>
@@ -2522,7 +2522,7 @@
           <a:p>
             <a:fld id="{5BCAD085-E8A6-8845-BD4E-CB4CCA059FC4}" type="datetimeFigureOut">
               <a:rPr lang="en-US" smtClean="0"/>
-              <a:t>10/12/2026</a:t>
+              <a:t>10/14/2026</a:t>
             </a:fld>
             <a:endParaRPr lang="en-US"/>
           </a:p>
@@ -2733,7 +2733,7 @@
           <a:p>
             <a:fld id="{5BCAD085-E8A6-8845-BD4E-CB4CCA059FC4}" type="datetimeFigureOut">
               <a:rPr lang="en-US" smtClean="0"/>
-              <a:t>10/12/2026</a:t>
+              <a:t>10/14/2026</a:t>
             </a:fld>
             <a:endParaRPr lang="en-US"/>
           </a:p>
@@ -18612,13 +18612,58 @@
           <a:p>
             <a:pPr algn="l"/>
             <a:r>
-              <a:rPr sz="2800" b="1">
+              <a:rPr sz="2800" b="1" dirty="0" err="1">
                 <a:solidFill>
                   <a:srgbClr val="0F2238"/>
                 </a:solidFill>
                 <a:latin typeface="Aptos"/>
               </a:rPr>
-              <a:t>Modèle 03 — Régression de la sévérité (significance)</a:t>
+              <a:t>Modèle</a:t>
+            </a:r>
+            <a:r>
+              <a:rPr sz="2800" b="1" dirty="0">
+                <a:solidFill>
+                  <a:srgbClr val="0F2238"/>
+                </a:solidFill>
+                <a:latin typeface="Aptos"/>
+              </a:rPr>
+              <a:t> 03 — </a:t>
+            </a:r>
+            <a:r>
+              <a:rPr sz="2800" b="1" dirty="0" err="1">
+                <a:solidFill>
+                  <a:srgbClr val="0F2238"/>
+                </a:solidFill>
+                <a:latin typeface="Aptos"/>
+              </a:rPr>
+              <a:t>Régression</a:t>
+            </a:r>
+            <a:r>
+              <a:rPr sz="2800" b="1" dirty="0">
+                <a:solidFill>
+                  <a:srgbClr val="0F2238"/>
+                </a:solidFill>
+                <a:latin typeface="Aptos"/>
+              </a:rPr>
+              <a:t> de la </a:t>
+            </a:r>
+            <a:r>
+              <a:rPr sz="2800" b="1" dirty="0" err="1">
+                <a:solidFill>
+                  <a:srgbClr val="0F2238"/>
+                </a:solidFill>
+                <a:latin typeface="Aptos"/>
+              </a:rPr>
+              <a:t>sévérité</a:t>
+            </a:r>
+            <a:r>
+              <a:rPr sz="2800" b="1" dirty="0">
+                <a:solidFill>
+                  <a:srgbClr val="0F2238"/>
+                </a:solidFill>
+                <a:latin typeface="Aptos"/>
+              </a:rPr>
+              <a:t> (significance)</a:t>
             </a:r>
           </a:p>
         </p:txBody>
@@ -18675,8 +18720,8 @@
         </p:nvSpPr>
         <p:spPr>
           <a:xfrm>
-            <a:off x="594360" y="1060704"/>
-            <a:ext cx="10881360" cy="384048"/>
+            <a:off x="411479" y="1289625"/>
+            <a:ext cx="11427953" cy="1384995"/>
           </a:xfrm>
           <a:prstGeom prst="rect">
             <a:avLst/>
@@ -18691,14 +18736,451 @@
           <a:p>
             <a:pPr algn="l"/>
             <a:r>
-              <a:rPr sz="1200" b="0">
+              <a:rPr sz="1200" b="0" dirty="0" err="1">
                 <a:solidFill>
                   <a:srgbClr val="626F7B"/>
                 </a:solidFill>
                 <a:latin typeface="Aptos"/>
               </a:rPr>
-              <a:t>Ici il n’y a pas de faux positifs / faux négatifs : la cible est continue.</a:t>
-            </a:r>
+              <a:t>Ici</a:t>
+            </a:r>
+            <a:r>
+              <a:rPr sz="1200" b="0" dirty="0">
+                <a:solidFill>
+                  <a:srgbClr val="626F7B"/>
+                </a:solidFill>
+                <a:latin typeface="Aptos"/>
+              </a:rPr>
+              <a:t> il </a:t>
+            </a:r>
+            <a:r>
+              <a:rPr sz="1200" b="0" dirty="0" err="1">
+                <a:solidFill>
+                  <a:srgbClr val="626F7B"/>
+                </a:solidFill>
+                <a:latin typeface="Aptos"/>
+              </a:rPr>
+              <a:t>n’y</a:t>
+            </a:r>
+            <a:r>
+              <a:rPr sz="1200" b="0" dirty="0">
+                <a:solidFill>
+                  <a:srgbClr val="626F7B"/>
+                </a:solidFill>
+                <a:latin typeface="Aptos"/>
+              </a:rPr>
+              <a:t> a pas de faux </a:t>
+            </a:r>
+            <a:r>
+              <a:rPr sz="1200" b="0" dirty="0" err="1">
+                <a:solidFill>
+                  <a:srgbClr val="626F7B"/>
+                </a:solidFill>
+                <a:latin typeface="Aptos"/>
+              </a:rPr>
+              <a:t>positifs</a:t>
+            </a:r>
+            <a:r>
+              <a:rPr sz="1200" b="0" dirty="0">
+                <a:solidFill>
+                  <a:srgbClr val="626F7B"/>
+                </a:solidFill>
+                <a:latin typeface="Aptos"/>
+              </a:rPr>
+              <a:t> / faux </a:t>
+            </a:r>
+            <a:r>
+              <a:rPr sz="1200" b="0" dirty="0" err="1">
+                <a:solidFill>
+                  <a:srgbClr val="626F7B"/>
+                </a:solidFill>
+                <a:latin typeface="Aptos"/>
+              </a:rPr>
+              <a:t>négatifs</a:t>
+            </a:r>
+            <a:r>
+              <a:rPr sz="1200" b="0" dirty="0">
+                <a:solidFill>
+                  <a:srgbClr val="626F7B"/>
+                </a:solidFill>
+                <a:latin typeface="Aptos"/>
+              </a:rPr>
+              <a:t> : la </a:t>
+            </a:r>
+            <a:r>
+              <a:rPr sz="1200" b="0" dirty="0" err="1">
+                <a:solidFill>
+                  <a:srgbClr val="626F7B"/>
+                </a:solidFill>
+                <a:latin typeface="Aptos"/>
+              </a:rPr>
+              <a:t>cible</a:t>
+            </a:r>
+            <a:r>
+              <a:rPr sz="1200" b="0" dirty="0">
+                <a:solidFill>
+                  <a:srgbClr val="626F7B"/>
+                </a:solidFill>
+                <a:latin typeface="Aptos"/>
+              </a:rPr>
+              <a:t> est continue.</a:t>
+            </a:r>
+            <a:endParaRPr lang="fr-CA" sz="1200" b="0" dirty="0">
+              <a:solidFill>
+                <a:srgbClr val="626F7B"/>
+              </a:solidFill>
+              <a:latin typeface="Aptos"/>
+            </a:endParaRPr>
+          </a:p>
+          <a:p>
+            <a:r>
+              <a:rPr lang="fr-CA" sz="1200" b="1" dirty="0">
+                <a:solidFill>
+                  <a:srgbClr val="626F7B"/>
+                </a:solidFill>
+                <a:latin typeface="Aptos"/>
+              </a:rPr>
+              <a:t>Objectif : </a:t>
+            </a:r>
+            <a:r>
+              <a:rPr lang="en-CA" sz="1200" dirty="0" err="1"/>
+              <a:t>Entraîner</a:t>
+            </a:r>
+            <a:r>
+              <a:rPr lang="en-CA" sz="1200" dirty="0"/>
+              <a:t>, </a:t>
+            </a:r>
+            <a:r>
+              <a:rPr lang="en-CA" sz="1200" dirty="0" err="1"/>
+              <a:t>évaluer</a:t>
+            </a:r>
+            <a:r>
+              <a:rPr lang="en-CA" sz="1200" dirty="0"/>
+              <a:t> et comparer des </a:t>
+            </a:r>
+            <a:r>
+              <a:rPr lang="en-CA" sz="1200" dirty="0" err="1"/>
+              <a:t>modèles</a:t>
+            </a:r>
+            <a:r>
+              <a:rPr lang="en-CA" sz="1200" dirty="0"/>
+              <a:t> de </a:t>
+            </a:r>
+            <a:r>
+              <a:rPr lang="en-CA" sz="1200" dirty="0" err="1"/>
+              <a:t>régression</a:t>
+            </a:r>
+            <a:r>
+              <a:rPr lang="en-CA" sz="1200" dirty="0"/>
+              <a:t> </a:t>
+            </a:r>
+            <a:r>
+              <a:rPr lang="en-CA" sz="1200" dirty="0" err="1"/>
+              <a:t>supervisée</a:t>
+            </a:r>
+            <a:r>
+              <a:rPr lang="en-CA" sz="1200" dirty="0"/>
+              <a:t> </a:t>
+            </a:r>
+            <a:r>
+              <a:rPr lang="en-CA" sz="1200" dirty="0" err="1"/>
+              <a:t>afin</a:t>
+            </a:r>
+            <a:r>
+              <a:rPr lang="en-CA" sz="1200" dirty="0"/>
+              <a:t> de </a:t>
+            </a:r>
+            <a:r>
+              <a:rPr lang="en-CA" sz="1200" dirty="0" err="1"/>
+              <a:t>prédire</a:t>
+            </a:r>
+            <a:r>
+              <a:rPr lang="en-CA" sz="1200" dirty="0"/>
+              <a:t> </a:t>
+            </a:r>
+            <a:r>
+              <a:rPr lang="en-CA" sz="1200" b="1" dirty="0" err="1"/>
+              <a:t>l’importance</a:t>
+            </a:r>
+            <a:r>
+              <a:rPr lang="en-CA" sz="1200" b="1" dirty="0"/>
+              <a:t> (significance)</a:t>
+            </a:r>
+            <a:r>
+              <a:rPr lang="en-CA" sz="1200" dirty="0"/>
+              <a:t> d’un </a:t>
+            </a:r>
+            <a:r>
+              <a:rPr lang="en-CA" sz="1200" dirty="0" err="1"/>
+              <a:t>séisme</a:t>
+            </a:r>
+            <a:r>
+              <a:rPr lang="en-CA" sz="1200" dirty="0"/>
+              <a:t> à </a:t>
+            </a:r>
+            <a:r>
+              <a:rPr lang="en-CA" sz="1200" dirty="0" err="1"/>
+              <a:t>partir</a:t>
+            </a:r>
+            <a:r>
+              <a:rPr lang="en-CA" sz="1200" dirty="0"/>
+              <a:t> de </a:t>
+            </a:r>
+            <a:r>
+              <a:rPr lang="en-CA" sz="1200" dirty="0" err="1"/>
+              <a:t>ses</a:t>
+            </a:r>
+            <a:r>
+              <a:rPr lang="en-CA" sz="1200" dirty="0"/>
+              <a:t> </a:t>
+            </a:r>
+            <a:r>
+              <a:rPr lang="en-CA" sz="1200" dirty="0" err="1"/>
+              <a:t>caractéristiques</a:t>
+            </a:r>
+            <a:r>
+              <a:rPr lang="en-CA" sz="1200" dirty="0"/>
+              <a:t> </a:t>
+            </a:r>
+            <a:r>
+              <a:rPr lang="en-CA" sz="1200" dirty="0" err="1"/>
+              <a:t>géophysiques</a:t>
+            </a:r>
+            <a:r>
+              <a:rPr lang="en-CA" sz="1200" dirty="0"/>
+              <a:t> et des </a:t>
+            </a:r>
+            <a:r>
+              <a:rPr lang="en-CA" sz="1200" dirty="0" err="1"/>
+              <a:t>mesures</a:t>
+            </a:r>
+            <a:r>
+              <a:rPr lang="en-CA" sz="1200" dirty="0"/>
+              <a:t> </a:t>
+            </a:r>
+            <a:r>
+              <a:rPr lang="en-CA" sz="1200" dirty="0" err="1"/>
+              <a:t>enregistrées</a:t>
+            </a:r>
+            <a:r>
+              <a:rPr lang="fr-CA" sz="1200" dirty="0">
+                <a:solidFill>
+                  <a:srgbClr val="626F7B"/>
+                </a:solidFill>
+                <a:latin typeface="Aptos"/>
+              </a:rPr>
+              <a:t>. </a:t>
+            </a:r>
+          </a:p>
+          <a:p>
+            <a:endParaRPr lang="fr-CA" sz="1200" dirty="0">
+              <a:solidFill>
+                <a:srgbClr val="626F7B"/>
+              </a:solidFill>
+              <a:latin typeface="Aptos"/>
+            </a:endParaRPr>
+          </a:p>
+          <a:p>
+            <a:r>
+              <a:rPr lang="fr-CA" sz="1200" b="1" dirty="0">
+                <a:solidFill>
+                  <a:srgbClr val="626F7B"/>
+                </a:solidFill>
+                <a:latin typeface="Aptos"/>
+              </a:rPr>
+              <a:t>Variables conservées :</a:t>
+            </a:r>
+            <a:r>
+              <a:rPr lang="fr-CA" sz="1200" dirty="0">
+                <a:solidFill>
+                  <a:srgbClr val="626F7B"/>
+                </a:solidFill>
+                <a:latin typeface="Aptos"/>
+              </a:rPr>
+              <a:t> </a:t>
+            </a:r>
+            <a:r>
+              <a:rPr lang="en-CA" sz="1200" dirty="0"/>
+              <a:t>Le </a:t>
+            </a:r>
+            <a:r>
+              <a:rPr lang="en-CA" sz="1200" dirty="0" err="1"/>
+              <a:t>modèle</a:t>
+            </a:r>
+            <a:r>
+              <a:rPr lang="en-CA" sz="1200" dirty="0"/>
+              <a:t> utilise des données </a:t>
+            </a:r>
+            <a:r>
+              <a:rPr lang="en-CA" sz="1200" dirty="0" err="1"/>
+              <a:t>géophysiques</a:t>
+            </a:r>
+            <a:r>
+              <a:rPr lang="en-CA" sz="1200" dirty="0"/>
+              <a:t> et </a:t>
+            </a:r>
+            <a:r>
+              <a:rPr lang="en-CA" sz="1200" dirty="0" err="1"/>
+              <a:t>spatiales</a:t>
+            </a:r>
+            <a:r>
+              <a:rPr lang="en-CA" sz="1200" dirty="0"/>
+              <a:t> (</a:t>
+            </a:r>
+            <a:r>
+              <a:rPr lang="en-CA" sz="1200" b="1" dirty="0"/>
+              <a:t>latitude</a:t>
+            </a:r>
+            <a:r>
+              <a:rPr lang="en-CA" sz="1200" dirty="0"/>
+              <a:t>, </a:t>
+            </a:r>
+            <a:r>
+              <a:rPr lang="en-CA" sz="1200" b="1" dirty="0"/>
+              <a:t>longitude</a:t>
+            </a:r>
+            <a:r>
+              <a:rPr lang="en-CA" sz="1200" dirty="0"/>
+              <a:t>, </a:t>
+            </a:r>
+            <a:r>
+              <a:rPr lang="en-CA" sz="1200" b="1" dirty="0" err="1"/>
+              <a:t>profondeur</a:t>
+            </a:r>
+            <a:r>
+              <a:rPr lang="en-CA" sz="1200" dirty="0"/>
+              <a:t>), des </a:t>
+            </a:r>
+            <a:r>
+              <a:rPr lang="en-CA" sz="1200" dirty="0" err="1"/>
+              <a:t>mesures</a:t>
+            </a:r>
+            <a:r>
+              <a:rPr lang="en-CA" sz="1200" dirty="0"/>
+              <a:t> de </a:t>
+            </a:r>
+            <a:r>
+              <a:rPr lang="en-CA" sz="1200" dirty="0" err="1"/>
+              <a:t>qualité</a:t>
+            </a:r>
+            <a:r>
+              <a:rPr lang="en-CA" sz="1200" dirty="0"/>
+              <a:t> de </a:t>
+            </a:r>
+            <a:r>
+              <a:rPr lang="en-CA" sz="1200" dirty="0" err="1"/>
+              <a:t>l’enregistrement</a:t>
+            </a:r>
+            <a:r>
+              <a:rPr lang="en-CA" sz="1200" dirty="0"/>
+              <a:t> (</a:t>
+            </a:r>
+            <a:r>
+              <a:rPr lang="en-CA" sz="1200" b="1" dirty="0" err="1"/>
+              <a:t>dmin</a:t>
+            </a:r>
+            <a:r>
+              <a:rPr lang="en-CA" sz="1200" dirty="0"/>
+              <a:t>, </a:t>
+            </a:r>
+            <a:r>
+              <a:rPr lang="en-CA" sz="1200" b="1" dirty="0"/>
+              <a:t>gap</a:t>
+            </a:r>
+            <a:r>
+              <a:rPr lang="en-CA" sz="1200" dirty="0"/>
+              <a:t>, </a:t>
+            </a:r>
+            <a:r>
+              <a:rPr lang="en-CA" sz="1200" b="1" dirty="0"/>
+              <a:t>rms</a:t>
+            </a:r>
+            <a:r>
+              <a:rPr lang="en-CA" sz="1200" dirty="0"/>
+              <a:t>, </a:t>
+            </a:r>
+            <a:r>
+              <a:rPr lang="en-CA" sz="1200" b="1" dirty="0" err="1"/>
+              <a:t>nst</a:t>
+            </a:r>
+            <a:r>
+              <a:rPr lang="en-CA" sz="1200" dirty="0"/>
+              <a:t>), </a:t>
+            </a:r>
+            <a:r>
+              <a:rPr lang="en-CA" sz="1200" dirty="0" err="1"/>
+              <a:t>ainsi</a:t>
+            </a:r>
+            <a:r>
+              <a:rPr lang="en-CA" sz="1200" dirty="0"/>
+              <a:t> </a:t>
+            </a:r>
+            <a:r>
+              <a:rPr lang="en-CA" sz="1200" dirty="0" err="1"/>
+              <a:t>que</a:t>
+            </a:r>
+            <a:r>
+              <a:rPr lang="en-CA" sz="1200" dirty="0"/>
+              <a:t> la </a:t>
+            </a:r>
+            <a:r>
+              <a:rPr lang="en-CA" sz="1200" b="1" dirty="0"/>
+              <a:t>magnitude</a:t>
+            </a:r>
+            <a:r>
+              <a:rPr lang="en-CA" sz="1200" dirty="0"/>
+              <a:t>, </a:t>
+            </a:r>
+            <a:r>
+              <a:rPr lang="en-CA" sz="1200" dirty="0" err="1"/>
+              <a:t>afin</a:t>
+            </a:r>
+            <a:r>
+              <a:rPr lang="en-CA" sz="1200" dirty="0"/>
+              <a:t> </a:t>
+            </a:r>
+            <a:r>
+              <a:rPr lang="en-CA" sz="1200" dirty="0" err="1"/>
+              <a:t>d’estimer</a:t>
+            </a:r>
+            <a:r>
+              <a:rPr lang="en-CA" sz="1200" dirty="0"/>
+              <a:t> </a:t>
+            </a:r>
+            <a:r>
+              <a:rPr lang="en-CA" sz="1200" b="1" dirty="0" err="1"/>
+              <a:t>l’importance</a:t>
+            </a:r>
+            <a:r>
+              <a:rPr lang="en-CA" sz="1200" b="1" dirty="0"/>
+              <a:t> (significance)</a:t>
+            </a:r>
+            <a:r>
+              <a:rPr lang="en-CA" sz="1200" dirty="0"/>
+              <a:t> du </a:t>
+            </a:r>
+            <a:r>
+              <a:rPr lang="en-CA" sz="1200" dirty="0" err="1"/>
+              <a:t>séisme</a:t>
+            </a:r>
+            <a:r>
+              <a:rPr lang="fr-CA" sz="1200" dirty="0">
+                <a:solidFill>
+                  <a:srgbClr val="626F7B"/>
+                </a:solidFill>
+                <a:latin typeface="Aptos"/>
+              </a:rPr>
+              <a:t>.</a:t>
+            </a:r>
+          </a:p>
+          <a:p>
+            <a:pPr algn="l"/>
+            <a:endParaRPr sz="1200" b="0" dirty="0">
+              <a:solidFill>
+                <a:srgbClr val="626F7B"/>
+              </a:solidFill>
+              <a:latin typeface="Aptos"/>
+            </a:endParaRPr>
           </a:p>
         </p:txBody>
       </p:sp>
@@ -18743,11 +19225,17 @@
           <p:cNvGraphicFramePr>
             <a:graphicFrameLocks noGrp="1"/>
           </p:cNvGraphicFramePr>
-          <p:nvPr/>
+          <p:nvPr>
+            <p:extLst>
+              <p:ext uri="{D42A27DB-BD31-4B8C-83A1-F6EECF244321}">
+                <p14:modId xmlns:p14="http://schemas.microsoft.com/office/powerpoint/2010/main" val="228999659"/>
+              </p:ext>
+            </p:extLst>
+          </p:nvPr>
         </p:nvGraphicFramePr>
         <p:xfrm>
-          <a:off x="685800" y="1600200"/>
-          <a:ext cx="5577840" cy="2514600"/>
+          <a:off x="534309" y="2729485"/>
+          <a:ext cx="5852161" cy="2898648"/>
         </p:xfrm>
         <a:graphic>
           <a:graphicData uri="http://schemas.openxmlformats.org/drawingml/2006/table">
@@ -18756,28 +19244,28 @@
                 <a:tableStyleId>{5C22544A-7EE6-4342-B048-85BDC9FD1C3A}</a:tableStyleId>
               </a:tblPr>
               <a:tblGrid>
-                <a:gridCol w="2011680">
+                <a:gridCol w="2110615">
                   <a:extLst>
                     <a:ext uri="{9D8B030D-6E8A-4147-A177-3AD203B41FA5}">
                       <a16:colId xmlns:a16="http://schemas.microsoft.com/office/drawing/2014/main" val="20000"/>
                     </a:ext>
                   </a:extLst>
                 </a:gridCol>
-                <a:gridCol w="1188720">
+                <a:gridCol w="1247182">
                   <a:extLst>
                     <a:ext uri="{9D8B030D-6E8A-4147-A177-3AD203B41FA5}">
                       <a16:colId xmlns:a16="http://schemas.microsoft.com/office/drawing/2014/main" val="20001"/>
                     </a:ext>
                   </a:extLst>
                 </a:gridCol>
-                <a:gridCol w="1188720">
+                <a:gridCol w="1247182">
                   <a:extLst>
                     <a:ext uri="{9D8B030D-6E8A-4147-A177-3AD203B41FA5}">
                       <a16:colId xmlns:a16="http://schemas.microsoft.com/office/drawing/2014/main" val="20002"/>
                     </a:ext>
                   </a:extLst>
                 </a:gridCol>
-                <a:gridCol w="1188720">
+                <a:gridCol w="1247182">
                   <a:extLst>
                     <a:ext uri="{9D8B030D-6E8A-4147-A177-3AD203B41FA5}">
                       <a16:colId xmlns:a16="http://schemas.microsoft.com/office/drawing/2014/main" val="20003"/>
@@ -18785,7 +19273,7 @@
                   </a:extLst>
                 </a:gridCol>
               </a:tblGrid>
-              <a:tr h="628650">
+              <a:tr h="724662">
                 <a:tc>
                   <a:txBody>
                     <a:bodyPr/>
@@ -18816,7 +19304,7 @@
                     <a:p>
                       <a:pPr algn="ctr"/>
                       <a:r>
-                        <a:rPr sz="1200" b="1">
+                        <a:rPr sz="1200" b="1" dirty="0">
                           <a:solidFill>
                             <a:srgbClr val="FFFFFF"/>
                           </a:solidFill>
@@ -18884,7 +19372,7 @@
                   </a:ext>
                 </a:extLst>
               </a:tr>
-              <a:tr h="628650">
+              <a:tr h="724662">
                 <a:tc>
                   <a:txBody>
                     <a:bodyPr/>
@@ -18983,7 +19471,7 @@
                   </a:ext>
                 </a:extLst>
               </a:tr>
-              <a:tr h="628650">
+              <a:tr h="724662">
                 <a:tc>
                   <a:txBody>
                     <a:bodyPr/>
@@ -19082,7 +19570,7 @@
                   </a:ext>
                 </a:extLst>
               </a:tr>
-              <a:tr h="628650">
+              <a:tr h="724662">
                 <a:tc>
                   <a:txBody>
                     <a:bodyPr/>
@@ -19159,7 +19647,7 @@
                     <a:p>
                       <a:pPr algn="ctr"/>
                       <a:r>
-                        <a:rPr sz="1200" b="0">
+                        <a:rPr sz="1200" b="0" dirty="0">
                           <a:solidFill>
                             <a:srgbClr val="232B32"/>
                           </a:solidFill>
@@ -19193,7 +19681,7 @@
         </p:nvSpPr>
         <p:spPr>
           <a:xfrm>
-            <a:off x="6903720" y="1600200"/>
+            <a:off x="7606579" y="2441448"/>
             <a:ext cx="4389120" cy="1325880"/>
           </a:xfrm>
           <a:prstGeom prst="roundRect">
@@ -19239,7 +19727,7 @@
         </p:nvSpPr>
         <p:spPr>
           <a:xfrm>
-            <a:off x="7068312" y="1746504"/>
+            <a:off x="7771171" y="2587752"/>
             <a:ext cx="4059935" cy="320040"/>
           </a:xfrm>
           <a:prstGeom prst="rect">
@@ -19274,7 +19762,7 @@
         </p:nvSpPr>
         <p:spPr>
           <a:xfrm>
-            <a:off x="7068312" y="2130552"/>
+            <a:off x="7771171" y="2971800"/>
             <a:ext cx="4059935" cy="667512"/>
           </a:xfrm>
           <a:prstGeom prst="rect">
@@ -19309,7 +19797,7 @@
         </p:nvSpPr>
         <p:spPr>
           <a:xfrm>
-            <a:off x="6903720" y="3154680"/>
+            <a:off x="7606579" y="3995928"/>
             <a:ext cx="4389120" cy="1325880"/>
           </a:xfrm>
           <a:prstGeom prst="roundRect">
@@ -19355,7 +19843,7 @@
         </p:nvSpPr>
         <p:spPr>
           <a:xfrm>
-            <a:off x="7068312" y="3300984"/>
+            <a:off x="7771171" y="4142232"/>
             <a:ext cx="4059935" cy="320040"/>
           </a:xfrm>
           <a:prstGeom prst="rect">
@@ -19390,7 +19878,7 @@
         </p:nvSpPr>
         <p:spPr>
           <a:xfrm>
-            <a:off x="7068312" y="3685032"/>
+            <a:off x="7771171" y="4526280"/>
             <a:ext cx="4059935" cy="667512"/>
           </a:xfrm>
           <a:prstGeom prst="rect">
@@ -19425,7 +19913,7 @@
         </p:nvSpPr>
         <p:spPr>
           <a:xfrm>
-            <a:off x="6903720" y="4709160"/>
+            <a:off x="7606579" y="5550408"/>
             <a:ext cx="4389120" cy="1051560"/>
           </a:xfrm>
           <a:prstGeom prst="roundRect">
@@ -19471,7 +19959,7 @@
         </p:nvSpPr>
         <p:spPr>
           <a:xfrm>
-            <a:off x="7068312" y="4855464"/>
+            <a:off x="7771171" y="5696712"/>
             <a:ext cx="4059935" cy="320040"/>
           </a:xfrm>
           <a:prstGeom prst="rect">
@@ -19487,13 +19975,40 @@
           <a:p>
             <a:pPr algn="l"/>
             <a:r>
-              <a:rPr sz="1500" b="1">
+              <a:rPr sz="1500" b="1" dirty="0" err="1">
                 <a:solidFill>
                   <a:srgbClr val="215E91"/>
                 </a:solidFill>
                 <a:latin typeface="Aptos"/>
               </a:rPr>
-              <a:t>Pourquoi pas seulement R² ?</a:t>
+              <a:t>Pourquoi</a:t>
+            </a:r>
+            <a:r>
+              <a:rPr sz="1500" b="1" dirty="0">
+                <a:solidFill>
+                  <a:srgbClr val="215E91"/>
+                </a:solidFill>
+                <a:latin typeface="Aptos"/>
+              </a:rPr>
+              <a:t> pas </a:t>
+            </a:r>
+            <a:r>
+              <a:rPr sz="1500" b="1" dirty="0" err="1">
+                <a:solidFill>
+                  <a:srgbClr val="215E91"/>
+                </a:solidFill>
+                <a:latin typeface="Aptos"/>
+              </a:rPr>
+              <a:t>seulement</a:t>
+            </a:r>
+            <a:r>
+              <a:rPr sz="1500" b="1" dirty="0">
+                <a:solidFill>
+                  <a:srgbClr val="215E91"/>
+                </a:solidFill>
+                <a:latin typeface="Aptos"/>
+              </a:rPr>
+              <a:t> R² ?</a:t>
             </a:r>
           </a:p>
         </p:txBody>
@@ -19506,7 +20021,7 @@
         </p:nvSpPr>
         <p:spPr>
           <a:xfrm>
-            <a:off x="7068312" y="5239512"/>
+            <a:off x="7771171" y="6080760"/>
             <a:ext cx="4059935" cy="393191"/>
           </a:xfrm>
           <a:prstGeom prst="rect">
@@ -19522,13 +20037,103 @@
           <a:p>
             <a:pPr algn="l"/>
             <a:r>
-              <a:rPr sz="1100" b="0">
+              <a:rPr sz="1100" b="0" dirty="0">
                 <a:solidFill>
                   <a:srgbClr val="232B32"/>
                 </a:solidFill>
                 <a:latin typeface="Aptos"/>
               </a:rPr>
-              <a:t>R² décrit l’ajustement global; MAE/RMSE donnent directement la taille des erreurs.</a:t>
+              <a:t>R² </a:t>
+            </a:r>
+            <a:r>
+              <a:rPr sz="1100" b="0" dirty="0" err="1">
+                <a:solidFill>
+                  <a:srgbClr val="232B32"/>
+                </a:solidFill>
+                <a:latin typeface="Aptos"/>
+              </a:rPr>
+              <a:t>décrit</a:t>
+            </a:r>
+            <a:r>
+              <a:rPr sz="1100" b="0" dirty="0">
+                <a:solidFill>
+                  <a:srgbClr val="232B32"/>
+                </a:solidFill>
+                <a:latin typeface="Aptos"/>
+              </a:rPr>
+              <a:t> </a:t>
+            </a:r>
+            <a:r>
+              <a:rPr sz="1100" b="0" dirty="0" err="1">
+                <a:solidFill>
+                  <a:srgbClr val="232B32"/>
+                </a:solidFill>
+                <a:latin typeface="Aptos"/>
+              </a:rPr>
+              <a:t>l’ajustement</a:t>
+            </a:r>
+            <a:r>
+              <a:rPr sz="1100" b="0" dirty="0">
+                <a:solidFill>
+                  <a:srgbClr val="232B32"/>
+                </a:solidFill>
+                <a:latin typeface="Aptos"/>
+              </a:rPr>
+              <a:t> global; MAE/RMSE </a:t>
+            </a:r>
+            <a:r>
+              <a:rPr sz="1100" b="0" dirty="0" err="1">
+                <a:solidFill>
+                  <a:srgbClr val="232B32"/>
+                </a:solidFill>
+                <a:latin typeface="Aptos"/>
+              </a:rPr>
+              <a:t>donnent</a:t>
+            </a:r>
+            <a:r>
+              <a:rPr sz="1100" b="0" dirty="0">
+                <a:solidFill>
+                  <a:srgbClr val="232B32"/>
+                </a:solidFill>
+                <a:latin typeface="Aptos"/>
+              </a:rPr>
+              <a:t> </a:t>
+            </a:r>
+            <a:r>
+              <a:rPr sz="1100" b="0" dirty="0" err="1">
+                <a:solidFill>
+                  <a:srgbClr val="232B32"/>
+                </a:solidFill>
+                <a:latin typeface="Aptos"/>
+              </a:rPr>
+              <a:t>directement</a:t>
+            </a:r>
+            <a:r>
+              <a:rPr sz="1100" b="0" dirty="0">
+                <a:solidFill>
+                  <a:srgbClr val="232B32"/>
+                </a:solidFill>
+                <a:latin typeface="Aptos"/>
+              </a:rPr>
+              <a:t> la taille des </a:t>
+            </a:r>
+            <a:r>
+              <a:rPr sz="1100" b="0" dirty="0" err="1">
+                <a:solidFill>
+                  <a:srgbClr val="232B32"/>
+                </a:solidFill>
+                <a:latin typeface="Aptos"/>
+              </a:rPr>
+              <a:t>erreurs</a:t>
+            </a:r>
+            <a:r>
+              <a:rPr sz="1100" b="0" dirty="0">
+                <a:solidFill>
+                  <a:srgbClr val="232B32"/>
+                </a:solidFill>
+                <a:latin typeface="Aptos"/>
+              </a:rPr>
+              <a:t>.</a:t>
             </a:r>
           </a:p>
         </p:txBody>

--- a/Presentation_TP_USGS_Earthquake_AI_FINAL.pptx
+++ b/Presentation_TP_USGS_Earthquake_AI_FINAL.pptx
@@ -7,15 +7,15 @@
   <p:sldIdLst>
     <p:sldId id="256" r:id="rId2"/>
     <p:sldId id="257" r:id="rId3"/>
-    <p:sldId id="258" r:id="rId4"/>
-    <p:sldId id="259" r:id="rId5"/>
-    <p:sldId id="260" r:id="rId6"/>
-    <p:sldId id="261" r:id="rId7"/>
-    <p:sldId id="262" r:id="rId8"/>
-    <p:sldId id="263" r:id="rId9"/>
-    <p:sldId id="264" r:id="rId10"/>
-    <p:sldId id="265" r:id="rId11"/>
-    <p:sldId id="266" r:id="rId12"/>
+    <p:sldId id="259" r:id="rId4"/>
+    <p:sldId id="260" r:id="rId5"/>
+    <p:sldId id="261" r:id="rId6"/>
+    <p:sldId id="262" r:id="rId7"/>
+    <p:sldId id="263" r:id="rId8"/>
+    <p:sldId id="264" r:id="rId9"/>
+    <p:sldId id="265" r:id="rId10"/>
+    <p:sldId id="266" r:id="rId11"/>
+    <p:sldId id="258" r:id="rId12"/>
     <p:sldId id="267" r:id="rId13"/>
     <p:sldId id="268" r:id="rId14"/>
     <p:sldId id="269" r:id="rId15"/>
@@ -4223,7 +4223,7 @@
                 </a:solidFill>
                 <a:latin typeface="Aptos"/>
               </a:rPr>
-              <a:t>Modèle 07 — Pertes économiques : quelle erreur regarder ?</a:t>
+              <a:t>Modèle 08 — H2O AutoML : automatiser la comparaison</a:t>
             </a:r>
           </a:p>
         </p:txBody>
@@ -4302,7 +4302,7 @@
                 </a:solidFill>
                 <a:latin typeface="Aptos"/>
               </a:rPr>
-              <a:t>734 séismes : 625 pertes nulles, 109 pertes positives. Cible transformée avec log1p.</a:t>
+              <a:t>Même problème de dommages, avec sélection automatique de plusieurs modèles et hyperparamètres.</a:t>
             </a:r>
           </a:p>
         </p:txBody>
@@ -4337,7 +4337,7 @@
                 </a:solidFill>
                 <a:latin typeface="Aptos"/>
               </a:rPr>
-              <a:t>10</a:t>
+              <a:t>11</a:t>
             </a:r>
           </a:p>
         </p:txBody>
@@ -4350,625 +4350,8 @@
         </p:nvSpPr>
         <p:spPr>
           <a:xfrm>
-            <a:off x="640080" y="1417320"/>
-            <a:ext cx="2240280" cy="658368"/>
-          </a:xfrm>
-          <a:prstGeom prst="roundRect">
-            <a:avLst/>
-          </a:prstGeom>
-          <a:solidFill>
-            <a:srgbClr val="EBF4F8"/>
-          </a:solidFill>
-          <a:ln>
-            <a:solidFill>
-              <a:srgbClr val="2E7D5A"/>
-            </a:solidFill>
-          </a:ln>
-        </p:spPr>
-        <p:style>
-          <a:lnRef idx="1">
-            <a:schemeClr val="accent1"/>
-          </a:lnRef>
-          <a:fillRef idx="3">
-            <a:schemeClr val="accent1"/>
-          </a:fillRef>
-          <a:effectRef idx="2">
-            <a:schemeClr val="accent1"/>
-          </a:effectRef>
-          <a:fontRef idx="minor">
-            <a:schemeClr val="lt1"/>
-          </a:fontRef>
-        </p:style>
-        <p:txBody>
-          <a:bodyPr rtlCol="0" anchor="ctr"/>
-          <a:lstStyle/>
-          <a:p>
-            <a:pPr algn="ctr"/>
-            <a:endParaRPr/>
-          </a:p>
-        </p:txBody>
-      </p:sp>
-      <p:sp>
-        <p:nvSpPr>
-          <p:cNvPr id="7" name="TextBox 6"/>
-          <p:cNvSpPr txBox="1"/>
-          <p:nvPr/>
-        </p:nvSpPr>
-        <p:spPr>
-          <a:xfrm>
-            <a:off x="749808" y="1587416"/>
-            <a:ext cx="995781" cy="276999"/>
-          </a:xfrm>
-          <a:prstGeom prst="rect">
-            <a:avLst/>
-          </a:prstGeom>
-          <a:noFill/>
-        </p:spPr>
-        <p:txBody>
-          <a:bodyPr wrap="square" anchor="t">
-            <a:spAutoFit/>
-          </a:bodyPr>
-          <a:lstStyle/>
-          <a:p>
-            <a:pPr algn="l"/>
-            <a:r>
-              <a:rPr sz="1200" b="1" dirty="0">
-                <a:solidFill>
-                  <a:srgbClr val="626F7B"/>
-                </a:solidFill>
-                <a:latin typeface="Aptos"/>
-              </a:rPr>
-              <a:t>CHAMPION</a:t>
-            </a:r>
-          </a:p>
-        </p:txBody>
-      </p:sp>
-      <p:sp>
-        <p:nvSpPr>
-          <p:cNvPr id="8" name="TextBox 7"/>
-          <p:cNvSpPr txBox="1"/>
-          <p:nvPr/>
-        </p:nvSpPr>
-        <p:spPr>
-          <a:xfrm>
-            <a:off x="1774449" y="1473393"/>
-            <a:ext cx="1134770" cy="523220"/>
-          </a:xfrm>
-          <a:prstGeom prst="rect">
-            <a:avLst/>
-          </a:prstGeom>
-          <a:noFill/>
-        </p:spPr>
-        <p:txBody>
-          <a:bodyPr wrap="square" anchor="t">
-            <a:spAutoFit/>
-          </a:bodyPr>
-          <a:lstStyle/>
-          <a:p>
-            <a:r>
-              <a:rPr sz="1400" b="1" dirty="0">
-                <a:solidFill>
-                  <a:srgbClr val="2E7D5A"/>
-                </a:solidFill>
-                <a:latin typeface="Aptos"/>
-              </a:rPr>
-              <a:t>Gradient Boosting</a:t>
-            </a:r>
-          </a:p>
-        </p:txBody>
-      </p:sp>
-      <p:sp>
-        <p:nvSpPr>
-          <p:cNvPr id="9" name="Rounded Rectangle 8"/>
-          <p:cNvSpPr/>
-          <p:nvPr/>
-        </p:nvSpPr>
-        <p:spPr>
-          <a:xfrm>
-            <a:off x="3063240" y="1417320"/>
-            <a:ext cx="1965960" cy="658368"/>
-          </a:xfrm>
-          <a:prstGeom prst="roundRect">
-            <a:avLst/>
-          </a:prstGeom>
-          <a:solidFill>
-            <a:srgbClr val="EBF4F8"/>
-          </a:solidFill>
-          <a:ln>
-            <a:solidFill>
-              <a:srgbClr val="215E91"/>
-            </a:solidFill>
-          </a:ln>
-        </p:spPr>
-        <p:style>
-          <a:lnRef idx="1">
-            <a:schemeClr val="accent1"/>
-          </a:lnRef>
-          <a:fillRef idx="3">
-            <a:schemeClr val="accent1"/>
-          </a:fillRef>
-          <a:effectRef idx="2">
-            <a:schemeClr val="accent1"/>
-          </a:effectRef>
-          <a:fontRef idx="minor">
-            <a:schemeClr val="lt1"/>
-          </a:fontRef>
-        </p:style>
-        <p:txBody>
-          <a:bodyPr rtlCol="0" anchor="ctr"/>
-          <a:lstStyle/>
-          <a:p>
-            <a:pPr algn="ctr"/>
-            <a:endParaRPr/>
-          </a:p>
-        </p:txBody>
-      </p:sp>
-      <p:sp>
-        <p:nvSpPr>
-          <p:cNvPr id="10" name="TextBox 9"/>
-          <p:cNvSpPr txBox="1"/>
-          <p:nvPr/>
-        </p:nvSpPr>
-        <p:spPr>
-          <a:xfrm>
-            <a:off x="3172968" y="1577584"/>
-            <a:ext cx="1022299" cy="307777"/>
-          </a:xfrm>
-          <a:prstGeom prst="rect">
-            <a:avLst/>
-          </a:prstGeom>
-          <a:noFill/>
-        </p:spPr>
-        <p:txBody>
-          <a:bodyPr wrap="square" anchor="t">
-            <a:spAutoFit/>
-          </a:bodyPr>
-          <a:lstStyle/>
-          <a:p>
-            <a:pPr algn="l"/>
-            <a:r>
-              <a:rPr sz="1400" b="1" dirty="0">
-                <a:solidFill>
-                  <a:srgbClr val="626F7B"/>
-                </a:solidFill>
-                <a:latin typeface="Aptos"/>
-              </a:rPr>
-              <a:t>R² (log)</a:t>
-            </a:r>
-          </a:p>
-        </p:txBody>
-      </p:sp>
-      <p:sp>
-        <p:nvSpPr>
-          <p:cNvPr id="11" name="TextBox 10"/>
-          <p:cNvSpPr txBox="1"/>
-          <p:nvPr/>
-        </p:nvSpPr>
-        <p:spPr>
-          <a:xfrm>
-            <a:off x="3760445" y="1559296"/>
-            <a:ext cx="1052475" cy="353943"/>
-          </a:xfrm>
-          <a:prstGeom prst="rect">
-            <a:avLst/>
-          </a:prstGeom>
-          <a:noFill/>
-        </p:spPr>
-        <p:txBody>
-          <a:bodyPr wrap="square" anchor="t">
-            <a:spAutoFit/>
-          </a:bodyPr>
-          <a:lstStyle/>
-          <a:p>
-            <a:pPr algn="r"/>
-            <a:r>
-              <a:rPr sz="1700" b="1" dirty="0">
-                <a:solidFill>
-                  <a:srgbClr val="215E91"/>
-                </a:solidFill>
-                <a:latin typeface="Aptos"/>
-              </a:rPr>
-              <a:t>0,6859</a:t>
-            </a:r>
-          </a:p>
-        </p:txBody>
-      </p:sp>
-      <p:sp>
-        <p:nvSpPr>
-          <p:cNvPr id="12" name="Rounded Rectangle 11"/>
-          <p:cNvSpPr/>
-          <p:nvPr/>
-        </p:nvSpPr>
-        <p:spPr>
-          <a:xfrm>
-            <a:off x="5212080" y="1417320"/>
-            <a:ext cx="1965960" cy="658368"/>
-          </a:xfrm>
-          <a:prstGeom prst="roundRect">
-            <a:avLst/>
-          </a:prstGeom>
-          <a:solidFill>
-            <a:srgbClr val="EBF4F8"/>
-          </a:solidFill>
-          <a:ln>
-            <a:solidFill>
-              <a:srgbClr val="36A2BF"/>
-            </a:solidFill>
-          </a:ln>
-        </p:spPr>
-        <p:style>
-          <a:lnRef idx="1">
-            <a:schemeClr val="accent1"/>
-          </a:lnRef>
-          <a:fillRef idx="3">
-            <a:schemeClr val="accent1"/>
-          </a:fillRef>
-          <a:effectRef idx="2">
-            <a:schemeClr val="accent1"/>
-          </a:effectRef>
-          <a:fontRef idx="minor">
-            <a:schemeClr val="lt1"/>
-          </a:fontRef>
-        </p:style>
-        <p:txBody>
-          <a:bodyPr rtlCol="0" anchor="ctr"/>
-          <a:lstStyle/>
-          <a:p>
-            <a:pPr algn="ctr"/>
-            <a:endParaRPr/>
-          </a:p>
-        </p:txBody>
-      </p:sp>
-      <p:sp>
-        <p:nvSpPr>
-          <p:cNvPr id="13" name="TextBox 12"/>
-          <p:cNvSpPr txBox="1"/>
-          <p:nvPr/>
-        </p:nvSpPr>
-        <p:spPr>
-          <a:xfrm>
-            <a:off x="5321808" y="1587417"/>
-            <a:ext cx="619963" cy="307777"/>
-          </a:xfrm>
-          <a:prstGeom prst="rect">
-            <a:avLst/>
-          </a:prstGeom>
-          <a:noFill/>
-        </p:spPr>
-        <p:txBody>
-          <a:bodyPr wrap="square" anchor="t">
-            <a:spAutoFit/>
-          </a:bodyPr>
-          <a:lstStyle/>
-          <a:p>
-            <a:pPr algn="l"/>
-            <a:r>
-              <a:rPr sz="1400" b="1" dirty="0">
-                <a:solidFill>
-                  <a:srgbClr val="626F7B"/>
-                </a:solidFill>
-                <a:latin typeface="Aptos"/>
-              </a:rPr>
-              <a:t>MAE</a:t>
-            </a:r>
-            <a:endParaRPr sz="900" b="1" dirty="0">
-              <a:solidFill>
-                <a:srgbClr val="626F7B"/>
-              </a:solidFill>
-              <a:latin typeface="Aptos"/>
-            </a:endParaRPr>
-          </a:p>
-        </p:txBody>
-      </p:sp>
-      <p:sp>
-        <p:nvSpPr>
-          <p:cNvPr id="14" name="TextBox 13"/>
-          <p:cNvSpPr txBox="1"/>
-          <p:nvPr/>
-        </p:nvSpPr>
-        <p:spPr>
-          <a:xfrm>
-            <a:off x="5815525" y="1554480"/>
-            <a:ext cx="1236269" cy="353943"/>
-          </a:xfrm>
-          <a:prstGeom prst="rect">
-            <a:avLst/>
-          </a:prstGeom>
-          <a:noFill/>
-        </p:spPr>
-        <p:txBody>
-          <a:bodyPr wrap="square" anchor="t">
-            <a:spAutoFit/>
-          </a:bodyPr>
-          <a:lstStyle/>
-          <a:p>
-            <a:pPr algn="r"/>
-            <a:r>
-              <a:rPr sz="1700" b="1" dirty="0">
-                <a:solidFill>
-                  <a:srgbClr val="36A2BF"/>
-                </a:solidFill>
-                <a:latin typeface="Aptos"/>
-              </a:rPr>
-              <a:t>353,47 M$</a:t>
-            </a:r>
-          </a:p>
-        </p:txBody>
-      </p:sp>
-      <p:sp>
-        <p:nvSpPr>
-          <p:cNvPr id="15" name="Rounded Rectangle 14"/>
-          <p:cNvSpPr/>
-          <p:nvPr/>
-        </p:nvSpPr>
-        <p:spPr>
-          <a:xfrm>
-            <a:off x="7360920" y="1417320"/>
-            <a:ext cx="1965960" cy="658368"/>
-          </a:xfrm>
-          <a:prstGeom prst="roundRect">
-            <a:avLst/>
-          </a:prstGeom>
-          <a:solidFill>
-            <a:srgbClr val="EBF4F8"/>
-          </a:solidFill>
-          <a:ln>
-            <a:solidFill>
-              <a:srgbClr val="B44141"/>
-            </a:solidFill>
-          </a:ln>
-        </p:spPr>
-        <p:style>
-          <a:lnRef idx="1">
-            <a:schemeClr val="accent1"/>
-          </a:lnRef>
-          <a:fillRef idx="3">
-            <a:schemeClr val="accent1"/>
-          </a:fillRef>
-          <a:effectRef idx="2">
-            <a:schemeClr val="accent1"/>
-          </a:effectRef>
-          <a:fontRef idx="minor">
-            <a:schemeClr val="lt1"/>
-          </a:fontRef>
-        </p:style>
-        <p:txBody>
-          <a:bodyPr rtlCol="0" anchor="ctr"/>
-          <a:lstStyle/>
-          <a:p>
-            <a:pPr algn="ctr"/>
-            <a:endParaRPr/>
-          </a:p>
-        </p:txBody>
-      </p:sp>
-      <p:sp>
-        <p:nvSpPr>
-          <p:cNvPr id="16" name="TextBox 15"/>
-          <p:cNvSpPr txBox="1"/>
-          <p:nvPr/>
-        </p:nvSpPr>
-        <p:spPr>
-          <a:xfrm>
-            <a:off x="7470648" y="1567752"/>
-            <a:ext cx="1022299" cy="338554"/>
-          </a:xfrm>
-          <a:prstGeom prst="rect">
-            <a:avLst/>
-          </a:prstGeom>
-          <a:noFill/>
-        </p:spPr>
-        <p:txBody>
-          <a:bodyPr wrap="square" anchor="t">
-            <a:spAutoFit/>
-          </a:bodyPr>
-          <a:lstStyle/>
-          <a:p>
-            <a:pPr algn="l"/>
-            <a:r>
-              <a:rPr sz="1600" b="1" dirty="0">
-                <a:solidFill>
-                  <a:srgbClr val="626F7B"/>
-                </a:solidFill>
-                <a:latin typeface="Aptos"/>
-              </a:rPr>
-              <a:t>RMSE</a:t>
-            </a:r>
-            <a:endParaRPr sz="900" b="1" dirty="0">
-              <a:solidFill>
-                <a:srgbClr val="626F7B"/>
-              </a:solidFill>
-              <a:latin typeface="Aptos"/>
-            </a:endParaRPr>
-          </a:p>
-        </p:txBody>
-      </p:sp>
-      <p:sp>
-        <p:nvSpPr>
-          <p:cNvPr id="17" name="TextBox 16"/>
-          <p:cNvSpPr txBox="1"/>
-          <p:nvPr/>
-        </p:nvSpPr>
-        <p:spPr>
-          <a:xfrm>
-            <a:off x="8130830" y="1579415"/>
-            <a:ext cx="1022299" cy="353943"/>
-          </a:xfrm>
-          <a:prstGeom prst="rect">
-            <a:avLst/>
-          </a:prstGeom>
-          <a:noFill/>
-        </p:spPr>
-        <p:txBody>
-          <a:bodyPr wrap="square" anchor="t">
-            <a:spAutoFit/>
-          </a:bodyPr>
-          <a:lstStyle/>
-          <a:p>
-            <a:pPr algn="r"/>
-            <a:r>
-              <a:rPr sz="1700" b="1" dirty="0">
-                <a:solidFill>
-                  <a:srgbClr val="B44141"/>
-                </a:solidFill>
-                <a:latin typeface="Aptos"/>
-              </a:rPr>
-              <a:t>4,27 G$</a:t>
-            </a:r>
-          </a:p>
-        </p:txBody>
-      </p:sp>
-      <p:sp>
-        <p:nvSpPr>
-          <p:cNvPr id="18" name="Rounded Rectangle 17"/>
-          <p:cNvSpPr/>
-          <p:nvPr/>
-        </p:nvSpPr>
-        <p:spPr>
-          <a:xfrm>
-            <a:off x="9509760" y="1417320"/>
-            <a:ext cx="1965960" cy="658368"/>
-          </a:xfrm>
-          <a:prstGeom prst="roundRect">
-            <a:avLst/>
-          </a:prstGeom>
-          <a:solidFill>
-            <a:srgbClr val="EBF4F8"/>
-          </a:solidFill>
-          <a:ln>
-            <a:solidFill>
-              <a:srgbClr val="B44141"/>
-            </a:solidFill>
-          </a:ln>
-        </p:spPr>
-        <p:style>
-          <a:lnRef idx="1">
-            <a:schemeClr val="accent1"/>
-          </a:lnRef>
-          <a:fillRef idx="3">
-            <a:schemeClr val="accent1"/>
-          </a:fillRef>
-          <a:effectRef idx="2">
-            <a:schemeClr val="accent1"/>
-          </a:effectRef>
-          <a:fontRef idx="minor">
-            <a:schemeClr val="lt1"/>
-          </a:fontRef>
-        </p:style>
-        <p:txBody>
-          <a:bodyPr rtlCol="0" anchor="ctr"/>
-          <a:lstStyle/>
-          <a:p>
-            <a:pPr algn="ctr"/>
-            <a:endParaRPr/>
-          </a:p>
-        </p:txBody>
-      </p:sp>
-      <p:sp>
-        <p:nvSpPr>
-          <p:cNvPr id="19" name="TextBox 18"/>
-          <p:cNvSpPr txBox="1"/>
-          <p:nvPr/>
-        </p:nvSpPr>
-        <p:spPr>
-          <a:xfrm>
-            <a:off x="9619488" y="1508760"/>
-            <a:ext cx="1022299" cy="523220"/>
-          </a:xfrm>
-          <a:prstGeom prst="rect">
-            <a:avLst/>
-          </a:prstGeom>
-          <a:noFill/>
-        </p:spPr>
-        <p:txBody>
-          <a:bodyPr wrap="square" anchor="t">
-            <a:spAutoFit/>
-          </a:bodyPr>
-          <a:lstStyle/>
-          <a:p>
-            <a:pPr algn="l"/>
-            <a:r>
-              <a:rPr sz="1400" b="1" dirty="0">
-                <a:solidFill>
-                  <a:srgbClr val="626F7B"/>
-                </a:solidFill>
-                <a:latin typeface="Aptos"/>
-              </a:rPr>
-              <a:t>RMSE</a:t>
-            </a:r>
-            <a:r>
-              <a:rPr sz="900" b="1" dirty="0">
-                <a:solidFill>
-                  <a:srgbClr val="626F7B"/>
-                </a:solidFill>
-                <a:latin typeface="Aptos"/>
-              </a:rPr>
-              <a:t> </a:t>
-            </a:r>
-            <a:r>
-              <a:rPr sz="1400" b="1" dirty="0" err="1">
-                <a:solidFill>
-                  <a:srgbClr val="626F7B"/>
-                </a:solidFill>
-                <a:latin typeface="Aptos"/>
-              </a:rPr>
-              <a:t>pertes</a:t>
-            </a:r>
-            <a:r>
-              <a:rPr sz="900" b="1" dirty="0">
-                <a:solidFill>
-                  <a:srgbClr val="626F7B"/>
-                </a:solidFill>
-                <a:latin typeface="Aptos"/>
-              </a:rPr>
-              <a:t> +</a:t>
-            </a:r>
-          </a:p>
-        </p:txBody>
-      </p:sp>
-      <p:sp>
-        <p:nvSpPr>
-          <p:cNvPr id="20" name="TextBox 19"/>
-          <p:cNvSpPr txBox="1"/>
-          <p:nvPr/>
-        </p:nvSpPr>
-        <p:spPr>
-          <a:xfrm>
-            <a:off x="10404240" y="1569128"/>
-            <a:ext cx="1053389" cy="353943"/>
-          </a:xfrm>
-          <a:prstGeom prst="rect">
-            <a:avLst/>
-          </a:prstGeom>
-          <a:noFill/>
-        </p:spPr>
-        <p:txBody>
-          <a:bodyPr wrap="square" anchor="t">
-            <a:spAutoFit/>
-          </a:bodyPr>
-          <a:lstStyle/>
-          <a:p>
-            <a:r>
-              <a:rPr sz="1700" b="1" dirty="0">
-                <a:solidFill>
-                  <a:srgbClr val="B44141"/>
-                </a:solidFill>
-                <a:latin typeface="Aptos"/>
-              </a:rPr>
-              <a:t>11,03 G$</a:t>
-            </a:r>
-          </a:p>
-        </p:txBody>
-      </p:sp>
-      <p:sp>
-        <p:nvSpPr>
-          <p:cNvPr id="21" name="Rounded Rectangle 20"/>
-          <p:cNvSpPr/>
-          <p:nvPr/>
-        </p:nvSpPr>
-        <p:spPr>
-          <a:xfrm>
-            <a:off x="640080" y="2423160"/>
-            <a:ext cx="3383280" cy="2057400"/>
+            <a:off x="685800" y="1600200"/>
+            <a:ext cx="3337560" cy="1508760"/>
           </a:xfrm>
           <a:prstGeom prst="roundRect">
             <a:avLst/>
@@ -5007,14 +4390,14 @@
       </p:sp>
       <p:sp>
         <p:nvSpPr>
-          <p:cNvPr id="22" name="TextBox 21"/>
-          <p:cNvSpPr txBox="1"/>
-          <p:nvPr/>
-        </p:nvSpPr>
-        <p:spPr>
-          <a:xfrm>
-            <a:off x="804671" y="2569464"/>
-            <a:ext cx="3054096" cy="320040"/>
+          <p:cNvPr id="7" name="TextBox 6"/>
+          <p:cNvSpPr txBox="1"/>
+          <p:nvPr/>
+        </p:nvSpPr>
+        <p:spPr>
+          <a:xfrm>
+            <a:off x="850392" y="1746504"/>
+            <a:ext cx="3008376" cy="320040"/>
           </a:xfrm>
           <a:prstGeom prst="rect">
             <a:avLst/>
@@ -5035,21 +4418,21 @@
                 </a:solidFill>
                 <a:latin typeface="Aptos"/>
               </a:rPr>
-              <a:t>Algorithmes comparés</a:t>
-            </a:r>
-          </a:p>
-        </p:txBody>
-      </p:sp>
-      <p:sp>
-        <p:nvSpPr>
-          <p:cNvPr id="23" name="TextBox 22"/>
-          <p:cNvSpPr txBox="1"/>
-          <p:nvPr/>
-        </p:nvSpPr>
-        <p:spPr>
-          <a:xfrm>
-            <a:off x="804671" y="2953512"/>
-            <a:ext cx="3054096" cy="1399032"/>
+              <a:t>Ce que fait AutoML</a:t>
+            </a:r>
+          </a:p>
+        </p:txBody>
+      </p:sp>
+      <p:sp>
+        <p:nvSpPr>
+          <p:cNvPr id="8" name="TextBox 7"/>
+          <p:cNvSpPr txBox="1"/>
+          <p:nvPr/>
+        </p:nvSpPr>
+        <p:spPr>
+          <a:xfrm>
+            <a:off x="850392" y="2130552"/>
+            <a:ext cx="3008376" cy="850392"/>
           </a:xfrm>
           <a:prstGeom prst="rect">
             <a:avLst/>
@@ -5070,23 +4453,21 @@
                 </a:solidFill>
                 <a:latin typeface="Aptos"/>
               </a:rPr>
-              <a:t>Linear Regression
-Random Forest
-Gradient Boosting</a:t>
-            </a:r>
-          </a:p>
-        </p:txBody>
-      </p:sp>
-      <p:sp>
-        <p:nvSpPr>
-          <p:cNvPr id="24" name="Rounded Rectangle 23"/>
+              <a:t>Entraîne plusieurs familles de modèles, explore des hyperparamètres, construit un leaderboard et sélectionne selon une métrique.</a:t>
+            </a:r>
+          </a:p>
+        </p:txBody>
+      </p:sp>
+      <p:sp>
+        <p:nvSpPr>
+          <p:cNvPr id="9" name="Rounded Rectangle 8"/>
           <p:cNvSpPr/>
           <p:nvPr/>
         </p:nvSpPr>
         <p:spPr>
           <a:xfrm>
-            <a:off x="4251960" y="2423160"/>
-            <a:ext cx="3383280" cy="2057400"/>
+            <a:off x="4297680" y="1600200"/>
+            <a:ext cx="3337560" cy="1508760"/>
           </a:xfrm>
           <a:prstGeom prst="roundRect">
             <a:avLst/>
@@ -5125,14 +4506,14 @@
       </p:sp>
       <p:sp>
         <p:nvSpPr>
-          <p:cNvPr id="25" name="TextBox 24"/>
-          <p:cNvSpPr txBox="1"/>
-          <p:nvPr/>
-        </p:nvSpPr>
-        <p:spPr>
-          <a:xfrm>
-            <a:off x="4416552" y="2569464"/>
-            <a:ext cx="3054096" cy="320040"/>
+          <p:cNvPr id="10" name="TextBox 9"/>
+          <p:cNvSpPr txBox="1"/>
+          <p:nvPr/>
+        </p:nvSpPr>
+        <p:spPr>
+          <a:xfrm>
+            <a:off x="4462272" y="1746504"/>
+            <a:ext cx="3008376" cy="320040"/>
           </a:xfrm>
           <a:prstGeom prst="rect">
             <a:avLst/>
@@ -5153,21 +4534,21 @@
                 </a:solidFill>
                 <a:latin typeface="Aptos"/>
               </a:rPr>
-              <a:t>Pourquoi Gradient Boosting ?</a:t>
-            </a:r>
-          </a:p>
-        </p:txBody>
-      </p:sp>
-      <p:sp>
-        <p:nvSpPr>
-          <p:cNvPr id="26" name="TextBox 25"/>
-          <p:cNvSpPr txBox="1"/>
-          <p:nvPr/>
-        </p:nvSpPr>
-        <p:spPr>
-          <a:xfrm>
-            <a:off x="4416552" y="2953512"/>
-            <a:ext cx="3054096" cy="1399032"/>
+              <a:t>Métrique demandée</a:t>
+            </a:r>
+          </a:p>
+        </p:txBody>
+      </p:sp>
+      <p:sp>
+        <p:nvSpPr>
+          <p:cNvPr id="11" name="TextBox 10"/>
+          <p:cNvSpPr txBox="1"/>
+          <p:nvPr/>
+        </p:nvSpPr>
+        <p:spPr>
+          <a:xfrm>
+            <a:off x="4462272" y="2130552"/>
+            <a:ext cx="3008376" cy="850392"/>
           </a:xfrm>
           <a:prstGeom prst="rect">
             <a:avLst/>
@@ -5188,21 +4569,21 @@
                 </a:solidFill>
                 <a:latin typeface="Aptos"/>
               </a:rPr>
-              <a:t>Meilleures erreurs sur le jeu de test et sur les 22 événements du test avec pertes positives; meilleur R² moyen CV (0,6675).</a:t>
-            </a:r>
-          </a:p>
-        </p:txBody>
-      </p:sp>
-      <p:sp>
-        <p:nvSpPr>
-          <p:cNvPr id="27" name="Rounded Rectangle 26"/>
+              <a:t>Le notebook configure sort_metric = mean_per_class_error, cohérent avec un problème multiclasses déséquilibré.</a:t>
+            </a:r>
+          </a:p>
+        </p:txBody>
+      </p:sp>
+      <p:sp>
+        <p:nvSpPr>
+          <p:cNvPr id="12" name="Rounded Rectangle 11"/>
           <p:cNvSpPr/>
           <p:nvPr/>
         </p:nvSpPr>
         <p:spPr>
           <a:xfrm>
-            <a:off x="7863840" y="2423160"/>
-            <a:ext cx="3383280" cy="2057400"/>
+            <a:off x="7909560" y="1600200"/>
+            <a:ext cx="3337560" cy="1508760"/>
           </a:xfrm>
           <a:prstGeom prst="roundRect">
             <a:avLst/>
@@ -5241,14 +4622,14 @@
       </p:sp>
       <p:sp>
         <p:nvSpPr>
-          <p:cNvPr id="28" name="TextBox 27"/>
-          <p:cNvSpPr txBox="1"/>
-          <p:nvPr/>
-        </p:nvSpPr>
-        <p:spPr>
-          <a:xfrm>
-            <a:off x="8028431" y="2569464"/>
-            <a:ext cx="3054096" cy="320040"/>
+          <p:cNvPr id="13" name="TextBox 12"/>
+          <p:cNvSpPr txBox="1"/>
+          <p:nvPr/>
+        </p:nvSpPr>
+        <p:spPr>
+          <a:xfrm>
+            <a:off x="8074152" y="1746504"/>
+            <a:ext cx="3008376" cy="320040"/>
           </a:xfrm>
           <a:prstGeom prst="rect">
             <a:avLst/>
@@ -5269,21 +4650,21 @@
                 </a:solidFill>
                 <a:latin typeface="Aptos"/>
               </a:rPr>
-              <a:t>Nuance importante</a:t>
-            </a:r>
-          </a:p>
-        </p:txBody>
-      </p:sp>
-      <p:sp>
-        <p:nvSpPr>
-          <p:cNvPr id="29" name="TextBox 28"/>
-          <p:cNvSpPr txBox="1"/>
-          <p:nvPr/>
-        </p:nvSpPr>
-        <p:spPr>
-          <a:xfrm>
-            <a:off x="8028431" y="2953512"/>
-            <a:ext cx="3054096" cy="1399032"/>
+              <a:t>Limite observée</a:t>
+            </a:r>
+          </a:p>
+        </p:txBody>
+      </p:sp>
+      <p:sp>
+        <p:nvSpPr>
+          <p:cNvPr id="14" name="TextBox 13"/>
+          <p:cNvSpPr txBox="1"/>
+          <p:nvPr/>
+        </p:nvSpPr>
+        <p:spPr>
+          <a:xfrm>
+            <a:off x="8074152" y="2130552"/>
+            <a:ext cx="3008376" cy="850392"/>
           </a:xfrm>
           <a:prstGeom prst="rect">
             <a:avLst/>
@@ -5304,21 +4685,21 @@
                 </a:solidFill>
                 <a:latin typeface="Aptos"/>
               </a:rPr>
-              <a:t>Random Forest a de meilleures erreurs moyennes en dollars en validation croisée. Le choix dépend donc de la métrique considérée.</a:t>
-            </a:r>
-          </a:p>
-        </p:txBody>
-      </p:sp>
-      <p:sp>
-        <p:nvSpPr>
-          <p:cNvPr id="30" name="TextBox 29"/>
-          <p:cNvSpPr txBox="1"/>
-          <p:nvPr/>
-        </p:nvSpPr>
-        <p:spPr>
-          <a:xfrm>
-            <a:off x="685800" y="4892040"/>
-            <a:ext cx="1508760" cy="274320"/>
+              <a:t>Dans l’exécution fournie, H2O indique : « XGBoost is not available; skipping it. »</a:t>
+            </a:r>
+          </a:p>
+        </p:txBody>
+      </p:sp>
+      <p:sp>
+        <p:nvSpPr>
+          <p:cNvPr id="15" name="TextBox 14"/>
+          <p:cNvSpPr txBox="1"/>
+          <p:nvPr/>
+        </p:nvSpPr>
+        <p:spPr>
+          <a:xfrm>
+            <a:off x="685800" y="3657600"/>
+            <a:ext cx="5120640" cy="320040"/>
           </a:xfrm>
           <a:prstGeom prst="rect">
             <a:avLst/>
@@ -5333,55 +4714,203 @@
           <a:p>
             <a:pPr algn="l"/>
             <a:r>
-              <a:rPr sz="1500" b="1">
+              <a:rPr sz="1700" b="1">
                 <a:solidFill>
                   <a:srgbClr val="0F2238"/>
                 </a:solidFill>
                 <a:latin typeface="Aptos"/>
               </a:rPr>
-              <a:t>Risque principal</a:t>
-            </a:r>
-          </a:p>
-        </p:txBody>
-      </p:sp>
-      <p:sp>
-        <p:nvSpPr>
-          <p:cNvPr id="31" name="TextBox 30"/>
-          <p:cNvSpPr txBox="1"/>
-          <p:nvPr/>
-        </p:nvSpPr>
-        <p:spPr>
-          <a:xfrm>
-            <a:off x="2240280" y="4892040"/>
-            <a:ext cx="8595360" cy="411480"/>
-          </a:xfrm>
-          <a:prstGeom prst="rect">
-            <a:avLst/>
-          </a:prstGeom>
-          <a:noFill/>
-        </p:spPr>
-        <p:txBody>
-          <a:bodyPr wrap="square" anchor="t">
-            <a:spAutoFit/>
-          </a:bodyPr>
-          <a:lstStyle/>
-          <a:p>
-            <a:pPr algn="l"/>
-            <a:r>
-              <a:rPr sz="1400" b="0">
+              <a:t>Ce qu’on peut conclure à partir du fichier fourni</a:t>
+            </a:r>
+          </a:p>
+        </p:txBody>
+      </p:sp>
+      <p:sp>
+        <p:nvSpPr>
+          <p:cNvPr id="16" name="TextBox 15"/>
+          <p:cNvSpPr txBox="1"/>
+          <p:nvPr/>
+        </p:nvSpPr>
+        <p:spPr>
+          <a:xfrm>
+            <a:off x="868680" y="4069080"/>
+            <a:ext cx="9966960" cy="897682"/>
+          </a:xfrm>
+          <a:prstGeom prst="rect">
+            <a:avLst/>
+          </a:prstGeom>
+          <a:noFill/>
+        </p:spPr>
+        <p:txBody>
+          <a:bodyPr wrap="square">
+            <a:spAutoFit/>
+          </a:bodyPr>
+          <a:lstStyle/>
+          <a:p>
+            <a:pPr>
+              <a:spcAft>
+                <a:spcPts val="800"/>
+              </a:spcAft>
+              <a:defRPr sz="1300">
                 <a:solidFill>
                   <a:srgbClr val="232B32"/>
                 </a:solidFill>
                 <a:latin typeface="Aptos"/>
-              </a:rPr>
-              <a:t>Sous-estimer une perte extrême. On surveille donc particulièrement le RMSE, qui pénalise les grosses erreurs.</a:t>
-            </a:r>
-          </a:p>
-        </p:txBody>
-      </p:sp>
-      <p:sp>
-        <p:nvSpPr>
-          <p:cNvPr id="32" name="TextBox 31"/>
+              </a:defRPr>
+            </a:pPr>
+            <a:r>
+              <a:rPr dirty="0"/>
+              <a:t>AutoML </a:t>
+            </a:r>
+            <a:r>
+              <a:rPr dirty="0" err="1"/>
+              <a:t>complète</a:t>
+            </a:r>
+            <a:r>
+              <a:rPr dirty="0"/>
+              <a:t> la </a:t>
+            </a:r>
+            <a:r>
+              <a:rPr dirty="0" err="1"/>
+              <a:t>comparaison</a:t>
+            </a:r>
+            <a:r>
+              <a:rPr dirty="0"/>
+              <a:t> </a:t>
+            </a:r>
+            <a:r>
+              <a:rPr dirty="0" err="1"/>
+              <a:t>manuelle</a:t>
+            </a:r>
+            <a:r>
+              <a:rPr dirty="0"/>
+              <a:t>, </a:t>
+            </a:r>
+            <a:r>
+              <a:rPr dirty="0" err="1"/>
+              <a:t>mais</a:t>
+            </a:r>
+            <a:r>
+              <a:rPr dirty="0"/>
+              <a:t> ne </a:t>
+            </a:r>
+            <a:r>
+              <a:rPr dirty="0" err="1"/>
+              <a:t>remplace</a:t>
+            </a:r>
+            <a:r>
+              <a:rPr dirty="0"/>
+              <a:t> pas le </a:t>
+            </a:r>
+            <a:r>
+              <a:rPr dirty="0" err="1"/>
+              <a:t>jugement</a:t>
+            </a:r>
+            <a:r>
+              <a:rPr dirty="0"/>
+              <a:t> métier.</a:t>
+            </a:r>
+          </a:p>
+          <a:p>
+            <a:pPr>
+              <a:spcAft>
+                <a:spcPts val="800"/>
+              </a:spcAft>
+              <a:defRPr sz="1300">
+                <a:solidFill>
+                  <a:srgbClr val="232B32"/>
+                </a:solidFill>
+                <a:latin typeface="Aptos"/>
+              </a:defRPr>
+            </a:pPr>
+            <a:r>
+              <a:rPr dirty="0"/>
+              <a:t>Le </a:t>
+            </a:r>
+            <a:r>
+              <a:rPr dirty="0" err="1"/>
+              <a:t>critère</a:t>
+            </a:r>
+            <a:r>
+              <a:rPr dirty="0"/>
+              <a:t> doit </a:t>
+            </a:r>
+            <a:r>
+              <a:rPr dirty="0" err="1"/>
+              <a:t>rester</a:t>
+            </a:r>
+            <a:r>
+              <a:rPr dirty="0"/>
+              <a:t> </a:t>
+            </a:r>
+            <a:r>
+              <a:rPr dirty="0" err="1"/>
+              <a:t>aligné</a:t>
+            </a:r>
+            <a:r>
+              <a:rPr dirty="0"/>
+              <a:t> sur la </a:t>
+            </a:r>
+            <a:r>
+              <a:rPr dirty="0" err="1"/>
+              <a:t>classe</a:t>
+            </a:r>
+            <a:r>
+              <a:rPr dirty="0"/>
+              <a:t> Sévère, pas </a:t>
+            </a:r>
+            <a:r>
+              <a:rPr dirty="0" err="1"/>
+              <a:t>seulement</a:t>
+            </a:r>
+            <a:r>
+              <a:rPr dirty="0"/>
+              <a:t> sur </a:t>
+            </a:r>
+            <a:r>
+              <a:rPr dirty="0" err="1"/>
+              <a:t>l’accuracy</a:t>
+            </a:r>
+            <a:r>
+              <a:rPr dirty="0"/>
+              <a:t>.</a:t>
+            </a:r>
+          </a:p>
+          <a:p>
+            <a:pPr>
+              <a:spcAft>
+                <a:spcPts val="800"/>
+              </a:spcAft>
+              <a:defRPr sz="1300">
+                <a:solidFill>
+                  <a:srgbClr val="232B32"/>
+                </a:solidFill>
+                <a:latin typeface="Aptos"/>
+              </a:defRPr>
+            </a:pPr>
+            <a:r>
+              <a:rPr dirty="0"/>
+              <a:t>Le notebook </a:t>
+            </a:r>
+            <a:r>
+              <a:rPr lang="fr-CA" dirty="0">
+                <a:solidFill>
+                  <a:srgbClr val="C00000"/>
+                </a:solidFill>
+              </a:rPr>
+              <a:t>a compléter </a:t>
+            </a:r>
+            <a:r>
+              <a:rPr lang="fr-CA" dirty="0"/>
+              <a:t>…</a:t>
+            </a:r>
+            <a:endParaRPr dirty="0"/>
+          </a:p>
+        </p:txBody>
+      </p:sp>
+      <p:sp>
+        <p:nvSpPr>
+          <p:cNvPr id="17" name="TextBox 16"/>
           <p:cNvSpPr txBox="1"/>
           <p:nvPr/>
         </p:nvSpPr>
@@ -5409,7 +4938,7 @@
                 </a:solidFill>
                 <a:latin typeface="Aptos"/>
               </a:rPr>
-              <a:t>Source : 07_Model_Economic_Loss — comparaison et conclusion finale.</a:t>
+              <a:t>Source : 08_AutoML_Damage_H2O — configuration H2O AutoML et sortie d’exécution.</a:t>
             </a:r>
           </a:p>
         </p:txBody>
@@ -5477,7 +5006,7 @@
                 </a:solidFill>
                 <a:latin typeface="Aptos"/>
               </a:rPr>
-              <a:t>Modèle 08 — H2O AutoML : automatiser la comparaison</a:t>
+              <a:t>Avant de comparer : quelle erreur est dangereuse ?</a:t>
             </a:r>
           </a:p>
         </p:txBody>
@@ -5556,7 +5085,7 @@
                 </a:solidFill>
                 <a:latin typeface="Aptos"/>
               </a:rPr>
-              <a:t>Même problème de dommages, avec sélection automatique de plusieurs modèles et hyperparamètres.</a:t>
+              <a:t>Le meilleur modèle n’est pas celui qui a seulement la plus grande accuracy.</a:t>
             </a:r>
           </a:p>
         </p:txBody>
@@ -5591,7 +5120,7 @@
                 </a:solidFill>
                 <a:latin typeface="Aptos"/>
               </a:rPr>
-              <a:t>11</a:t>
+              <a:t>03</a:t>
             </a:r>
           </a:p>
         </p:txBody>
@@ -5604,8 +5133,8 @@
         </p:nvSpPr>
         <p:spPr>
           <a:xfrm>
-            <a:off x="685800" y="1600200"/>
-            <a:ext cx="3337560" cy="1508760"/>
+            <a:off x="640080" y="1508760"/>
+            <a:ext cx="2606040" cy="1874519"/>
           </a:xfrm>
           <a:prstGeom prst="roundRect">
             <a:avLst/>
@@ -5650,8 +5179,8 @@
         </p:nvSpPr>
         <p:spPr>
           <a:xfrm>
-            <a:off x="850392" y="1746504"/>
-            <a:ext cx="3008376" cy="320040"/>
+            <a:off x="804671" y="1655063"/>
+            <a:ext cx="2276856" cy="320040"/>
           </a:xfrm>
           <a:prstGeom prst="rect">
             <a:avLst/>
@@ -5668,11 +5197,11 @@
             <a:r>
               <a:rPr sz="1500" b="1">
                 <a:solidFill>
-                  <a:srgbClr val="215E91"/>
-                </a:solidFill>
-                <a:latin typeface="Aptos"/>
-              </a:rPr>
-              <a:t>Ce que fait AutoML</a:t>
+                  <a:srgbClr val="B44141"/>
+                </a:solidFill>
+                <a:latin typeface="Aptos"/>
+              </a:rPr>
+              <a:t>Faux négatif (FN)</a:t>
             </a:r>
           </a:p>
         </p:txBody>
@@ -5685,8 +5214,8 @@
         </p:nvSpPr>
         <p:spPr>
           <a:xfrm>
-            <a:off x="850392" y="2130552"/>
-            <a:ext cx="3008376" cy="850392"/>
+            <a:off x="804671" y="2039112"/>
+            <a:ext cx="2276856" cy="1216151"/>
           </a:xfrm>
           <a:prstGeom prst="rect">
             <a:avLst/>
@@ -5707,7 +5236,8 @@
                 </a:solidFill>
                 <a:latin typeface="Aptos"/>
               </a:rPr>
-              <a:t>Entraîne plusieurs familles de modèles, explore des hyperparamètres, construit un leaderboard et sélectionne selon une métrique.</a:t>
+              <a:t>Le modèle dit « pas grave » alors que l’événement est réellement grave.
+En sécurité sismique, c’est souvent l’erreur la plus coûteuse.</a:t>
             </a:r>
           </a:p>
         </p:txBody>
@@ -5720,8 +5250,8 @@
         </p:nvSpPr>
         <p:spPr>
           <a:xfrm>
-            <a:off x="4297680" y="1600200"/>
-            <a:ext cx="3337560" cy="1508760"/>
+            <a:off x="3429000" y="1508760"/>
+            <a:ext cx="2606040" cy="1874519"/>
           </a:xfrm>
           <a:prstGeom prst="roundRect">
             <a:avLst/>
@@ -5766,8 +5296,8 @@
         </p:nvSpPr>
         <p:spPr>
           <a:xfrm>
-            <a:off x="4462272" y="1746504"/>
-            <a:ext cx="3008376" cy="320040"/>
+            <a:off x="3593592" y="1655063"/>
+            <a:ext cx="2276856" cy="320040"/>
           </a:xfrm>
           <a:prstGeom prst="rect">
             <a:avLst/>
@@ -5784,11 +5314,11 @@
             <a:r>
               <a:rPr sz="1500" b="1">
                 <a:solidFill>
-                  <a:srgbClr val="2E7D5A"/>
-                </a:solidFill>
-                <a:latin typeface="Aptos"/>
-              </a:rPr>
-              <a:t>Métrique demandée</a:t>
+                  <a:srgbClr val="DA8437"/>
+                </a:solidFill>
+                <a:latin typeface="Aptos"/>
+              </a:rPr>
+              <a:t>Faux positif (FP)</a:t>
             </a:r>
           </a:p>
         </p:txBody>
@@ -5801,8 +5331,8 @@
         </p:nvSpPr>
         <p:spPr>
           <a:xfrm>
-            <a:off x="4462272" y="2130552"/>
-            <a:ext cx="3008376" cy="850392"/>
+            <a:off x="3593592" y="2039112"/>
+            <a:ext cx="2276856" cy="1216151"/>
           </a:xfrm>
           <a:prstGeom prst="rect">
             <a:avLst/>
@@ -5823,7 +5353,8 @@
                 </a:solidFill>
                 <a:latin typeface="Aptos"/>
               </a:rPr>
-              <a:t>Le notebook configure sort_metric = mean_per_class_error, cohérent avec un problème multiclasses déséquilibré.</a:t>
+              <a:t>Le modèle déclenche une alerte forte alors que l’événement ne l’est pas.
+Coût : ressources mobilisées, fatigue d’alerte, crédibilité.</a:t>
             </a:r>
           </a:p>
         </p:txBody>
@@ -5836,8 +5367,8 @@
         </p:nvSpPr>
         <p:spPr>
           <a:xfrm>
-            <a:off x="7909560" y="1600200"/>
-            <a:ext cx="3337560" cy="1508760"/>
+            <a:off x="6217920" y="1508760"/>
+            <a:ext cx="2514600" cy="1874519"/>
           </a:xfrm>
           <a:prstGeom prst="roundRect">
             <a:avLst/>
@@ -5882,8 +5413,8 @@
         </p:nvSpPr>
         <p:spPr>
           <a:xfrm>
-            <a:off x="8074152" y="1746504"/>
-            <a:ext cx="3008376" cy="320040"/>
+            <a:off x="6382512" y="1655063"/>
+            <a:ext cx="2185416" cy="320040"/>
           </a:xfrm>
           <a:prstGeom prst="rect">
             <a:avLst/>
@@ -5900,11 +5431,11 @@
             <a:r>
               <a:rPr sz="1500" b="1">
                 <a:solidFill>
-                  <a:srgbClr val="DA8437"/>
-                </a:solidFill>
-                <a:latin typeface="Aptos"/>
-              </a:rPr>
-              <a:t>Limite observée</a:t>
+                  <a:srgbClr val="2E7D5A"/>
+                </a:solidFill>
+                <a:latin typeface="Aptos"/>
+              </a:rPr>
+              <a:t>Recall</a:t>
             </a:r>
           </a:p>
         </p:txBody>
@@ -5917,8 +5448,8 @@
         </p:nvSpPr>
         <p:spPr>
           <a:xfrm>
-            <a:off x="8074152" y="2130552"/>
-            <a:ext cx="3008376" cy="850392"/>
+            <a:off x="6382512" y="2039112"/>
+            <a:ext cx="2185416" cy="1216151"/>
           </a:xfrm>
           <a:prstGeom prst="rect">
             <a:avLst/>
@@ -5939,21 +5470,68 @@
                 </a:solidFill>
                 <a:latin typeface="Aptos"/>
               </a:rPr>
-              <a:t>Dans l’exécution fournie, H2O indique : « XGBoost is not available; skipping it. »</a:t>
-            </a:r>
-          </a:p>
-        </p:txBody>
-      </p:sp>
-      <p:sp>
-        <p:nvSpPr>
-          <p:cNvPr id="15" name="TextBox 14"/>
-          <p:cNvSpPr txBox="1"/>
-          <p:nvPr/>
-        </p:nvSpPr>
-        <p:spPr>
-          <a:xfrm>
-            <a:off x="685800" y="3657600"/>
-            <a:ext cx="5120640" cy="320040"/>
+              <a:t>Parmi les vrais cas graves, combien avons-nous détectés ?
+Recall élevé ⇒ moins de faux négatifs.</a:t>
+            </a:r>
+          </a:p>
+        </p:txBody>
+      </p:sp>
+      <p:sp>
+        <p:nvSpPr>
+          <p:cNvPr id="15" name="Rounded Rectangle 14"/>
+          <p:cNvSpPr/>
+          <p:nvPr/>
+        </p:nvSpPr>
+        <p:spPr>
+          <a:xfrm>
+            <a:off x="8915400" y="1508760"/>
+            <a:ext cx="2514600" cy="1874519"/>
+          </a:xfrm>
+          <a:prstGeom prst="roundRect">
+            <a:avLst/>
+          </a:prstGeom>
+          <a:solidFill>
+            <a:srgbClr val="F5F7F9"/>
+          </a:solidFill>
+          <a:ln>
+            <a:solidFill>
+              <a:srgbClr val="DCE2E7"/>
+            </a:solidFill>
+          </a:ln>
+        </p:spPr>
+        <p:style>
+          <a:lnRef idx="1">
+            <a:schemeClr val="accent1"/>
+          </a:lnRef>
+          <a:fillRef idx="3">
+            <a:schemeClr val="accent1"/>
+          </a:fillRef>
+          <a:effectRef idx="2">
+            <a:schemeClr val="accent1"/>
+          </a:effectRef>
+          <a:fontRef idx="minor">
+            <a:schemeClr val="lt1"/>
+          </a:fontRef>
+        </p:style>
+        <p:txBody>
+          <a:bodyPr rtlCol="0" anchor="ctr"/>
+          <a:lstStyle/>
+          <a:p>
+            <a:pPr algn="ctr"/>
+            <a:endParaRPr/>
+          </a:p>
+        </p:txBody>
+      </p:sp>
+      <p:sp>
+        <p:nvSpPr>
+          <p:cNvPr id="16" name="TextBox 15"/>
+          <p:cNvSpPr txBox="1"/>
+          <p:nvPr/>
+        </p:nvSpPr>
+        <p:spPr>
+          <a:xfrm>
+            <a:off x="9079992" y="1655063"/>
+            <a:ext cx="2185416" cy="320040"/>
           </a:xfrm>
           <a:prstGeom prst="rect">
             <a:avLst/>
@@ -5968,203 +5546,266 @@
           <a:p>
             <a:pPr algn="l"/>
             <a:r>
-              <a:rPr sz="1700" b="1">
+              <a:rPr sz="1500" b="1">
+                <a:solidFill>
+                  <a:srgbClr val="215E91"/>
+                </a:solidFill>
+                <a:latin typeface="Aptos"/>
+              </a:rPr>
+              <a:t>Precision</a:t>
+            </a:r>
+          </a:p>
+        </p:txBody>
+      </p:sp>
+      <p:sp>
+        <p:nvSpPr>
+          <p:cNvPr id="17" name="TextBox 16"/>
+          <p:cNvSpPr txBox="1"/>
+          <p:nvPr/>
+        </p:nvSpPr>
+        <p:spPr>
+          <a:xfrm>
+            <a:off x="9079992" y="2039112"/>
+            <a:ext cx="2185416" cy="1216151"/>
+          </a:xfrm>
+          <a:prstGeom prst="rect">
+            <a:avLst/>
+          </a:prstGeom>
+          <a:noFill/>
+        </p:spPr>
+        <p:txBody>
+          <a:bodyPr wrap="square" anchor="t">
+            <a:spAutoFit/>
+          </a:bodyPr>
+          <a:lstStyle/>
+          <a:p>
+            <a:pPr algn="l"/>
+            <a:r>
+              <a:rPr sz="1100" b="0">
+                <a:solidFill>
+                  <a:srgbClr val="232B32"/>
+                </a:solidFill>
+                <a:latin typeface="Aptos"/>
+              </a:rPr>
+              <a:t>Parmi les alertes graves prédites, combien sont réellement graves ?
+Precision élevée ⇒ moins de faux positifs.</a:t>
+            </a:r>
+          </a:p>
+        </p:txBody>
+      </p:sp>
+      <p:sp>
+        <p:nvSpPr>
+          <p:cNvPr id="18" name="TextBox 17"/>
+          <p:cNvSpPr txBox="1"/>
+          <p:nvPr/>
+        </p:nvSpPr>
+        <p:spPr>
+          <a:xfrm>
+            <a:off x="685800" y="3858768"/>
+            <a:ext cx="1371600" cy="320040"/>
+          </a:xfrm>
+          <a:prstGeom prst="rect">
+            <a:avLst/>
+          </a:prstGeom>
+          <a:noFill/>
+        </p:spPr>
+        <p:txBody>
+          <a:bodyPr wrap="square" anchor="t">
+            <a:spAutoFit/>
+          </a:bodyPr>
+          <a:lstStyle/>
+          <a:p>
+            <a:pPr algn="l"/>
+            <a:r>
+              <a:rPr sz="1800" b="1">
                 <a:solidFill>
                   <a:srgbClr val="0F2238"/>
                 </a:solidFill>
                 <a:latin typeface="Aptos"/>
               </a:rPr>
-              <a:t>Ce qu’on peut conclure à partir du fichier fourni</a:t>
-            </a:r>
-          </a:p>
-        </p:txBody>
-      </p:sp>
-      <p:sp>
-        <p:nvSpPr>
-          <p:cNvPr id="16" name="TextBox 15"/>
-          <p:cNvSpPr txBox="1"/>
-          <p:nvPr/>
-        </p:nvSpPr>
-        <p:spPr>
-          <a:xfrm>
-            <a:off x="868680" y="4069080"/>
-            <a:ext cx="9966960" cy="897682"/>
-          </a:xfrm>
-          <a:prstGeom prst="rect">
-            <a:avLst/>
-          </a:prstGeom>
-          <a:noFill/>
-        </p:spPr>
-        <p:txBody>
-          <a:bodyPr wrap="square">
-            <a:spAutoFit/>
-          </a:bodyPr>
-          <a:lstStyle/>
-          <a:p>
-            <a:pPr>
-              <a:spcAft>
-                <a:spcPts val="800"/>
-              </a:spcAft>
-              <a:defRPr sz="1300">
+              <a:t>F1-score</a:t>
+            </a:r>
+          </a:p>
+        </p:txBody>
+      </p:sp>
+      <p:sp>
+        <p:nvSpPr>
+          <p:cNvPr id="19" name="TextBox 18"/>
+          <p:cNvSpPr txBox="1"/>
+          <p:nvPr/>
+        </p:nvSpPr>
+        <p:spPr>
+          <a:xfrm>
+            <a:off x="1874519" y="3867912"/>
+            <a:ext cx="2743200" cy="274320"/>
+          </a:xfrm>
+          <a:prstGeom prst="rect">
+            <a:avLst/>
+          </a:prstGeom>
+          <a:noFill/>
+        </p:spPr>
+        <p:txBody>
+          <a:bodyPr wrap="square" anchor="t">
+            <a:spAutoFit/>
+          </a:bodyPr>
+          <a:lstStyle/>
+          <a:p>
+            <a:pPr algn="l"/>
+            <a:r>
+              <a:rPr sz="1400" b="0">
                 <a:solidFill>
                   <a:srgbClr val="232B32"/>
                 </a:solidFill>
                 <a:latin typeface="Aptos"/>
-              </a:defRPr>
-            </a:pPr>
-            <a:r>
-              <a:rPr dirty="0"/>
-              <a:t>AutoML </a:t>
-            </a:r>
-            <a:r>
-              <a:rPr dirty="0" err="1"/>
-              <a:t>complète</a:t>
-            </a:r>
-            <a:r>
-              <a:rPr dirty="0"/>
-              <a:t> la </a:t>
-            </a:r>
-            <a:r>
-              <a:rPr dirty="0" err="1"/>
-              <a:t>comparaison</a:t>
-            </a:r>
-            <a:r>
-              <a:rPr dirty="0"/>
-              <a:t> </a:t>
-            </a:r>
-            <a:r>
-              <a:rPr dirty="0" err="1"/>
-              <a:t>manuelle</a:t>
-            </a:r>
-            <a:r>
-              <a:rPr dirty="0"/>
-              <a:t>, </a:t>
-            </a:r>
-            <a:r>
-              <a:rPr dirty="0" err="1"/>
-              <a:t>mais</a:t>
-            </a:r>
-            <a:r>
-              <a:rPr dirty="0"/>
-              <a:t> ne </a:t>
-            </a:r>
-            <a:r>
-              <a:rPr dirty="0" err="1"/>
-              <a:t>remplace</a:t>
-            </a:r>
-            <a:r>
-              <a:rPr dirty="0"/>
-              <a:t> pas le </a:t>
-            </a:r>
-            <a:r>
-              <a:rPr dirty="0" err="1"/>
-              <a:t>jugement</a:t>
-            </a:r>
-            <a:r>
-              <a:rPr dirty="0"/>
-              <a:t> métier.</a:t>
-            </a:r>
-          </a:p>
-          <a:p>
-            <a:pPr>
-              <a:spcAft>
-                <a:spcPts val="800"/>
-              </a:spcAft>
-              <a:defRPr sz="1300">
+              </a:rPr>
+              <a:t>compromis Precision + Recall</a:t>
+            </a:r>
+          </a:p>
+        </p:txBody>
+      </p:sp>
+      <p:sp>
+        <p:nvSpPr>
+          <p:cNvPr id="20" name="TextBox 19"/>
+          <p:cNvSpPr txBox="1"/>
+          <p:nvPr/>
+        </p:nvSpPr>
+        <p:spPr>
+          <a:xfrm>
+            <a:off x="685800" y="4462272"/>
+            <a:ext cx="1371600" cy="320040"/>
+          </a:xfrm>
+          <a:prstGeom prst="rect">
+            <a:avLst/>
+          </a:prstGeom>
+          <a:noFill/>
+        </p:spPr>
+        <p:txBody>
+          <a:bodyPr wrap="square" anchor="t">
+            <a:spAutoFit/>
+          </a:bodyPr>
+          <a:lstStyle/>
+          <a:p>
+            <a:pPr algn="l"/>
+            <a:r>
+              <a:rPr sz="1800" b="1">
+                <a:solidFill>
+                  <a:srgbClr val="0F2238"/>
+                </a:solidFill>
+                <a:latin typeface="Aptos"/>
+              </a:rPr>
+              <a:t>F1 macro</a:t>
+            </a:r>
+          </a:p>
+        </p:txBody>
+      </p:sp>
+      <p:sp>
+        <p:nvSpPr>
+          <p:cNvPr id="21" name="TextBox 20"/>
+          <p:cNvSpPr txBox="1"/>
+          <p:nvPr/>
+        </p:nvSpPr>
+        <p:spPr>
+          <a:xfrm>
+            <a:off x="1874519" y="4471416"/>
+            <a:ext cx="7955279" cy="384048"/>
+          </a:xfrm>
+          <a:prstGeom prst="rect">
+            <a:avLst/>
+          </a:prstGeom>
+          <a:noFill/>
+        </p:spPr>
+        <p:txBody>
+          <a:bodyPr wrap="square" anchor="t">
+            <a:spAutoFit/>
+          </a:bodyPr>
+          <a:lstStyle/>
+          <a:p>
+            <a:pPr algn="l"/>
+            <a:r>
+              <a:rPr sz="1400" b="0">
                 <a:solidFill>
                   <a:srgbClr val="232B32"/>
                 </a:solidFill>
                 <a:latin typeface="Aptos"/>
-              </a:defRPr>
-            </a:pPr>
-            <a:r>
-              <a:rPr dirty="0"/>
-              <a:t>Le </a:t>
-            </a:r>
-            <a:r>
-              <a:rPr dirty="0" err="1"/>
-              <a:t>critère</a:t>
-            </a:r>
-            <a:r>
-              <a:rPr dirty="0"/>
-              <a:t> doit </a:t>
-            </a:r>
-            <a:r>
-              <a:rPr dirty="0" err="1"/>
-              <a:t>rester</a:t>
-            </a:r>
-            <a:r>
-              <a:rPr dirty="0"/>
-              <a:t> </a:t>
-            </a:r>
-            <a:r>
-              <a:rPr dirty="0" err="1"/>
-              <a:t>aligné</a:t>
-            </a:r>
-            <a:r>
-              <a:rPr dirty="0"/>
-              <a:t> sur la </a:t>
-            </a:r>
-            <a:r>
-              <a:rPr dirty="0" err="1"/>
-              <a:t>classe</a:t>
-            </a:r>
-            <a:r>
-              <a:rPr dirty="0"/>
-              <a:t> Sévère, pas </a:t>
-            </a:r>
-            <a:r>
-              <a:rPr dirty="0" err="1"/>
-              <a:t>seulement</a:t>
-            </a:r>
-            <a:r>
-              <a:rPr dirty="0"/>
-              <a:t> sur </a:t>
-            </a:r>
-            <a:r>
-              <a:rPr dirty="0" err="1"/>
-              <a:t>l’accuracy</a:t>
-            </a:r>
-            <a:r>
-              <a:rPr dirty="0"/>
-              <a:t>.</a:t>
-            </a:r>
-          </a:p>
-          <a:p>
-            <a:pPr>
-              <a:spcAft>
-                <a:spcPts val="800"/>
-              </a:spcAft>
-              <a:defRPr sz="1300">
+              </a:rPr>
+              <a:t>donne le même poids à chaque classe → utile quand les classes rares sont importantes.</a:t>
+            </a:r>
+          </a:p>
+        </p:txBody>
+      </p:sp>
+      <p:sp>
+        <p:nvSpPr>
+          <p:cNvPr id="22" name="TextBox 21"/>
+          <p:cNvSpPr txBox="1"/>
+          <p:nvPr/>
+        </p:nvSpPr>
+        <p:spPr>
+          <a:xfrm>
+            <a:off x="685800" y="5148072"/>
+            <a:ext cx="1371600" cy="320040"/>
+          </a:xfrm>
+          <a:prstGeom prst="rect">
+            <a:avLst/>
+          </a:prstGeom>
+          <a:noFill/>
+        </p:spPr>
+        <p:txBody>
+          <a:bodyPr wrap="square" anchor="t">
+            <a:spAutoFit/>
+          </a:bodyPr>
+          <a:lstStyle/>
+          <a:p>
+            <a:pPr algn="l"/>
+            <a:r>
+              <a:rPr sz="1800" b="1">
+                <a:solidFill>
+                  <a:srgbClr val="0F2238"/>
+                </a:solidFill>
+                <a:latin typeface="Aptos"/>
+              </a:rPr>
+              <a:t>Régression</a:t>
+            </a:r>
+          </a:p>
+        </p:txBody>
+      </p:sp>
+      <p:sp>
+        <p:nvSpPr>
+          <p:cNvPr id="23" name="TextBox 22"/>
+          <p:cNvSpPr txBox="1"/>
+          <p:nvPr/>
+        </p:nvSpPr>
+        <p:spPr>
+          <a:xfrm>
+            <a:off x="1874519" y="5157216"/>
+            <a:ext cx="8961120" cy="411480"/>
+          </a:xfrm>
+          <a:prstGeom prst="rect">
+            <a:avLst/>
+          </a:prstGeom>
+          <a:noFill/>
+        </p:spPr>
+        <p:txBody>
+          <a:bodyPr wrap="square" anchor="t">
+            <a:spAutoFit/>
+          </a:bodyPr>
+          <a:lstStyle/>
+          <a:p>
+            <a:pPr algn="l"/>
+            <a:r>
+              <a:rPr sz="1400" b="0">
                 <a:solidFill>
                   <a:srgbClr val="232B32"/>
                 </a:solidFill>
                 <a:latin typeface="Aptos"/>
-              </a:defRPr>
-            </a:pPr>
-            <a:r>
-              <a:rPr dirty="0"/>
-              <a:t>Le notebook </a:t>
-            </a:r>
-            <a:r>
-              <a:rPr lang="fr-CA" dirty="0">
-                <a:solidFill>
-                  <a:srgbClr val="C00000"/>
-                </a:solidFill>
-              </a:rPr>
-              <a:t>a compléter </a:t>
-            </a:r>
-            <a:r>
-              <a:rPr lang="fr-CA" dirty="0"/>
-              <a:t>…</a:t>
-            </a:r>
-            <a:endParaRPr dirty="0"/>
-          </a:p>
-        </p:txBody>
-      </p:sp>
-      <p:sp>
-        <p:nvSpPr>
-          <p:cNvPr id="17" name="TextBox 16"/>
+              </a:rPr>
+              <a:t>pas de FP/FN : on regarde MAE, RMSE et R². RMSE pénalise davantage les grosses erreurs.</a:t>
+            </a:r>
+          </a:p>
+        </p:txBody>
+      </p:sp>
+      <p:sp>
+        <p:nvSpPr>
+          <p:cNvPr id="24" name="TextBox 23"/>
           <p:cNvSpPr txBox="1"/>
           <p:nvPr/>
         </p:nvSpPr>
@@ -6192,7 +5833,7 @@
                 </a:solidFill>
                 <a:latin typeface="Aptos"/>
               </a:rPr>
-              <a:t>Source : 08_AutoML_Damage_H2O — configuration H2O AutoML et sortie d’exécution.</a:t>
+              <a:t>Principe d’évaluation appliqué aux notebooks du TP.</a:t>
             </a:r>
           </a:p>
         </p:txBody>
@@ -15675,901 +15316,6 @@
                 </a:solidFill>
                 <a:latin typeface="Aptos"/>
               </a:rPr>
-              <a:t>Avant de comparer : quelle erreur est dangereuse ?</a:t>
-            </a:r>
-          </a:p>
-        </p:txBody>
-      </p:sp>
-      <p:sp>
-        <p:nvSpPr>
-          <p:cNvPr id="3" name="Rectangle 2"/>
-          <p:cNvSpPr/>
-          <p:nvPr/>
-        </p:nvSpPr>
-        <p:spPr>
-          <a:xfrm>
-            <a:off x="594360" y="960120"/>
-            <a:ext cx="914400" cy="50292"/>
-          </a:xfrm>
-          <a:prstGeom prst="rect">
-            <a:avLst/>
-          </a:prstGeom>
-          <a:solidFill>
-            <a:srgbClr val="36A2BF"/>
-          </a:solidFill>
-          <a:ln>
-            <a:noFill/>
-          </a:ln>
-        </p:spPr>
-        <p:style>
-          <a:lnRef idx="1">
-            <a:schemeClr val="accent1"/>
-          </a:lnRef>
-          <a:fillRef idx="3">
-            <a:schemeClr val="accent1"/>
-          </a:fillRef>
-          <a:effectRef idx="2">
-            <a:schemeClr val="accent1"/>
-          </a:effectRef>
-          <a:fontRef idx="minor">
-            <a:schemeClr val="lt1"/>
-          </a:fontRef>
-        </p:style>
-        <p:txBody>
-          <a:bodyPr rtlCol="0" anchor="ctr"/>
-          <a:lstStyle/>
-          <a:p>
-            <a:pPr algn="ctr"/>
-            <a:endParaRPr/>
-          </a:p>
-        </p:txBody>
-      </p:sp>
-      <p:sp>
-        <p:nvSpPr>
-          <p:cNvPr id="4" name="TextBox 3"/>
-          <p:cNvSpPr txBox="1"/>
-          <p:nvPr/>
-        </p:nvSpPr>
-        <p:spPr>
-          <a:xfrm>
-            <a:off x="594360" y="1060704"/>
-            <a:ext cx="10881360" cy="384048"/>
-          </a:xfrm>
-          <a:prstGeom prst="rect">
-            <a:avLst/>
-          </a:prstGeom>
-          <a:noFill/>
-        </p:spPr>
-        <p:txBody>
-          <a:bodyPr wrap="square" anchor="t">
-            <a:spAutoFit/>
-          </a:bodyPr>
-          <a:lstStyle/>
-          <a:p>
-            <a:pPr algn="l"/>
-            <a:r>
-              <a:rPr sz="1200" b="0">
-                <a:solidFill>
-                  <a:srgbClr val="626F7B"/>
-                </a:solidFill>
-                <a:latin typeface="Aptos"/>
-              </a:rPr>
-              <a:t>Le meilleur modèle n’est pas celui qui a seulement la plus grande accuracy.</a:t>
-            </a:r>
-          </a:p>
-        </p:txBody>
-      </p:sp>
-      <p:sp>
-        <p:nvSpPr>
-          <p:cNvPr id="5" name="TextBox 4"/>
-          <p:cNvSpPr txBox="1"/>
-          <p:nvPr/>
-        </p:nvSpPr>
-        <p:spPr>
-          <a:xfrm>
-            <a:off x="11109960" y="393192"/>
-            <a:ext cx="457200" cy="320040"/>
-          </a:xfrm>
-          <a:prstGeom prst="rect">
-            <a:avLst/>
-          </a:prstGeom>
-          <a:noFill/>
-        </p:spPr>
-        <p:txBody>
-          <a:bodyPr wrap="square" anchor="t">
-            <a:spAutoFit/>
-          </a:bodyPr>
-          <a:lstStyle/>
-          <a:p>
-            <a:pPr algn="r"/>
-            <a:r>
-              <a:rPr sz="1100" b="1">
-                <a:solidFill>
-                  <a:srgbClr val="626F7B"/>
-                </a:solidFill>
-                <a:latin typeface="Aptos"/>
-              </a:rPr>
-              <a:t>03</a:t>
-            </a:r>
-          </a:p>
-        </p:txBody>
-      </p:sp>
-      <p:sp>
-        <p:nvSpPr>
-          <p:cNvPr id="6" name="Rounded Rectangle 5"/>
-          <p:cNvSpPr/>
-          <p:nvPr/>
-        </p:nvSpPr>
-        <p:spPr>
-          <a:xfrm>
-            <a:off x="640080" y="1508760"/>
-            <a:ext cx="2606040" cy="1874519"/>
-          </a:xfrm>
-          <a:prstGeom prst="roundRect">
-            <a:avLst/>
-          </a:prstGeom>
-          <a:solidFill>
-            <a:srgbClr val="F5F7F9"/>
-          </a:solidFill>
-          <a:ln>
-            <a:solidFill>
-              <a:srgbClr val="DCE2E7"/>
-            </a:solidFill>
-          </a:ln>
-        </p:spPr>
-        <p:style>
-          <a:lnRef idx="1">
-            <a:schemeClr val="accent1"/>
-          </a:lnRef>
-          <a:fillRef idx="3">
-            <a:schemeClr val="accent1"/>
-          </a:fillRef>
-          <a:effectRef idx="2">
-            <a:schemeClr val="accent1"/>
-          </a:effectRef>
-          <a:fontRef idx="minor">
-            <a:schemeClr val="lt1"/>
-          </a:fontRef>
-        </p:style>
-        <p:txBody>
-          <a:bodyPr rtlCol="0" anchor="ctr"/>
-          <a:lstStyle/>
-          <a:p>
-            <a:pPr algn="ctr"/>
-            <a:endParaRPr/>
-          </a:p>
-        </p:txBody>
-      </p:sp>
-      <p:sp>
-        <p:nvSpPr>
-          <p:cNvPr id="7" name="TextBox 6"/>
-          <p:cNvSpPr txBox="1"/>
-          <p:nvPr/>
-        </p:nvSpPr>
-        <p:spPr>
-          <a:xfrm>
-            <a:off x="804671" y="1655063"/>
-            <a:ext cx="2276856" cy="320040"/>
-          </a:xfrm>
-          <a:prstGeom prst="rect">
-            <a:avLst/>
-          </a:prstGeom>
-          <a:noFill/>
-        </p:spPr>
-        <p:txBody>
-          <a:bodyPr wrap="square" anchor="t">
-            <a:spAutoFit/>
-          </a:bodyPr>
-          <a:lstStyle/>
-          <a:p>
-            <a:pPr algn="l"/>
-            <a:r>
-              <a:rPr sz="1500" b="1">
-                <a:solidFill>
-                  <a:srgbClr val="B44141"/>
-                </a:solidFill>
-                <a:latin typeface="Aptos"/>
-              </a:rPr>
-              <a:t>Faux négatif (FN)</a:t>
-            </a:r>
-          </a:p>
-        </p:txBody>
-      </p:sp>
-      <p:sp>
-        <p:nvSpPr>
-          <p:cNvPr id="8" name="TextBox 7"/>
-          <p:cNvSpPr txBox="1"/>
-          <p:nvPr/>
-        </p:nvSpPr>
-        <p:spPr>
-          <a:xfrm>
-            <a:off x="804671" y="2039112"/>
-            <a:ext cx="2276856" cy="1216151"/>
-          </a:xfrm>
-          <a:prstGeom prst="rect">
-            <a:avLst/>
-          </a:prstGeom>
-          <a:noFill/>
-        </p:spPr>
-        <p:txBody>
-          <a:bodyPr wrap="square" anchor="t">
-            <a:spAutoFit/>
-          </a:bodyPr>
-          <a:lstStyle/>
-          <a:p>
-            <a:pPr algn="l"/>
-            <a:r>
-              <a:rPr sz="1100" b="0">
-                <a:solidFill>
-                  <a:srgbClr val="232B32"/>
-                </a:solidFill>
-                <a:latin typeface="Aptos"/>
-              </a:rPr>
-              <a:t>Le modèle dit « pas grave » alors que l’événement est réellement grave.
-En sécurité sismique, c’est souvent l’erreur la plus coûteuse.</a:t>
-            </a:r>
-          </a:p>
-        </p:txBody>
-      </p:sp>
-      <p:sp>
-        <p:nvSpPr>
-          <p:cNvPr id="9" name="Rounded Rectangle 8"/>
-          <p:cNvSpPr/>
-          <p:nvPr/>
-        </p:nvSpPr>
-        <p:spPr>
-          <a:xfrm>
-            <a:off x="3429000" y="1508760"/>
-            <a:ext cx="2606040" cy="1874519"/>
-          </a:xfrm>
-          <a:prstGeom prst="roundRect">
-            <a:avLst/>
-          </a:prstGeom>
-          <a:solidFill>
-            <a:srgbClr val="F5F7F9"/>
-          </a:solidFill>
-          <a:ln>
-            <a:solidFill>
-              <a:srgbClr val="DCE2E7"/>
-            </a:solidFill>
-          </a:ln>
-        </p:spPr>
-        <p:style>
-          <a:lnRef idx="1">
-            <a:schemeClr val="accent1"/>
-          </a:lnRef>
-          <a:fillRef idx="3">
-            <a:schemeClr val="accent1"/>
-          </a:fillRef>
-          <a:effectRef idx="2">
-            <a:schemeClr val="accent1"/>
-          </a:effectRef>
-          <a:fontRef idx="minor">
-            <a:schemeClr val="lt1"/>
-          </a:fontRef>
-        </p:style>
-        <p:txBody>
-          <a:bodyPr rtlCol="0" anchor="ctr"/>
-          <a:lstStyle/>
-          <a:p>
-            <a:pPr algn="ctr"/>
-            <a:endParaRPr/>
-          </a:p>
-        </p:txBody>
-      </p:sp>
-      <p:sp>
-        <p:nvSpPr>
-          <p:cNvPr id="10" name="TextBox 9"/>
-          <p:cNvSpPr txBox="1"/>
-          <p:nvPr/>
-        </p:nvSpPr>
-        <p:spPr>
-          <a:xfrm>
-            <a:off x="3593592" y="1655063"/>
-            <a:ext cx="2276856" cy="320040"/>
-          </a:xfrm>
-          <a:prstGeom prst="rect">
-            <a:avLst/>
-          </a:prstGeom>
-          <a:noFill/>
-        </p:spPr>
-        <p:txBody>
-          <a:bodyPr wrap="square" anchor="t">
-            <a:spAutoFit/>
-          </a:bodyPr>
-          <a:lstStyle/>
-          <a:p>
-            <a:pPr algn="l"/>
-            <a:r>
-              <a:rPr sz="1500" b="1">
-                <a:solidFill>
-                  <a:srgbClr val="DA8437"/>
-                </a:solidFill>
-                <a:latin typeface="Aptos"/>
-              </a:rPr>
-              <a:t>Faux positif (FP)</a:t>
-            </a:r>
-          </a:p>
-        </p:txBody>
-      </p:sp>
-      <p:sp>
-        <p:nvSpPr>
-          <p:cNvPr id="11" name="TextBox 10"/>
-          <p:cNvSpPr txBox="1"/>
-          <p:nvPr/>
-        </p:nvSpPr>
-        <p:spPr>
-          <a:xfrm>
-            <a:off x="3593592" y="2039112"/>
-            <a:ext cx="2276856" cy="1216151"/>
-          </a:xfrm>
-          <a:prstGeom prst="rect">
-            <a:avLst/>
-          </a:prstGeom>
-          <a:noFill/>
-        </p:spPr>
-        <p:txBody>
-          <a:bodyPr wrap="square" anchor="t">
-            <a:spAutoFit/>
-          </a:bodyPr>
-          <a:lstStyle/>
-          <a:p>
-            <a:pPr algn="l"/>
-            <a:r>
-              <a:rPr sz="1100" b="0">
-                <a:solidFill>
-                  <a:srgbClr val="232B32"/>
-                </a:solidFill>
-                <a:latin typeface="Aptos"/>
-              </a:rPr>
-              <a:t>Le modèle déclenche une alerte forte alors que l’événement ne l’est pas.
-Coût : ressources mobilisées, fatigue d’alerte, crédibilité.</a:t>
-            </a:r>
-          </a:p>
-        </p:txBody>
-      </p:sp>
-      <p:sp>
-        <p:nvSpPr>
-          <p:cNvPr id="12" name="Rounded Rectangle 11"/>
-          <p:cNvSpPr/>
-          <p:nvPr/>
-        </p:nvSpPr>
-        <p:spPr>
-          <a:xfrm>
-            <a:off x="6217920" y="1508760"/>
-            <a:ext cx="2514600" cy="1874519"/>
-          </a:xfrm>
-          <a:prstGeom prst="roundRect">
-            <a:avLst/>
-          </a:prstGeom>
-          <a:solidFill>
-            <a:srgbClr val="F5F7F9"/>
-          </a:solidFill>
-          <a:ln>
-            <a:solidFill>
-              <a:srgbClr val="DCE2E7"/>
-            </a:solidFill>
-          </a:ln>
-        </p:spPr>
-        <p:style>
-          <a:lnRef idx="1">
-            <a:schemeClr val="accent1"/>
-          </a:lnRef>
-          <a:fillRef idx="3">
-            <a:schemeClr val="accent1"/>
-          </a:fillRef>
-          <a:effectRef idx="2">
-            <a:schemeClr val="accent1"/>
-          </a:effectRef>
-          <a:fontRef idx="minor">
-            <a:schemeClr val="lt1"/>
-          </a:fontRef>
-        </p:style>
-        <p:txBody>
-          <a:bodyPr rtlCol="0" anchor="ctr"/>
-          <a:lstStyle/>
-          <a:p>
-            <a:pPr algn="ctr"/>
-            <a:endParaRPr/>
-          </a:p>
-        </p:txBody>
-      </p:sp>
-      <p:sp>
-        <p:nvSpPr>
-          <p:cNvPr id="13" name="TextBox 12"/>
-          <p:cNvSpPr txBox="1"/>
-          <p:nvPr/>
-        </p:nvSpPr>
-        <p:spPr>
-          <a:xfrm>
-            <a:off x="6382512" y="1655063"/>
-            <a:ext cx="2185416" cy="320040"/>
-          </a:xfrm>
-          <a:prstGeom prst="rect">
-            <a:avLst/>
-          </a:prstGeom>
-          <a:noFill/>
-        </p:spPr>
-        <p:txBody>
-          <a:bodyPr wrap="square" anchor="t">
-            <a:spAutoFit/>
-          </a:bodyPr>
-          <a:lstStyle/>
-          <a:p>
-            <a:pPr algn="l"/>
-            <a:r>
-              <a:rPr sz="1500" b="1">
-                <a:solidFill>
-                  <a:srgbClr val="2E7D5A"/>
-                </a:solidFill>
-                <a:latin typeface="Aptos"/>
-              </a:rPr>
-              <a:t>Recall</a:t>
-            </a:r>
-          </a:p>
-        </p:txBody>
-      </p:sp>
-      <p:sp>
-        <p:nvSpPr>
-          <p:cNvPr id="14" name="TextBox 13"/>
-          <p:cNvSpPr txBox="1"/>
-          <p:nvPr/>
-        </p:nvSpPr>
-        <p:spPr>
-          <a:xfrm>
-            <a:off x="6382512" y="2039112"/>
-            <a:ext cx="2185416" cy="1216151"/>
-          </a:xfrm>
-          <a:prstGeom prst="rect">
-            <a:avLst/>
-          </a:prstGeom>
-          <a:noFill/>
-        </p:spPr>
-        <p:txBody>
-          <a:bodyPr wrap="square" anchor="t">
-            <a:spAutoFit/>
-          </a:bodyPr>
-          <a:lstStyle/>
-          <a:p>
-            <a:pPr algn="l"/>
-            <a:r>
-              <a:rPr sz="1100" b="0">
-                <a:solidFill>
-                  <a:srgbClr val="232B32"/>
-                </a:solidFill>
-                <a:latin typeface="Aptos"/>
-              </a:rPr>
-              <a:t>Parmi les vrais cas graves, combien avons-nous détectés ?
-Recall élevé ⇒ moins de faux négatifs.</a:t>
-            </a:r>
-          </a:p>
-        </p:txBody>
-      </p:sp>
-      <p:sp>
-        <p:nvSpPr>
-          <p:cNvPr id="15" name="Rounded Rectangle 14"/>
-          <p:cNvSpPr/>
-          <p:nvPr/>
-        </p:nvSpPr>
-        <p:spPr>
-          <a:xfrm>
-            <a:off x="8915400" y="1508760"/>
-            <a:ext cx="2514600" cy="1874519"/>
-          </a:xfrm>
-          <a:prstGeom prst="roundRect">
-            <a:avLst/>
-          </a:prstGeom>
-          <a:solidFill>
-            <a:srgbClr val="F5F7F9"/>
-          </a:solidFill>
-          <a:ln>
-            <a:solidFill>
-              <a:srgbClr val="DCE2E7"/>
-            </a:solidFill>
-          </a:ln>
-        </p:spPr>
-        <p:style>
-          <a:lnRef idx="1">
-            <a:schemeClr val="accent1"/>
-          </a:lnRef>
-          <a:fillRef idx="3">
-            <a:schemeClr val="accent1"/>
-          </a:fillRef>
-          <a:effectRef idx="2">
-            <a:schemeClr val="accent1"/>
-          </a:effectRef>
-          <a:fontRef idx="minor">
-            <a:schemeClr val="lt1"/>
-          </a:fontRef>
-        </p:style>
-        <p:txBody>
-          <a:bodyPr rtlCol="0" anchor="ctr"/>
-          <a:lstStyle/>
-          <a:p>
-            <a:pPr algn="ctr"/>
-            <a:endParaRPr/>
-          </a:p>
-        </p:txBody>
-      </p:sp>
-      <p:sp>
-        <p:nvSpPr>
-          <p:cNvPr id="16" name="TextBox 15"/>
-          <p:cNvSpPr txBox="1"/>
-          <p:nvPr/>
-        </p:nvSpPr>
-        <p:spPr>
-          <a:xfrm>
-            <a:off x="9079992" y="1655063"/>
-            <a:ext cx="2185416" cy="320040"/>
-          </a:xfrm>
-          <a:prstGeom prst="rect">
-            <a:avLst/>
-          </a:prstGeom>
-          <a:noFill/>
-        </p:spPr>
-        <p:txBody>
-          <a:bodyPr wrap="square" anchor="t">
-            <a:spAutoFit/>
-          </a:bodyPr>
-          <a:lstStyle/>
-          <a:p>
-            <a:pPr algn="l"/>
-            <a:r>
-              <a:rPr sz="1500" b="1">
-                <a:solidFill>
-                  <a:srgbClr val="215E91"/>
-                </a:solidFill>
-                <a:latin typeface="Aptos"/>
-              </a:rPr>
-              <a:t>Precision</a:t>
-            </a:r>
-          </a:p>
-        </p:txBody>
-      </p:sp>
-      <p:sp>
-        <p:nvSpPr>
-          <p:cNvPr id="17" name="TextBox 16"/>
-          <p:cNvSpPr txBox="1"/>
-          <p:nvPr/>
-        </p:nvSpPr>
-        <p:spPr>
-          <a:xfrm>
-            <a:off x="9079992" y="2039112"/>
-            <a:ext cx="2185416" cy="1216151"/>
-          </a:xfrm>
-          <a:prstGeom prst="rect">
-            <a:avLst/>
-          </a:prstGeom>
-          <a:noFill/>
-        </p:spPr>
-        <p:txBody>
-          <a:bodyPr wrap="square" anchor="t">
-            <a:spAutoFit/>
-          </a:bodyPr>
-          <a:lstStyle/>
-          <a:p>
-            <a:pPr algn="l"/>
-            <a:r>
-              <a:rPr sz="1100" b="0">
-                <a:solidFill>
-                  <a:srgbClr val="232B32"/>
-                </a:solidFill>
-                <a:latin typeface="Aptos"/>
-              </a:rPr>
-              <a:t>Parmi les alertes graves prédites, combien sont réellement graves ?
-Precision élevée ⇒ moins de faux positifs.</a:t>
-            </a:r>
-          </a:p>
-        </p:txBody>
-      </p:sp>
-      <p:sp>
-        <p:nvSpPr>
-          <p:cNvPr id="18" name="TextBox 17"/>
-          <p:cNvSpPr txBox="1"/>
-          <p:nvPr/>
-        </p:nvSpPr>
-        <p:spPr>
-          <a:xfrm>
-            <a:off x="685800" y="3858768"/>
-            <a:ext cx="1371600" cy="320040"/>
-          </a:xfrm>
-          <a:prstGeom prst="rect">
-            <a:avLst/>
-          </a:prstGeom>
-          <a:noFill/>
-        </p:spPr>
-        <p:txBody>
-          <a:bodyPr wrap="square" anchor="t">
-            <a:spAutoFit/>
-          </a:bodyPr>
-          <a:lstStyle/>
-          <a:p>
-            <a:pPr algn="l"/>
-            <a:r>
-              <a:rPr sz="1800" b="1">
-                <a:solidFill>
-                  <a:srgbClr val="0F2238"/>
-                </a:solidFill>
-                <a:latin typeface="Aptos"/>
-              </a:rPr>
-              <a:t>F1-score</a:t>
-            </a:r>
-          </a:p>
-        </p:txBody>
-      </p:sp>
-      <p:sp>
-        <p:nvSpPr>
-          <p:cNvPr id="19" name="TextBox 18"/>
-          <p:cNvSpPr txBox="1"/>
-          <p:nvPr/>
-        </p:nvSpPr>
-        <p:spPr>
-          <a:xfrm>
-            <a:off x="1874519" y="3867912"/>
-            <a:ext cx="2743200" cy="274320"/>
-          </a:xfrm>
-          <a:prstGeom prst="rect">
-            <a:avLst/>
-          </a:prstGeom>
-          <a:noFill/>
-        </p:spPr>
-        <p:txBody>
-          <a:bodyPr wrap="square" anchor="t">
-            <a:spAutoFit/>
-          </a:bodyPr>
-          <a:lstStyle/>
-          <a:p>
-            <a:pPr algn="l"/>
-            <a:r>
-              <a:rPr sz="1400" b="0">
-                <a:solidFill>
-                  <a:srgbClr val="232B32"/>
-                </a:solidFill>
-                <a:latin typeface="Aptos"/>
-              </a:rPr>
-              <a:t>compromis Precision + Recall</a:t>
-            </a:r>
-          </a:p>
-        </p:txBody>
-      </p:sp>
-      <p:sp>
-        <p:nvSpPr>
-          <p:cNvPr id="20" name="TextBox 19"/>
-          <p:cNvSpPr txBox="1"/>
-          <p:nvPr/>
-        </p:nvSpPr>
-        <p:spPr>
-          <a:xfrm>
-            <a:off x="685800" y="4462272"/>
-            <a:ext cx="1371600" cy="320040"/>
-          </a:xfrm>
-          <a:prstGeom prst="rect">
-            <a:avLst/>
-          </a:prstGeom>
-          <a:noFill/>
-        </p:spPr>
-        <p:txBody>
-          <a:bodyPr wrap="square" anchor="t">
-            <a:spAutoFit/>
-          </a:bodyPr>
-          <a:lstStyle/>
-          <a:p>
-            <a:pPr algn="l"/>
-            <a:r>
-              <a:rPr sz="1800" b="1">
-                <a:solidFill>
-                  <a:srgbClr val="0F2238"/>
-                </a:solidFill>
-                <a:latin typeface="Aptos"/>
-              </a:rPr>
-              <a:t>F1 macro</a:t>
-            </a:r>
-          </a:p>
-        </p:txBody>
-      </p:sp>
-      <p:sp>
-        <p:nvSpPr>
-          <p:cNvPr id="21" name="TextBox 20"/>
-          <p:cNvSpPr txBox="1"/>
-          <p:nvPr/>
-        </p:nvSpPr>
-        <p:spPr>
-          <a:xfrm>
-            <a:off x="1874519" y="4471416"/>
-            <a:ext cx="7955279" cy="384048"/>
-          </a:xfrm>
-          <a:prstGeom prst="rect">
-            <a:avLst/>
-          </a:prstGeom>
-          <a:noFill/>
-        </p:spPr>
-        <p:txBody>
-          <a:bodyPr wrap="square" anchor="t">
-            <a:spAutoFit/>
-          </a:bodyPr>
-          <a:lstStyle/>
-          <a:p>
-            <a:pPr algn="l"/>
-            <a:r>
-              <a:rPr sz="1400" b="0">
-                <a:solidFill>
-                  <a:srgbClr val="232B32"/>
-                </a:solidFill>
-                <a:latin typeface="Aptos"/>
-              </a:rPr>
-              <a:t>donne le même poids à chaque classe → utile quand les classes rares sont importantes.</a:t>
-            </a:r>
-          </a:p>
-        </p:txBody>
-      </p:sp>
-      <p:sp>
-        <p:nvSpPr>
-          <p:cNvPr id="22" name="TextBox 21"/>
-          <p:cNvSpPr txBox="1"/>
-          <p:nvPr/>
-        </p:nvSpPr>
-        <p:spPr>
-          <a:xfrm>
-            <a:off x="685800" y="5148072"/>
-            <a:ext cx="1371600" cy="320040"/>
-          </a:xfrm>
-          <a:prstGeom prst="rect">
-            <a:avLst/>
-          </a:prstGeom>
-          <a:noFill/>
-        </p:spPr>
-        <p:txBody>
-          <a:bodyPr wrap="square" anchor="t">
-            <a:spAutoFit/>
-          </a:bodyPr>
-          <a:lstStyle/>
-          <a:p>
-            <a:pPr algn="l"/>
-            <a:r>
-              <a:rPr sz="1800" b="1">
-                <a:solidFill>
-                  <a:srgbClr val="0F2238"/>
-                </a:solidFill>
-                <a:latin typeface="Aptos"/>
-              </a:rPr>
-              <a:t>Régression</a:t>
-            </a:r>
-          </a:p>
-        </p:txBody>
-      </p:sp>
-      <p:sp>
-        <p:nvSpPr>
-          <p:cNvPr id="23" name="TextBox 22"/>
-          <p:cNvSpPr txBox="1"/>
-          <p:nvPr/>
-        </p:nvSpPr>
-        <p:spPr>
-          <a:xfrm>
-            <a:off x="1874519" y="5157216"/>
-            <a:ext cx="8961120" cy="411480"/>
-          </a:xfrm>
-          <a:prstGeom prst="rect">
-            <a:avLst/>
-          </a:prstGeom>
-          <a:noFill/>
-        </p:spPr>
-        <p:txBody>
-          <a:bodyPr wrap="square" anchor="t">
-            <a:spAutoFit/>
-          </a:bodyPr>
-          <a:lstStyle/>
-          <a:p>
-            <a:pPr algn="l"/>
-            <a:r>
-              <a:rPr sz="1400" b="0">
-                <a:solidFill>
-                  <a:srgbClr val="232B32"/>
-                </a:solidFill>
-                <a:latin typeface="Aptos"/>
-              </a:rPr>
-              <a:t>pas de FP/FN : on regarde MAE, RMSE et R². RMSE pénalise davantage les grosses erreurs.</a:t>
-            </a:r>
-          </a:p>
-        </p:txBody>
-      </p:sp>
-      <p:sp>
-        <p:nvSpPr>
-          <p:cNvPr id="24" name="TextBox 23"/>
-          <p:cNvSpPr txBox="1"/>
-          <p:nvPr/>
-        </p:nvSpPr>
-        <p:spPr>
-          <a:xfrm>
-            <a:off x="594360" y="6528816"/>
-            <a:ext cx="10972800" cy="164592"/>
-          </a:xfrm>
-          <a:prstGeom prst="rect">
-            <a:avLst/>
-          </a:prstGeom>
-          <a:noFill/>
-        </p:spPr>
-        <p:txBody>
-          <a:bodyPr wrap="square" anchor="t">
-            <a:spAutoFit/>
-          </a:bodyPr>
-          <a:lstStyle/>
-          <a:p>
-            <a:pPr algn="l"/>
-            <a:r>
-              <a:rPr sz="800" b="0">
-                <a:solidFill>
-                  <a:srgbClr val="626F7B"/>
-                </a:solidFill>
-                <a:latin typeface="Aptos"/>
-              </a:rPr>
-              <a:t>Principe d’évaluation appliqué aux notebooks du TP.</a:t>
-            </a:r>
-          </a:p>
-        </p:txBody>
-      </p:sp>
-    </p:spTree>
-  </p:cSld>
-  <p:clrMapOvr>
-    <a:masterClrMapping/>
-  </p:clrMapOvr>
-</p:sld>
-</file>
-
-<file path=ppt/slides/slide4.xml><?xml version="1.0" encoding="utf-8"?>
-<p:sld xmlns:a="http://schemas.openxmlformats.org/drawingml/2006/main" xmlns:r="http://schemas.openxmlformats.org/officeDocument/2006/relationships" xmlns:p="http://schemas.openxmlformats.org/presentationml/2006/main">
-  <p:cSld>
-    <p:bg>
-      <p:bgPr>
-        <a:solidFill>
-          <a:srgbClr val="FFFFFF"/>
-        </a:solidFill>
-        <a:effectLst/>
-      </p:bgPr>
-    </p:bg>
-    <p:spTree>
-      <p:nvGrpSpPr>
-        <p:cNvPr id="1" name=""/>
-        <p:cNvGrpSpPr/>
-        <p:nvPr/>
-      </p:nvGrpSpPr>
-      <p:grpSpPr>
-        <a:xfrm>
-          <a:off x="0" y="0"/>
-          <a:ext cx="0" cy="0"/>
-          <a:chOff x="0" y="0"/>
-          <a:chExt cx="0" cy="0"/>
-        </a:xfrm>
-      </p:grpSpPr>
-      <p:sp>
-        <p:nvSpPr>
-          <p:cNvPr id="2" name="TextBox 1"/>
-          <p:cNvSpPr txBox="1"/>
-          <p:nvPr/>
-        </p:nvSpPr>
-        <p:spPr>
-          <a:xfrm>
-            <a:off x="594360" y="384048"/>
-            <a:ext cx="10698480" cy="502920"/>
-          </a:xfrm>
-          <a:prstGeom prst="rect">
-            <a:avLst/>
-          </a:prstGeom>
-          <a:noFill/>
-        </p:spPr>
-        <p:txBody>
-          <a:bodyPr wrap="square" anchor="t">
-            <a:spAutoFit/>
-          </a:bodyPr>
-          <a:lstStyle/>
-          <a:p>
-            <a:pPr algn="l"/>
-            <a:r>
-              <a:rPr sz="2800" b="1">
-                <a:solidFill>
-                  <a:srgbClr val="0F2238"/>
-                </a:solidFill>
-                <a:latin typeface="Aptos"/>
-              </a:rPr>
               <a:t>Modèle 02 — Classification des zones de risque</a:t>
             </a:r>
           </a:p>
@@ -18563,7 +17309,7 @@
 </p:sld>
 </file>
 
-<file path=ppt/slides/slide5.xml><?xml version="1.0" encoding="utf-8"?>
+<file path=ppt/slides/slide4.xml><?xml version="1.0" encoding="utf-8"?>
 <p:sld xmlns:a="http://schemas.openxmlformats.org/drawingml/2006/main" xmlns:r="http://schemas.openxmlformats.org/officeDocument/2006/relationships" xmlns:p="http://schemas.openxmlformats.org/presentationml/2006/main">
   <p:cSld>
     <p:bg>
@@ -18721,117 +17467,18 @@
         <p:spPr>
           <a:xfrm>
             <a:off x="411479" y="1289625"/>
-            <a:ext cx="11427953" cy="1384995"/>
-          </a:xfrm>
-          <a:prstGeom prst="rect">
-            <a:avLst/>
-          </a:prstGeom>
-          <a:noFill/>
-        </p:spPr>
-        <p:txBody>
-          <a:bodyPr wrap="square" anchor="t">
-            <a:spAutoFit/>
-          </a:bodyPr>
-          <a:lstStyle/>
-          <a:p>
-            <a:pPr algn="l"/>
-            <a:r>
-              <a:rPr sz="1200" b="0" dirty="0" err="1">
-                <a:solidFill>
-                  <a:srgbClr val="626F7B"/>
-                </a:solidFill>
-                <a:latin typeface="Aptos"/>
-              </a:rPr>
-              <a:t>Ici</a:t>
-            </a:r>
-            <a:r>
-              <a:rPr sz="1200" b="0" dirty="0">
-                <a:solidFill>
-                  <a:srgbClr val="626F7B"/>
-                </a:solidFill>
-                <a:latin typeface="Aptos"/>
-              </a:rPr>
-              <a:t> il </a:t>
-            </a:r>
-            <a:r>
-              <a:rPr sz="1200" b="0" dirty="0" err="1">
-                <a:solidFill>
-                  <a:srgbClr val="626F7B"/>
-                </a:solidFill>
-                <a:latin typeface="Aptos"/>
-              </a:rPr>
-              <a:t>n’y</a:t>
-            </a:r>
-            <a:r>
-              <a:rPr sz="1200" b="0" dirty="0">
-                <a:solidFill>
-                  <a:srgbClr val="626F7B"/>
-                </a:solidFill>
-                <a:latin typeface="Aptos"/>
-              </a:rPr>
-              <a:t> a pas de faux </a:t>
-            </a:r>
-            <a:r>
-              <a:rPr sz="1200" b="0" dirty="0" err="1">
-                <a:solidFill>
-                  <a:srgbClr val="626F7B"/>
-                </a:solidFill>
-                <a:latin typeface="Aptos"/>
-              </a:rPr>
-              <a:t>positifs</a:t>
-            </a:r>
-            <a:r>
-              <a:rPr sz="1200" b="0" dirty="0">
-                <a:solidFill>
-                  <a:srgbClr val="626F7B"/>
-                </a:solidFill>
-                <a:latin typeface="Aptos"/>
-              </a:rPr>
-              <a:t> / faux </a:t>
-            </a:r>
-            <a:r>
-              <a:rPr sz="1200" b="0" dirty="0" err="1">
-                <a:solidFill>
-                  <a:srgbClr val="626F7B"/>
-                </a:solidFill>
-                <a:latin typeface="Aptos"/>
-              </a:rPr>
-              <a:t>négatifs</a:t>
-            </a:r>
-            <a:r>
-              <a:rPr sz="1200" b="0" dirty="0">
-                <a:solidFill>
-                  <a:srgbClr val="626F7B"/>
-                </a:solidFill>
-                <a:latin typeface="Aptos"/>
-              </a:rPr>
-              <a:t> : la </a:t>
-            </a:r>
-            <a:r>
-              <a:rPr sz="1200" b="0" dirty="0" err="1">
-                <a:solidFill>
-                  <a:srgbClr val="626F7B"/>
-                </a:solidFill>
-                <a:latin typeface="Aptos"/>
-              </a:rPr>
-              <a:t>cible</a:t>
-            </a:r>
-            <a:r>
-              <a:rPr sz="1200" b="0" dirty="0">
-                <a:solidFill>
-                  <a:srgbClr val="626F7B"/>
-                </a:solidFill>
-                <a:latin typeface="Aptos"/>
-              </a:rPr>
-              <a:t> est continue.</a:t>
-            </a:r>
-            <a:endParaRPr lang="fr-CA" sz="1200" b="0" dirty="0">
-              <a:solidFill>
-                <a:srgbClr val="626F7B"/>
-              </a:solidFill>
-              <a:latin typeface="Aptos"/>
-            </a:endParaRPr>
-          </a:p>
+            <a:ext cx="11427953" cy="1200329"/>
+          </a:xfrm>
+          <a:prstGeom prst="rect">
+            <a:avLst/>
+          </a:prstGeom>
+          <a:noFill/>
+        </p:spPr>
+        <p:txBody>
+          <a:bodyPr wrap="square" anchor="t">
+            <a:spAutoFit/>
+          </a:bodyPr>
+          <a:lstStyle/>
           <a:p>
             <a:r>
               <a:rPr lang="fr-CA" sz="1200" b="1" dirty="0">
@@ -20181,7 +18828,7 @@
 </p:sld>
 </file>
 
-<file path=ppt/slides/slide6.xml><?xml version="1.0" encoding="utf-8"?>
+<file path=ppt/slides/slide5.xml><?xml version="1.0" encoding="utf-8"?>
 <p:sld xmlns:a="http://schemas.openxmlformats.org/drawingml/2006/main" xmlns:r="http://schemas.openxmlformats.org/officeDocument/2006/relationships" xmlns:p="http://schemas.openxmlformats.org/presentationml/2006/main">
   <p:cSld>
     <p:bg>
@@ -20293,7 +18940,7 @@
         </p:nvSpPr>
         <p:spPr>
           <a:xfrm>
-            <a:off x="502920" y="1168072"/>
+            <a:off x="420624" y="1134445"/>
             <a:ext cx="10881360" cy="1200329"/>
           </a:xfrm>
           <a:prstGeom prst="rect">
@@ -20324,7 +18971,13 @@
                 </a:solidFill>
                 <a:latin typeface="Aptos"/>
               </a:rPr>
-              <a:t> Entraîner et d'évaluer des modèles de classification par Machine Learning pour prédire des catégories de facteurs de risque des séismes à partir d'un jeu de données de l'USGS.</a:t>
+              <a:t> </a:t>
+            </a:r>
+            <a:r>
+              <a:rPr lang="fr-CA" sz="1200" b="0" dirty="0">
+                <a:latin typeface="Aptos"/>
+              </a:rPr>
+              <a:t>Entraîner et d'évaluer des modèles de classification par Machine Learning pour prédire des catégories de facteurs de risque des séismes à partir d'un jeu de données de l'USGS.</a:t>
             </a:r>
           </a:p>
           <a:p>
@@ -20370,27 +19023,18 @@
             <a:pPr algn="l"/>
             <a:r>
               <a:rPr lang="fr-CA" sz="1200" b="0" dirty="0">
-                <a:solidFill>
-                  <a:srgbClr val="626F7B"/>
-                </a:solidFill>
                 <a:latin typeface="Aptos"/>
               </a:rPr>
               <a:t>La  segmentation </a:t>
             </a:r>
             <a:r>
               <a:rPr lang="fr-CA" sz="1200" dirty="0">
-                <a:solidFill>
-                  <a:srgbClr val="626F7B"/>
-                </a:solidFill>
                 <a:latin typeface="Aptos"/>
               </a:rPr>
               <a:t>d</a:t>
             </a:r>
             <a:r>
               <a:rPr lang="fr-CA" sz="1200" b="0" dirty="0">
-                <a:solidFill>
-                  <a:srgbClr val="626F7B"/>
-                </a:solidFill>
                 <a:latin typeface="Aptos"/>
               </a:rPr>
               <a:t>es séismes en 5 catégories hiérarchisées (Risque Tsunami, Forte Secousse, Forte Exposition, Faible Profondeur, Risque Modéré ou Faible)</a:t>
@@ -20400,35 +19044,23 @@
             <a:pPr algn="l"/>
             <a:r>
               <a:rPr lang="fr-CA" sz="1200" b="0" dirty="0">
-                <a:solidFill>
-                  <a:srgbClr val="626F7B"/>
-                </a:solidFill>
                 <a:latin typeface="Aptos"/>
               </a:rPr>
               <a:t>basées sur des règles métier (magnitude, profondeur, intensité MMI, alertes, etc.) tout en évitant les fuites de données (data </a:t>
             </a:r>
             <a:r>
               <a:rPr lang="fr-CA" sz="1200" b="0" dirty="0" err="1">
-                <a:solidFill>
-                  <a:srgbClr val="626F7B"/>
-                </a:solidFill>
                 <a:latin typeface="Aptos"/>
               </a:rPr>
               <a:t>leakage</a:t>
             </a:r>
             <a:r>
               <a:rPr lang="fr-CA" sz="1200" b="0" dirty="0">
-                <a:solidFill>
-                  <a:srgbClr val="626F7B"/>
-                </a:solidFill>
                 <a:latin typeface="Aptos"/>
               </a:rPr>
               <a:t>).</a:t>
             </a:r>
             <a:endParaRPr sz="1200" b="0" dirty="0">
-              <a:solidFill>
-                <a:srgbClr val="626F7B"/>
-              </a:solidFill>
               <a:latin typeface="Aptos"/>
             </a:endParaRPr>
           </a:p>
@@ -21314,7 +19946,7 @@
 </p:sld>
 </file>
 
-<file path=ppt/slides/slide7.xml><?xml version="1.0" encoding="utf-8"?>
+<file path=ppt/slides/slide6.xml><?xml version="1.0" encoding="utf-8"?>
 <p:sld xmlns:a="http://schemas.openxmlformats.org/drawingml/2006/main" xmlns:r="http://schemas.openxmlformats.org/officeDocument/2006/relationships" xmlns:p="http://schemas.openxmlformats.org/presentationml/2006/main">
   <p:cSld>
     <p:bg>
@@ -22426,7 +21058,7 @@
 </p:sld>
 </file>
 
-<file path=ppt/slides/slide8.xml><?xml version="1.0" encoding="utf-8"?>
+<file path=ppt/slides/slide7.xml><?xml version="1.0" encoding="utf-8"?>
 <p:sld xmlns:a="http://schemas.openxmlformats.org/drawingml/2006/main" xmlns:r="http://schemas.openxmlformats.org/officeDocument/2006/relationships" xmlns:p="http://schemas.openxmlformats.org/presentationml/2006/main">
   <p:cSld>
     <p:bg>
@@ -23492,7 +22124,7 @@
 </p:sld>
 </file>
 
-<file path=ppt/slides/slide9.xml><?xml version="1.0" encoding="utf-8"?>
+<file path=ppt/slides/slide8.xml><?xml version="1.0" encoding="utf-8"?>
 <p:sld xmlns:a="http://schemas.openxmlformats.org/drawingml/2006/main" xmlns:r="http://schemas.openxmlformats.org/officeDocument/2006/relationships" xmlns:p="http://schemas.openxmlformats.org/presentationml/2006/main">
   <p:cSld>
     <p:bg>
@@ -24406,6 +23038,1260 @@
 </p:sld>
 </file>
 
+<file path=ppt/slides/slide9.xml><?xml version="1.0" encoding="utf-8"?>
+<p:sld xmlns:a="http://schemas.openxmlformats.org/drawingml/2006/main" xmlns:r="http://schemas.openxmlformats.org/officeDocument/2006/relationships" xmlns:p="http://schemas.openxmlformats.org/presentationml/2006/main">
+  <p:cSld>
+    <p:bg>
+      <p:bgPr>
+        <a:solidFill>
+          <a:srgbClr val="FFFFFF"/>
+        </a:solidFill>
+        <a:effectLst/>
+      </p:bgPr>
+    </p:bg>
+    <p:spTree>
+      <p:nvGrpSpPr>
+        <p:cNvPr id="1" name=""/>
+        <p:cNvGrpSpPr/>
+        <p:nvPr/>
+      </p:nvGrpSpPr>
+      <p:grpSpPr>
+        <a:xfrm>
+          <a:off x="0" y="0"/>
+          <a:ext cx="0" cy="0"/>
+          <a:chOff x="0" y="0"/>
+          <a:chExt cx="0" cy="0"/>
+        </a:xfrm>
+      </p:grpSpPr>
+      <p:sp>
+        <p:nvSpPr>
+          <p:cNvPr id="2" name="TextBox 1"/>
+          <p:cNvSpPr txBox="1"/>
+          <p:nvPr/>
+        </p:nvSpPr>
+        <p:spPr>
+          <a:xfrm>
+            <a:off x="594360" y="384048"/>
+            <a:ext cx="10698480" cy="502920"/>
+          </a:xfrm>
+          <a:prstGeom prst="rect">
+            <a:avLst/>
+          </a:prstGeom>
+          <a:noFill/>
+        </p:spPr>
+        <p:txBody>
+          <a:bodyPr wrap="square" anchor="t">
+            <a:spAutoFit/>
+          </a:bodyPr>
+          <a:lstStyle/>
+          <a:p>
+            <a:pPr algn="l"/>
+            <a:r>
+              <a:rPr sz="2800" b="1">
+                <a:solidFill>
+                  <a:srgbClr val="0F2238"/>
+                </a:solidFill>
+                <a:latin typeface="Aptos"/>
+              </a:rPr>
+              <a:t>Modèle 07 — Pertes économiques : quelle erreur regarder ?</a:t>
+            </a:r>
+          </a:p>
+        </p:txBody>
+      </p:sp>
+      <p:sp>
+        <p:nvSpPr>
+          <p:cNvPr id="3" name="Rectangle 2"/>
+          <p:cNvSpPr/>
+          <p:nvPr/>
+        </p:nvSpPr>
+        <p:spPr>
+          <a:xfrm>
+            <a:off x="594360" y="960120"/>
+            <a:ext cx="914400" cy="50292"/>
+          </a:xfrm>
+          <a:prstGeom prst="rect">
+            <a:avLst/>
+          </a:prstGeom>
+          <a:solidFill>
+            <a:srgbClr val="36A2BF"/>
+          </a:solidFill>
+          <a:ln>
+            <a:noFill/>
+          </a:ln>
+        </p:spPr>
+        <p:style>
+          <a:lnRef idx="1">
+            <a:schemeClr val="accent1"/>
+          </a:lnRef>
+          <a:fillRef idx="3">
+            <a:schemeClr val="accent1"/>
+          </a:fillRef>
+          <a:effectRef idx="2">
+            <a:schemeClr val="accent1"/>
+          </a:effectRef>
+          <a:fontRef idx="minor">
+            <a:schemeClr val="lt1"/>
+          </a:fontRef>
+        </p:style>
+        <p:txBody>
+          <a:bodyPr rtlCol="0" anchor="ctr"/>
+          <a:lstStyle/>
+          <a:p>
+            <a:pPr algn="ctr"/>
+            <a:endParaRPr/>
+          </a:p>
+        </p:txBody>
+      </p:sp>
+      <p:sp>
+        <p:nvSpPr>
+          <p:cNvPr id="4" name="TextBox 3"/>
+          <p:cNvSpPr txBox="1"/>
+          <p:nvPr/>
+        </p:nvSpPr>
+        <p:spPr>
+          <a:xfrm>
+            <a:off x="594360" y="1060704"/>
+            <a:ext cx="10881360" cy="384048"/>
+          </a:xfrm>
+          <a:prstGeom prst="rect">
+            <a:avLst/>
+          </a:prstGeom>
+          <a:noFill/>
+        </p:spPr>
+        <p:txBody>
+          <a:bodyPr wrap="square" anchor="t">
+            <a:spAutoFit/>
+          </a:bodyPr>
+          <a:lstStyle/>
+          <a:p>
+            <a:pPr algn="l"/>
+            <a:r>
+              <a:rPr sz="1200" b="0">
+                <a:solidFill>
+                  <a:srgbClr val="626F7B"/>
+                </a:solidFill>
+                <a:latin typeface="Aptos"/>
+              </a:rPr>
+              <a:t>734 séismes : 625 pertes nulles, 109 pertes positives. Cible transformée avec log1p.</a:t>
+            </a:r>
+          </a:p>
+        </p:txBody>
+      </p:sp>
+      <p:sp>
+        <p:nvSpPr>
+          <p:cNvPr id="5" name="TextBox 4"/>
+          <p:cNvSpPr txBox="1"/>
+          <p:nvPr/>
+        </p:nvSpPr>
+        <p:spPr>
+          <a:xfrm>
+            <a:off x="11109960" y="393192"/>
+            <a:ext cx="457200" cy="320040"/>
+          </a:xfrm>
+          <a:prstGeom prst="rect">
+            <a:avLst/>
+          </a:prstGeom>
+          <a:noFill/>
+        </p:spPr>
+        <p:txBody>
+          <a:bodyPr wrap="square" anchor="t">
+            <a:spAutoFit/>
+          </a:bodyPr>
+          <a:lstStyle/>
+          <a:p>
+            <a:pPr algn="r"/>
+            <a:r>
+              <a:rPr sz="1100" b="1">
+                <a:solidFill>
+                  <a:srgbClr val="626F7B"/>
+                </a:solidFill>
+                <a:latin typeface="Aptos"/>
+              </a:rPr>
+              <a:t>10</a:t>
+            </a:r>
+          </a:p>
+        </p:txBody>
+      </p:sp>
+      <p:sp>
+        <p:nvSpPr>
+          <p:cNvPr id="6" name="Rounded Rectangle 5"/>
+          <p:cNvSpPr/>
+          <p:nvPr/>
+        </p:nvSpPr>
+        <p:spPr>
+          <a:xfrm>
+            <a:off x="640080" y="1417320"/>
+            <a:ext cx="2240280" cy="658368"/>
+          </a:xfrm>
+          <a:prstGeom prst="roundRect">
+            <a:avLst/>
+          </a:prstGeom>
+          <a:solidFill>
+            <a:srgbClr val="EBF4F8"/>
+          </a:solidFill>
+          <a:ln>
+            <a:solidFill>
+              <a:srgbClr val="2E7D5A"/>
+            </a:solidFill>
+          </a:ln>
+        </p:spPr>
+        <p:style>
+          <a:lnRef idx="1">
+            <a:schemeClr val="accent1"/>
+          </a:lnRef>
+          <a:fillRef idx="3">
+            <a:schemeClr val="accent1"/>
+          </a:fillRef>
+          <a:effectRef idx="2">
+            <a:schemeClr val="accent1"/>
+          </a:effectRef>
+          <a:fontRef idx="minor">
+            <a:schemeClr val="lt1"/>
+          </a:fontRef>
+        </p:style>
+        <p:txBody>
+          <a:bodyPr rtlCol="0" anchor="ctr"/>
+          <a:lstStyle/>
+          <a:p>
+            <a:pPr algn="ctr"/>
+            <a:endParaRPr/>
+          </a:p>
+        </p:txBody>
+      </p:sp>
+      <p:sp>
+        <p:nvSpPr>
+          <p:cNvPr id="7" name="TextBox 6"/>
+          <p:cNvSpPr txBox="1"/>
+          <p:nvPr/>
+        </p:nvSpPr>
+        <p:spPr>
+          <a:xfrm>
+            <a:off x="749808" y="1587416"/>
+            <a:ext cx="995781" cy="276999"/>
+          </a:xfrm>
+          <a:prstGeom prst="rect">
+            <a:avLst/>
+          </a:prstGeom>
+          <a:noFill/>
+        </p:spPr>
+        <p:txBody>
+          <a:bodyPr wrap="square" anchor="t">
+            <a:spAutoFit/>
+          </a:bodyPr>
+          <a:lstStyle/>
+          <a:p>
+            <a:pPr algn="l"/>
+            <a:r>
+              <a:rPr sz="1200" b="1" dirty="0">
+                <a:solidFill>
+                  <a:srgbClr val="626F7B"/>
+                </a:solidFill>
+                <a:latin typeface="Aptos"/>
+              </a:rPr>
+              <a:t>CHAMPION</a:t>
+            </a:r>
+          </a:p>
+        </p:txBody>
+      </p:sp>
+      <p:sp>
+        <p:nvSpPr>
+          <p:cNvPr id="8" name="TextBox 7"/>
+          <p:cNvSpPr txBox="1"/>
+          <p:nvPr/>
+        </p:nvSpPr>
+        <p:spPr>
+          <a:xfrm>
+            <a:off x="1774449" y="1473393"/>
+            <a:ext cx="1134770" cy="523220"/>
+          </a:xfrm>
+          <a:prstGeom prst="rect">
+            <a:avLst/>
+          </a:prstGeom>
+          <a:noFill/>
+        </p:spPr>
+        <p:txBody>
+          <a:bodyPr wrap="square" anchor="t">
+            <a:spAutoFit/>
+          </a:bodyPr>
+          <a:lstStyle/>
+          <a:p>
+            <a:r>
+              <a:rPr sz="1400" b="1" dirty="0">
+                <a:solidFill>
+                  <a:srgbClr val="2E7D5A"/>
+                </a:solidFill>
+                <a:latin typeface="Aptos"/>
+              </a:rPr>
+              <a:t>Gradient Boosting</a:t>
+            </a:r>
+          </a:p>
+        </p:txBody>
+      </p:sp>
+      <p:sp>
+        <p:nvSpPr>
+          <p:cNvPr id="9" name="Rounded Rectangle 8"/>
+          <p:cNvSpPr/>
+          <p:nvPr/>
+        </p:nvSpPr>
+        <p:spPr>
+          <a:xfrm>
+            <a:off x="3063240" y="1417320"/>
+            <a:ext cx="1965960" cy="658368"/>
+          </a:xfrm>
+          <a:prstGeom prst="roundRect">
+            <a:avLst/>
+          </a:prstGeom>
+          <a:solidFill>
+            <a:srgbClr val="EBF4F8"/>
+          </a:solidFill>
+          <a:ln>
+            <a:solidFill>
+              <a:srgbClr val="215E91"/>
+            </a:solidFill>
+          </a:ln>
+        </p:spPr>
+        <p:style>
+          <a:lnRef idx="1">
+            <a:schemeClr val="accent1"/>
+          </a:lnRef>
+          <a:fillRef idx="3">
+            <a:schemeClr val="accent1"/>
+          </a:fillRef>
+          <a:effectRef idx="2">
+            <a:schemeClr val="accent1"/>
+          </a:effectRef>
+          <a:fontRef idx="minor">
+            <a:schemeClr val="lt1"/>
+          </a:fontRef>
+        </p:style>
+        <p:txBody>
+          <a:bodyPr rtlCol="0" anchor="ctr"/>
+          <a:lstStyle/>
+          <a:p>
+            <a:pPr algn="ctr"/>
+            <a:endParaRPr/>
+          </a:p>
+        </p:txBody>
+      </p:sp>
+      <p:sp>
+        <p:nvSpPr>
+          <p:cNvPr id="10" name="TextBox 9"/>
+          <p:cNvSpPr txBox="1"/>
+          <p:nvPr/>
+        </p:nvSpPr>
+        <p:spPr>
+          <a:xfrm>
+            <a:off x="3172968" y="1577584"/>
+            <a:ext cx="1022299" cy="307777"/>
+          </a:xfrm>
+          <a:prstGeom prst="rect">
+            <a:avLst/>
+          </a:prstGeom>
+          <a:noFill/>
+        </p:spPr>
+        <p:txBody>
+          <a:bodyPr wrap="square" anchor="t">
+            <a:spAutoFit/>
+          </a:bodyPr>
+          <a:lstStyle/>
+          <a:p>
+            <a:pPr algn="l"/>
+            <a:r>
+              <a:rPr sz="1400" b="1" dirty="0">
+                <a:solidFill>
+                  <a:srgbClr val="626F7B"/>
+                </a:solidFill>
+                <a:latin typeface="Aptos"/>
+              </a:rPr>
+              <a:t>R² (log)</a:t>
+            </a:r>
+          </a:p>
+        </p:txBody>
+      </p:sp>
+      <p:sp>
+        <p:nvSpPr>
+          <p:cNvPr id="11" name="TextBox 10"/>
+          <p:cNvSpPr txBox="1"/>
+          <p:nvPr/>
+        </p:nvSpPr>
+        <p:spPr>
+          <a:xfrm>
+            <a:off x="3760445" y="1559296"/>
+            <a:ext cx="1052475" cy="353943"/>
+          </a:xfrm>
+          <a:prstGeom prst="rect">
+            <a:avLst/>
+          </a:prstGeom>
+          <a:noFill/>
+        </p:spPr>
+        <p:txBody>
+          <a:bodyPr wrap="square" anchor="t">
+            <a:spAutoFit/>
+          </a:bodyPr>
+          <a:lstStyle/>
+          <a:p>
+            <a:pPr algn="r"/>
+            <a:r>
+              <a:rPr sz="1700" b="1" dirty="0">
+                <a:solidFill>
+                  <a:srgbClr val="215E91"/>
+                </a:solidFill>
+                <a:latin typeface="Aptos"/>
+              </a:rPr>
+              <a:t>0,6859</a:t>
+            </a:r>
+          </a:p>
+        </p:txBody>
+      </p:sp>
+      <p:sp>
+        <p:nvSpPr>
+          <p:cNvPr id="12" name="Rounded Rectangle 11"/>
+          <p:cNvSpPr/>
+          <p:nvPr/>
+        </p:nvSpPr>
+        <p:spPr>
+          <a:xfrm>
+            <a:off x="5212080" y="1417320"/>
+            <a:ext cx="1965960" cy="658368"/>
+          </a:xfrm>
+          <a:prstGeom prst="roundRect">
+            <a:avLst/>
+          </a:prstGeom>
+          <a:solidFill>
+            <a:srgbClr val="EBF4F8"/>
+          </a:solidFill>
+          <a:ln>
+            <a:solidFill>
+              <a:srgbClr val="36A2BF"/>
+            </a:solidFill>
+          </a:ln>
+        </p:spPr>
+        <p:style>
+          <a:lnRef idx="1">
+            <a:schemeClr val="accent1"/>
+          </a:lnRef>
+          <a:fillRef idx="3">
+            <a:schemeClr val="accent1"/>
+          </a:fillRef>
+          <a:effectRef idx="2">
+            <a:schemeClr val="accent1"/>
+          </a:effectRef>
+          <a:fontRef idx="minor">
+            <a:schemeClr val="lt1"/>
+          </a:fontRef>
+        </p:style>
+        <p:txBody>
+          <a:bodyPr rtlCol="0" anchor="ctr"/>
+          <a:lstStyle/>
+          <a:p>
+            <a:pPr algn="ctr"/>
+            <a:endParaRPr/>
+          </a:p>
+        </p:txBody>
+      </p:sp>
+      <p:sp>
+        <p:nvSpPr>
+          <p:cNvPr id="13" name="TextBox 12"/>
+          <p:cNvSpPr txBox="1"/>
+          <p:nvPr/>
+        </p:nvSpPr>
+        <p:spPr>
+          <a:xfrm>
+            <a:off x="5321808" y="1587417"/>
+            <a:ext cx="619963" cy="307777"/>
+          </a:xfrm>
+          <a:prstGeom prst="rect">
+            <a:avLst/>
+          </a:prstGeom>
+          <a:noFill/>
+        </p:spPr>
+        <p:txBody>
+          <a:bodyPr wrap="square" anchor="t">
+            <a:spAutoFit/>
+          </a:bodyPr>
+          <a:lstStyle/>
+          <a:p>
+            <a:pPr algn="l"/>
+            <a:r>
+              <a:rPr sz="1400" b="1" dirty="0">
+                <a:solidFill>
+                  <a:srgbClr val="626F7B"/>
+                </a:solidFill>
+                <a:latin typeface="Aptos"/>
+              </a:rPr>
+              <a:t>MAE</a:t>
+            </a:r>
+            <a:endParaRPr sz="900" b="1" dirty="0">
+              <a:solidFill>
+                <a:srgbClr val="626F7B"/>
+              </a:solidFill>
+              <a:latin typeface="Aptos"/>
+            </a:endParaRPr>
+          </a:p>
+        </p:txBody>
+      </p:sp>
+      <p:sp>
+        <p:nvSpPr>
+          <p:cNvPr id="14" name="TextBox 13"/>
+          <p:cNvSpPr txBox="1"/>
+          <p:nvPr/>
+        </p:nvSpPr>
+        <p:spPr>
+          <a:xfrm>
+            <a:off x="5815525" y="1554480"/>
+            <a:ext cx="1236269" cy="353943"/>
+          </a:xfrm>
+          <a:prstGeom prst="rect">
+            <a:avLst/>
+          </a:prstGeom>
+          <a:noFill/>
+        </p:spPr>
+        <p:txBody>
+          <a:bodyPr wrap="square" anchor="t">
+            <a:spAutoFit/>
+          </a:bodyPr>
+          <a:lstStyle/>
+          <a:p>
+            <a:pPr algn="r"/>
+            <a:r>
+              <a:rPr sz="1700" b="1" dirty="0">
+                <a:solidFill>
+                  <a:srgbClr val="36A2BF"/>
+                </a:solidFill>
+                <a:latin typeface="Aptos"/>
+              </a:rPr>
+              <a:t>353,47 M$</a:t>
+            </a:r>
+          </a:p>
+        </p:txBody>
+      </p:sp>
+      <p:sp>
+        <p:nvSpPr>
+          <p:cNvPr id="15" name="Rounded Rectangle 14"/>
+          <p:cNvSpPr/>
+          <p:nvPr/>
+        </p:nvSpPr>
+        <p:spPr>
+          <a:xfrm>
+            <a:off x="7360920" y="1417320"/>
+            <a:ext cx="1965960" cy="658368"/>
+          </a:xfrm>
+          <a:prstGeom prst="roundRect">
+            <a:avLst/>
+          </a:prstGeom>
+          <a:solidFill>
+            <a:srgbClr val="EBF4F8"/>
+          </a:solidFill>
+          <a:ln>
+            <a:solidFill>
+              <a:srgbClr val="B44141"/>
+            </a:solidFill>
+          </a:ln>
+        </p:spPr>
+        <p:style>
+          <a:lnRef idx="1">
+            <a:schemeClr val="accent1"/>
+          </a:lnRef>
+          <a:fillRef idx="3">
+            <a:schemeClr val="accent1"/>
+          </a:fillRef>
+          <a:effectRef idx="2">
+            <a:schemeClr val="accent1"/>
+          </a:effectRef>
+          <a:fontRef idx="minor">
+            <a:schemeClr val="lt1"/>
+          </a:fontRef>
+        </p:style>
+        <p:txBody>
+          <a:bodyPr rtlCol="0" anchor="ctr"/>
+          <a:lstStyle/>
+          <a:p>
+            <a:pPr algn="ctr"/>
+            <a:endParaRPr/>
+          </a:p>
+        </p:txBody>
+      </p:sp>
+      <p:sp>
+        <p:nvSpPr>
+          <p:cNvPr id="16" name="TextBox 15"/>
+          <p:cNvSpPr txBox="1"/>
+          <p:nvPr/>
+        </p:nvSpPr>
+        <p:spPr>
+          <a:xfrm>
+            <a:off x="7470648" y="1567752"/>
+            <a:ext cx="1022299" cy="338554"/>
+          </a:xfrm>
+          <a:prstGeom prst="rect">
+            <a:avLst/>
+          </a:prstGeom>
+          <a:noFill/>
+        </p:spPr>
+        <p:txBody>
+          <a:bodyPr wrap="square" anchor="t">
+            <a:spAutoFit/>
+          </a:bodyPr>
+          <a:lstStyle/>
+          <a:p>
+            <a:pPr algn="l"/>
+            <a:r>
+              <a:rPr sz="1600" b="1" dirty="0">
+                <a:solidFill>
+                  <a:srgbClr val="626F7B"/>
+                </a:solidFill>
+                <a:latin typeface="Aptos"/>
+              </a:rPr>
+              <a:t>RMSE</a:t>
+            </a:r>
+            <a:endParaRPr sz="900" b="1" dirty="0">
+              <a:solidFill>
+                <a:srgbClr val="626F7B"/>
+              </a:solidFill>
+              <a:latin typeface="Aptos"/>
+            </a:endParaRPr>
+          </a:p>
+        </p:txBody>
+      </p:sp>
+      <p:sp>
+        <p:nvSpPr>
+          <p:cNvPr id="17" name="TextBox 16"/>
+          <p:cNvSpPr txBox="1"/>
+          <p:nvPr/>
+        </p:nvSpPr>
+        <p:spPr>
+          <a:xfrm>
+            <a:off x="8130830" y="1579415"/>
+            <a:ext cx="1022299" cy="353943"/>
+          </a:xfrm>
+          <a:prstGeom prst="rect">
+            <a:avLst/>
+          </a:prstGeom>
+          <a:noFill/>
+        </p:spPr>
+        <p:txBody>
+          <a:bodyPr wrap="square" anchor="t">
+            <a:spAutoFit/>
+          </a:bodyPr>
+          <a:lstStyle/>
+          <a:p>
+            <a:pPr algn="r"/>
+            <a:r>
+              <a:rPr sz="1700" b="1" dirty="0">
+                <a:solidFill>
+                  <a:srgbClr val="B44141"/>
+                </a:solidFill>
+                <a:latin typeface="Aptos"/>
+              </a:rPr>
+              <a:t>4,27 G$</a:t>
+            </a:r>
+          </a:p>
+        </p:txBody>
+      </p:sp>
+      <p:sp>
+        <p:nvSpPr>
+          <p:cNvPr id="18" name="Rounded Rectangle 17"/>
+          <p:cNvSpPr/>
+          <p:nvPr/>
+        </p:nvSpPr>
+        <p:spPr>
+          <a:xfrm>
+            <a:off x="9509760" y="1417320"/>
+            <a:ext cx="1965960" cy="658368"/>
+          </a:xfrm>
+          <a:prstGeom prst="roundRect">
+            <a:avLst/>
+          </a:prstGeom>
+          <a:solidFill>
+            <a:srgbClr val="EBF4F8"/>
+          </a:solidFill>
+          <a:ln>
+            <a:solidFill>
+              <a:srgbClr val="B44141"/>
+            </a:solidFill>
+          </a:ln>
+        </p:spPr>
+        <p:style>
+          <a:lnRef idx="1">
+            <a:schemeClr val="accent1"/>
+          </a:lnRef>
+          <a:fillRef idx="3">
+            <a:schemeClr val="accent1"/>
+          </a:fillRef>
+          <a:effectRef idx="2">
+            <a:schemeClr val="accent1"/>
+          </a:effectRef>
+          <a:fontRef idx="minor">
+            <a:schemeClr val="lt1"/>
+          </a:fontRef>
+        </p:style>
+        <p:txBody>
+          <a:bodyPr rtlCol="0" anchor="ctr"/>
+          <a:lstStyle/>
+          <a:p>
+            <a:pPr algn="ctr"/>
+            <a:endParaRPr/>
+          </a:p>
+        </p:txBody>
+      </p:sp>
+      <p:sp>
+        <p:nvSpPr>
+          <p:cNvPr id="19" name="TextBox 18"/>
+          <p:cNvSpPr txBox="1"/>
+          <p:nvPr/>
+        </p:nvSpPr>
+        <p:spPr>
+          <a:xfrm>
+            <a:off x="9619488" y="1508760"/>
+            <a:ext cx="1022299" cy="523220"/>
+          </a:xfrm>
+          <a:prstGeom prst="rect">
+            <a:avLst/>
+          </a:prstGeom>
+          <a:noFill/>
+        </p:spPr>
+        <p:txBody>
+          <a:bodyPr wrap="square" anchor="t">
+            <a:spAutoFit/>
+          </a:bodyPr>
+          <a:lstStyle/>
+          <a:p>
+            <a:pPr algn="l"/>
+            <a:r>
+              <a:rPr sz="1400" b="1" dirty="0">
+                <a:solidFill>
+                  <a:srgbClr val="626F7B"/>
+                </a:solidFill>
+                <a:latin typeface="Aptos"/>
+              </a:rPr>
+              <a:t>RMSE</a:t>
+            </a:r>
+            <a:r>
+              <a:rPr sz="900" b="1" dirty="0">
+                <a:solidFill>
+                  <a:srgbClr val="626F7B"/>
+                </a:solidFill>
+                <a:latin typeface="Aptos"/>
+              </a:rPr>
+              <a:t> </a:t>
+            </a:r>
+            <a:r>
+              <a:rPr sz="1400" b="1" dirty="0" err="1">
+                <a:solidFill>
+                  <a:srgbClr val="626F7B"/>
+                </a:solidFill>
+                <a:latin typeface="Aptos"/>
+              </a:rPr>
+              <a:t>pertes</a:t>
+            </a:r>
+            <a:r>
+              <a:rPr sz="900" b="1" dirty="0">
+                <a:solidFill>
+                  <a:srgbClr val="626F7B"/>
+                </a:solidFill>
+                <a:latin typeface="Aptos"/>
+              </a:rPr>
+              <a:t> +</a:t>
+            </a:r>
+          </a:p>
+        </p:txBody>
+      </p:sp>
+      <p:sp>
+        <p:nvSpPr>
+          <p:cNvPr id="20" name="TextBox 19"/>
+          <p:cNvSpPr txBox="1"/>
+          <p:nvPr/>
+        </p:nvSpPr>
+        <p:spPr>
+          <a:xfrm>
+            <a:off x="10404240" y="1569128"/>
+            <a:ext cx="1053389" cy="353943"/>
+          </a:xfrm>
+          <a:prstGeom prst="rect">
+            <a:avLst/>
+          </a:prstGeom>
+          <a:noFill/>
+        </p:spPr>
+        <p:txBody>
+          <a:bodyPr wrap="square" anchor="t">
+            <a:spAutoFit/>
+          </a:bodyPr>
+          <a:lstStyle/>
+          <a:p>
+            <a:r>
+              <a:rPr sz="1700" b="1" dirty="0">
+                <a:solidFill>
+                  <a:srgbClr val="B44141"/>
+                </a:solidFill>
+                <a:latin typeface="Aptos"/>
+              </a:rPr>
+              <a:t>11,03 G$</a:t>
+            </a:r>
+          </a:p>
+        </p:txBody>
+      </p:sp>
+      <p:sp>
+        <p:nvSpPr>
+          <p:cNvPr id="21" name="Rounded Rectangle 20"/>
+          <p:cNvSpPr/>
+          <p:nvPr/>
+        </p:nvSpPr>
+        <p:spPr>
+          <a:xfrm>
+            <a:off x="640080" y="2423160"/>
+            <a:ext cx="3383280" cy="2057400"/>
+          </a:xfrm>
+          <a:prstGeom prst="roundRect">
+            <a:avLst/>
+          </a:prstGeom>
+          <a:solidFill>
+            <a:srgbClr val="F5F7F9"/>
+          </a:solidFill>
+          <a:ln>
+            <a:solidFill>
+              <a:srgbClr val="DCE2E7"/>
+            </a:solidFill>
+          </a:ln>
+        </p:spPr>
+        <p:style>
+          <a:lnRef idx="1">
+            <a:schemeClr val="accent1"/>
+          </a:lnRef>
+          <a:fillRef idx="3">
+            <a:schemeClr val="accent1"/>
+          </a:fillRef>
+          <a:effectRef idx="2">
+            <a:schemeClr val="accent1"/>
+          </a:effectRef>
+          <a:fontRef idx="minor">
+            <a:schemeClr val="lt1"/>
+          </a:fontRef>
+        </p:style>
+        <p:txBody>
+          <a:bodyPr rtlCol="0" anchor="ctr"/>
+          <a:lstStyle/>
+          <a:p>
+            <a:pPr algn="ctr"/>
+            <a:endParaRPr/>
+          </a:p>
+        </p:txBody>
+      </p:sp>
+      <p:sp>
+        <p:nvSpPr>
+          <p:cNvPr id="22" name="TextBox 21"/>
+          <p:cNvSpPr txBox="1"/>
+          <p:nvPr/>
+        </p:nvSpPr>
+        <p:spPr>
+          <a:xfrm>
+            <a:off x="804671" y="2569464"/>
+            <a:ext cx="3054096" cy="320040"/>
+          </a:xfrm>
+          <a:prstGeom prst="rect">
+            <a:avLst/>
+          </a:prstGeom>
+          <a:noFill/>
+        </p:spPr>
+        <p:txBody>
+          <a:bodyPr wrap="square" anchor="t">
+            <a:spAutoFit/>
+          </a:bodyPr>
+          <a:lstStyle/>
+          <a:p>
+            <a:pPr algn="l"/>
+            <a:r>
+              <a:rPr sz="1500" b="1">
+                <a:solidFill>
+                  <a:srgbClr val="215E91"/>
+                </a:solidFill>
+                <a:latin typeface="Aptos"/>
+              </a:rPr>
+              <a:t>Algorithmes comparés</a:t>
+            </a:r>
+          </a:p>
+        </p:txBody>
+      </p:sp>
+      <p:sp>
+        <p:nvSpPr>
+          <p:cNvPr id="23" name="TextBox 22"/>
+          <p:cNvSpPr txBox="1"/>
+          <p:nvPr/>
+        </p:nvSpPr>
+        <p:spPr>
+          <a:xfrm>
+            <a:off x="804671" y="2953512"/>
+            <a:ext cx="3054096" cy="1399032"/>
+          </a:xfrm>
+          <a:prstGeom prst="rect">
+            <a:avLst/>
+          </a:prstGeom>
+          <a:noFill/>
+        </p:spPr>
+        <p:txBody>
+          <a:bodyPr wrap="square" anchor="t">
+            <a:spAutoFit/>
+          </a:bodyPr>
+          <a:lstStyle/>
+          <a:p>
+            <a:pPr algn="l"/>
+            <a:r>
+              <a:rPr sz="1100" b="0">
+                <a:solidFill>
+                  <a:srgbClr val="232B32"/>
+                </a:solidFill>
+                <a:latin typeface="Aptos"/>
+              </a:rPr>
+              <a:t>Linear Regression
+Random Forest
+Gradient Boosting</a:t>
+            </a:r>
+          </a:p>
+        </p:txBody>
+      </p:sp>
+      <p:sp>
+        <p:nvSpPr>
+          <p:cNvPr id="24" name="Rounded Rectangle 23"/>
+          <p:cNvSpPr/>
+          <p:nvPr/>
+        </p:nvSpPr>
+        <p:spPr>
+          <a:xfrm>
+            <a:off x="4251960" y="2423160"/>
+            <a:ext cx="3383280" cy="2057400"/>
+          </a:xfrm>
+          <a:prstGeom prst="roundRect">
+            <a:avLst/>
+          </a:prstGeom>
+          <a:solidFill>
+            <a:srgbClr val="F5F7F9"/>
+          </a:solidFill>
+          <a:ln>
+            <a:solidFill>
+              <a:srgbClr val="DCE2E7"/>
+            </a:solidFill>
+          </a:ln>
+        </p:spPr>
+        <p:style>
+          <a:lnRef idx="1">
+            <a:schemeClr val="accent1"/>
+          </a:lnRef>
+          <a:fillRef idx="3">
+            <a:schemeClr val="accent1"/>
+          </a:fillRef>
+          <a:effectRef idx="2">
+            <a:schemeClr val="accent1"/>
+          </a:effectRef>
+          <a:fontRef idx="minor">
+            <a:schemeClr val="lt1"/>
+          </a:fontRef>
+        </p:style>
+        <p:txBody>
+          <a:bodyPr rtlCol="0" anchor="ctr"/>
+          <a:lstStyle/>
+          <a:p>
+            <a:pPr algn="ctr"/>
+            <a:endParaRPr/>
+          </a:p>
+        </p:txBody>
+      </p:sp>
+      <p:sp>
+        <p:nvSpPr>
+          <p:cNvPr id="25" name="TextBox 24"/>
+          <p:cNvSpPr txBox="1"/>
+          <p:nvPr/>
+        </p:nvSpPr>
+        <p:spPr>
+          <a:xfrm>
+            <a:off x="4416552" y="2569464"/>
+            <a:ext cx="3054096" cy="320040"/>
+          </a:xfrm>
+          <a:prstGeom prst="rect">
+            <a:avLst/>
+          </a:prstGeom>
+          <a:noFill/>
+        </p:spPr>
+        <p:txBody>
+          <a:bodyPr wrap="square" anchor="t">
+            <a:spAutoFit/>
+          </a:bodyPr>
+          <a:lstStyle/>
+          <a:p>
+            <a:pPr algn="l"/>
+            <a:r>
+              <a:rPr sz="1500" b="1">
+                <a:solidFill>
+                  <a:srgbClr val="2E7D5A"/>
+                </a:solidFill>
+                <a:latin typeface="Aptos"/>
+              </a:rPr>
+              <a:t>Pourquoi Gradient Boosting ?</a:t>
+            </a:r>
+          </a:p>
+        </p:txBody>
+      </p:sp>
+      <p:sp>
+        <p:nvSpPr>
+          <p:cNvPr id="26" name="TextBox 25"/>
+          <p:cNvSpPr txBox="1"/>
+          <p:nvPr/>
+        </p:nvSpPr>
+        <p:spPr>
+          <a:xfrm>
+            <a:off x="4416552" y="2953512"/>
+            <a:ext cx="3054096" cy="1399032"/>
+          </a:xfrm>
+          <a:prstGeom prst="rect">
+            <a:avLst/>
+          </a:prstGeom>
+          <a:noFill/>
+        </p:spPr>
+        <p:txBody>
+          <a:bodyPr wrap="square" anchor="t">
+            <a:spAutoFit/>
+          </a:bodyPr>
+          <a:lstStyle/>
+          <a:p>
+            <a:pPr algn="l"/>
+            <a:r>
+              <a:rPr sz="1100" b="0">
+                <a:solidFill>
+                  <a:srgbClr val="232B32"/>
+                </a:solidFill>
+                <a:latin typeface="Aptos"/>
+              </a:rPr>
+              <a:t>Meilleures erreurs sur le jeu de test et sur les 22 événements du test avec pertes positives; meilleur R² moyen CV (0,6675).</a:t>
+            </a:r>
+          </a:p>
+        </p:txBody>
+      </p:sp>
+      <p:sp>
+        <p:nvSpPr>
+          <p:cNvPr id="27" name="Rounded Rectangle 26"/>
+          <p:cNvSpPr/>
+          <p:nvPr/>
+        </p:nvSpPr>
+        <p:spPr>
+          <a:xfrm>
+            <a:off x="7863840" y="2423160"/>
+            <a:ext cx="3383280" cy="2057400"/>
+          </a:xfrm>
+          <a:prstGeom prst="roundRect">
+            <a:avLst/>
+          </a:prstGeom>
+          <a:solidFill>
+            <a:srgbClr val="F5F7F9"/>
+          </a:solidFill>
+          <a:ln>
+            <a:solidFill>
+              <a:srgbClr val="DCE2E7"/>
+            </a:solidFill>
+          </a:ln>
+        </p:spPr>
+        <p:style>
+          <a:lnRef idx="1">
+            <a:schemeClr val="accent1"/>
+          </a:lnRef>
+          <a:fillRef idx="3">
+            <a:schemeClr val="accent1"/>
+          </a:fillRef>
+          <a:effectRef idx="2">
+            <a:schemeClr val="accent1"/>
+          </a:effectRef>
+          <a:fontRef idx="minor">
+            <a:schemeClr val="lt1"/>
+          </a:fontRef>
+        </p:style>
+        <p:txBody>
+          <a:bodyPr rtlCol="0" anchor="ctr"/>
+          <a:lstStyle/>
+          <a:p>
+            <a:pPr algn="ctr"/>
+            <a:endParaRPr/>
+          </a:p>
+        </p:txBody>
+      </p:sp>
+      <p:sp>
+        <p:nvSpPr>
+          <p:cNvPr id="28" name="TextBox 27"/>
+          <p:cNvSpPr txBox="1"/>
+          <p:nvPr/>
+        </p:nvSpPr>
+        <p:spPr>
+          <a:xfrm>
+            <a:off x="8028431" y="2569464"/>
+            <a:ext cx="3054096" cy="320040"/>
+          </a:xfrm>
+          <a:prstGeom prst="rect">
+            <a:avLst/>
+          </a:prstGeom>
+          <a:noFill/>
+        </p:spPr>
+        <p:txBody>
+          <a:bodyPr wrap="square" anchor="t">
+            <a:spAutoFit/>
+          </a:bodyPr>
+          <a:lstStyle/>
+          <a:p>
+            <a:pPr algn="l"/>
+            <a:r>
+              <a:rPr sz="1500" b="1">
+                <a:solidFill>
+                  <a:srgbClr val="DA8437"/>
+                </a:solidFill>
+                <a:latin typeface="Aptos"/>
+              </a:rPr>
+              <a:t>Nuance importante</a:t>
+            </a:r>
+          </a:p>
+        </p:txBody>
+      </p:sp>
+      <p:sp>
+        <p:nvSpPr>
+          <p:cNvPr id="29" name="TextBox 28"/>
+          <p:cNvSpPr txBox="1"/>
+          <p:nvPr/>
+        </p:nvSpPr>
+        <p:spPr>
+          <a:xfrm>
+            <a:off x="8028431" y="2953512"/>
+            <a:ext cx="3054096" cy="1399032"/>
+          </a:xfrm>
+          <a:prstGeom prst="rect">
+            <a:avLst/>
+          </a:prstGeom>
+          <a:noFill/>
+        </p:spPr>
+        <p:txBody>
+          <a:bodyPr wrap="square" anchor="t">
+            <a:spAutoFit/>
+          </a:bodyPr>
+          <a:lstStyle/>
+          <a:p>
+            <a:pPr algn="l"/>
+            <a:r>
+              <a:rPr sz="1100" b="0">
+                <a:solidFill>
+                  <a:srgbClr val="232B32"/>
+                </a:solidFill>
+                <a:latin typeface="Aptos"/>
+              </a:rPr>
+              <a:t>Random Forest a de meilleures erreurs moyennes en dollars en validation croisée. Le choix dépend donc de la métrique considérée.</a:t>
+            </a:r>
+          </a:p>
+        </p:txBody>
+      </p:sp>
+      <p:sp>
+        <p:nvSpPr>
+          <p:cNvPr id="30" name="TextBox 29"/>
+          <p:cNvSpPr txBox="1"/>
+          <p:nvPr/>
+        </p:nvSpPr>
+        <p:spPr>
+          <a:xfrm>
+            <a:off x="685800" y="4892040"/>
+            <a:ext cx="1508760" cy="274320"/>
+          </a:xfrm>
+          <a:prstGeom prst="rect">
+            <a:avLst/>
+          </a:prstGeom>
+          <a:noFill/>
+        </p:spPr>
+        <p:txBody>
+          <a:bodyPr wrap="square" anchor="t">
+            <a:spAutoFit/>
+          </a:bodyPr>
+          <a:lstStyle/>
+          <a:p>
+            <a:pPr algn="l"/>
+            <a:r>
+              <a:rPr sz="1500" b="1">
+                <a:solidFill>
+                  <a:srgbClr val="0F2238"/>
+                </a:solidFill>
+                <a:latin typeface="Aptos"/>
+              </a:rPr>
+              <a:t>Risque principal</a:t>
+            </a:r>
+          </a:p>
+        </p:txBody>
+      </p:sp>
+      <p:sp>
+        <p:nvSpPr>
+          <p:cNvPr id="31" name="TextBox 30"/>
+          <p:cNvSpPr txBox="1"/>
+          <p:nvPr/>
+        </p:nvSpPr>
+        <p:spPr>
+          <a:xfrm>
+            <a:off x="2240280" y="4892040"/>
+            <a:ext cx="8595360" cy="411480"/>
+          </a:xfrm>
+          <a:prstGeom prst="rect">
+            <a:avLst/>
+          </a:prstGeom>
+          <a:noFill/>
+        </p:spPr>
+        <p:txBody>
+          <a:bodyPr wrap="square" anchor="t">
+            <a:spAutoFit/>
+          </a:bodyPr>
+          <a:lstStyle/>
+          <a:p>
+            <a:pPr algn="l"/>
+            <a:r>
+              <a:rPr sz="1400" b="0">
+                <a:solidFill>
+                  <a:srgbClr val="232B32"/>
+                </a:solidFill>
+                <a:latin typeface="Aptos"/>
+              </a:rPr>
+              <a:t>Sous-estimer une perte extrême. On surveille donc particulièrement le RMSE, qui pénalise les grosses erreurs.</a:t>
+            </a:r>
+          </a:p>
+        </p:txBody>
+      </p:sp>
+      <p:sp>
+        <p:nvSpPr>
+          <p:cNvPr id="32" name="TextBox 31"/>
+          <p:cNvSpPr txBox="1"/>
+          <p:nvPr/>
+        </p:nvSpPr>
+        <p:spPr>
+          <a:xfrm>
+            <a:off x="594360" y="6528816"/>
+            <a:ext cx="10972800" cy="164592"/>
+          </a:xfrm>
+          <a:prstGeom prst="rect">
+            <a:avLst/>
+          </a:prstGeom>
+          <a:noFill/>
+        </p:spPr>
+        <p:txBody>
+          <a:bodyPr wrap="square" anchor="t">
+            <a:spAutoFit/>
+          </a:bodyPr>
+          <a:lstStyle/>
+          <a:p>
+            <a:pPr algn="l"/>
+            <a:r>
+              <a:rPr sz="800" b="0">
+                <a:solidFill>
+                  <a:srgbClr val="626F7B"/>
+                </a:solidFill>
+                <a:latin typeface="Aptos"/>
+              </a:rPr>
+              <a:t>Source : 07_Model_Economic_Loss — comparaison et conclusion finale.</a:t>
+            </a:r>
+          </a:p>
+        </p:txBody>
+      </p:sp>
+    </p:spTree>
+  </p:cSld>
+  <p:clrMapOvr>
+    <a:masterClrMapping/>
+  </p:clrMapOvr>
+</p:sld>
+</file>
+
 <file path=ppt/theme/theme1.xml><?xml version="1.0" encoding="utf-8"?>
 <a:theme xmlns:a="http://schemas.openxmlformats.org/drawingml/2006/main" name="Office Theme">
   <a:themeElements>

--- a/Presentation_TP_USGS_Earthquake_AI_FINAL.pptx
+++ b/Presentation_TP_USGS_Earthquake_AI_FINAL.pptx
@@ -3970,7 +3970,34 @@
                 </a:solidFill>
                 <a:latin typeface="Aptos"/>
               </a:rPr>
-              <a:t>Données USGS 2025  •  Classification  •  </a:t>
+              <a:t>Données USGS 2025 </a:t>
+            </a:r>
+            <a:r>
+              <a:rPr lang="fr-CA" sz="1400" b="1" dirty="0">
+                <a:solidFill>
+                  <a:srgbClr val="FFFFFF"/>
+                </a:solidFill>
+                <a:latin typeface="Aptos"/>
+              </a:rPr>
+              <a:t> 29062 </a:t>
+            </a:r>
+            <a:r>
+              <a:rPr lang="fr-CA" sz="1400" b="1" dirty="0" err="1">
+                <a:solidFill>
+                  <a:srgbClr val="FFFFFF"/>
+                </a:solidFill>
+                <a:latin typeface="Aptos"/>
+              </a:rPr>
+              <a:t>évenments</a:t>
+            </a:r>
+            <a:r>
+              <a:rPr sz="1400" b="1" dirty="0">
+                <a:solidFill>
+                  <a:srgbClr val="FFFFFF"/>
+                </a:solidFill>
+                <a:latin typeface="Aptos"/>
+              </a:rPr>
+              <a:t> •  Classification  •  </a:t>
             </a:r>
             <a:r>
               <a:rPr sz="1400" b="1" dirty="0" err="1">

--- a/Presentation_TP_USGS_Earthquake_AI_FINAL.pptx
+++ b/Presentation_TP_USGS_Earthquake_AI_FINAL.pptx
@@ -3979,16 +3979,7 @@
                 </a:solidFill>
                 <a:latin typeface="Aptos"/>
               </a:rPr>
-              <a:t> 29062 </a:t>
-            </a:r>
-            <a:r>
-              <a:rPr lang="fr-CA" sz="1400" b="1" dirty="0" err="1">
-                <a:solidFill>
-                  <a:srgbClr val="FFFFFF"/>
-                </a:solidFill>
-                <a:latin typeface="Aptos"/>
-              </a:rPr>
-              <a:t>évenments</a:t>
+              <a:t>- 29062 événements</a:t>
             </a:r>
             <a:r>
               <a:rPr sz="1400" b="1" dirty="0">

--- a/Presentation_TP_USGS_Earthquake_AI_FINAL.pptx
+++ b/Presentation_TP_USGS_Earthquake_AI_FINAL.pptx
@@ -5898,7 +5898,7 @@
         <p:spPr>
           <a:xfrm>
             <a:off x="594360" y="384048"/>
-            <a:ext cx="10698480" cy="502920"/>
+            <a:ext cx="10698480" cy="523220"/>
           </a:xfrm>
           <a:prstGeom prst="rect">
             <a:avLst/>
@@ -5913,14 +5913,38 @@
           <a:p>
             <a:pPr algn="l"/>
             <a:r>
-              <a:rPr sz="2800" b="1">
+              <a:rPr sz="2800" b="1" dirty="0" err="1">
                 <a:solidFill>
                   <a:srgbClr val="0F2238"/>
                 </a:solidFill>
                 <a:latin typeface="Aptos"/>
               </a:rPr>
-              <a:t>Synthèse — champions et métriques à défendre à l’oral</a:t>
-            </a:r>
+              <a:t>Synthèse</a:t>
+            </a:r>
+            <a:r>
+              <a:rPr sz="2800" b="1" dirty="0">
+                <a:solidFill>
+                  <a:srgbClr val="0F2238"/>
+                </a:solidFill>
+                <a:latin typeface="Aptos"/>
+              </a:rPr>
+              <a:t> — champions et </a:t>
+            </a:r>
+            <a:r>
+              <a:rPr sz="2800" b="1" dirty="0" err="1">
+                <a:solidFill>
+                  <a:srgbClr val="0F2238"/>
+                </a:solidFill>
+                <a:latin typeface="Aptos"/>
+              </a:rPr>
+              <a:t>métriques</a:t>
+            </a:r>
+            <a:endParaRPr sz="2800" b="1" dirty="0">
+              <a:solidFill>
+                <a:srgbClr val="0F2238"/>
+              </a:solidFill>
+              <a:latin typeface="Aptos"/>
+            </a:endParaRPr>
           </a:p>
         </p:txBody>
       </p:sp>
@@ -14188,8 +14212,8 @@
         </p:nvSpPr>
         <p:spPr>
           <a:xfrm>
-            <a:off x="594360" y="1030986"/>
-            <a:ext cx="10881360" cy="461665"/>
+            <a:off x="594360" y="1209118"/>
+            <a:ext cx="10881360" cy="1569660"/>
           </a:xfrm>
           <a:prstGeom prst="rect">
             <a:avLst/>
@@ -14205,16 +14229,245 @@
             <a:pPr algn="l"/>
             <a:r>
               <a:rPr lang="fr-CA" sz="1200" b="0" dirty="0">
+                <a:latin typeface="Aptos"/>
+              </a:rPr>
+              <a:t>Utiliser les données sismiques de l’USGS (2025) pour développer, évaluer et comparer des modèles supervisés de classification et de régression. </a:t>
+            </a:r>
+          </a:p>
+          <a:p>
+            <a:pPr algn="l"/>
+            <a:r>
+              <a:rPr lang="fr-CA" sz="1200" b="0" dirty="0">
+                <a:latin typeface="Aptos"/>
+              </a:rPr>
+              <a:t>Valider leurs performances par validation croisée, suivre les expérimentations avec MLflow et sélectionner le modèle champion selon les métriques d’évaluation.</a:t>
+            </a:r>
+          </a:p>
+          <a:p>
+            <a:pPr algn="l"/>
+            <a:endParaRPr lang="fr-CA" sz="1200" b="0" dirty="0">
+              <a:latin typeface="Aptos"/>
+            </a:endParaRPr>
+          </a:p>
+          <a:p>
+            <a:pPr algn="l"/>
+            <a:r>
+              <a:rPr lang="fr-CA" sz="1200" b="0" dirty="0">
+                <a:latin typeface="Aptos"/>
+              </a:rPr>
+              <a:t>L’objectif est de transformer les données sismiques en informations utiles pour l’évaluation des risques et l’aide à la décision.</a:t>
+            </a:r>
+          </a:p>
+          <a:p>
+            <a:pPr algn="l"/>
+            <a:endParaRPr lang="fr-CA" sz="1200" b="0" dirty="0">
+              <a:latin typeface="Aptos"/>
+            </a:endParaRPr>
+          </a:p>
+          <a:p>
+            <a:pPr algn="l"/>
+            <a:r>
+              <a:rPr lang="fr-CA" sz="1200" b="0" dirty="0">
+                <a:latin typeface="Aptos"/>
+              </a:rPr>
+              <a:t>Cette solution vise à soutenir les compagnies d’assurance, le secteur de la construction, les municipalités et les services d’urgence dans l’évaluation des risques sismiques,</a:t>
+            </a:r>
+          </a:p>
+          <a:p>
+            <a:pPr algn="l"/>
+            <a:r>
+              <a:rPr lang="fr-CA" sz="1200" b="0" dirty="0">
+                <a:latin typeface="Aptos"/>
+              </a:rPr>
+              <a:t> l’anticipation des dommages et l’estimation des pertes économiques.</a:t>
+            </a:r>
+          </a:p>
+        </p:txBody>
+      </p:sp>
+      <p:sp>
+        <p:nvSpPr>
+          <p:cNvPr id="5" name="TextBox 4"/>
+          <p:cNvSpPr txBox="1"/>
+          <p:nvPr/>
+        </p:nvSpPr>
+        <p:spPr>
+          <a:xfrm>
+            <a:off x="11109960" y="393192"/>
+            <a:ext cx="457200" cy="320040"/>
+          </a:xfrm>
+          <a:prstGeom prst="rect">
+            <a:avLst/>
+          </a:prstGeom>
+          <a:noFill/>
+        </p:spPr>
+        <p:txBody>
+          <a:bodyPr wrap="square" anchor="t">
+            <a:spAutoFit/>
+          </a:bodyPr>
+          <a:lstStyle/>
+          <a:p>
+            <a:pPr algn="r"/>
+            <a:r>
+              <a:rPr sz="1100" b="1">
                 <a:solidFill>
                   <a:srgbClr val="626F7B"/>
                 </a:solidFill>
                 <a:latin typeface="Aptos"/>
               </a:rPr>
-              <a:t>Développer, évaluer et comparer des modèles supervisés de classification et de régression linéaire, utiliser la validation croisée pour valider leurs performances, suivre les expérimentations avec MLflow et sélectionner le modèle champion selon les métriques d'évaluation.</a:t>
-            </a:r>
-            <a:endParaRPr sz="1200" b="0" dirty="0">
+              <a:t>02</a:t>
+            </a:r>
+          </a:p>
+        </p:txBody>
+      </p:sp>
+      <p:sp>
+        <p:nvSpPr>
+          <p:cNvPr id="6" name="TextBox 5"/>
+          <p:cNvSpPr txBox="1"/>
+          <p:nvPr/>
+        </p:nvSpPr>
+        <p:spPr>
+          <a:xfrm>
+            <a:off x="658368" y="3532183"/>
+            <a:ext cx="411480" cy="256032"/>
+          </a:xfrm>
+          <a:prstGeom prst="rect">
+            <a:avLst/>
+          </a:prstGeom>
+          <a:noFill/>
+        </p:spPr>
+        <p:txBody>
+          <a:bodyPr wrap="square" anchor="t">
+            <a:spAutoFit/>
+          </a:bodyPr>
+          <a:lstStyle/>
+          <a:p>
+            <a:pPr algn="l"/>
+            <a:r>
+              <a:rPr sz="1200" b="1" dirty="0">
+                <a:solidFill>
+                  <a:srgbClr val="36A2BF"/>
+                </a:solidFill>
+                <a:latin typeface="Aptos"/>
+              </a:rPr>
+              <a:t>02</a:t>
+            </a:r>
+          </a:p>
+        </p:txBody>
+      </p:sp>
+      <p:sp>
+        <p:nvSpPr>
+          <p:cNvPr id="7" name="TextBox 6"/>
+          <p:cNvSpPr txBox="1"/>
+          <p:nvPr/>
+        </p:nvSpPr>
+        <p:spPr>
+          <a:xfrm>
+            <a:off x="1170432" y="3532183"/>
+            <a:ext cx="2148840" cy="256032"/>
+          </a:xfrm>
+          <a:prstGeom prst="rect">
+            <a:avLst/>
+          </a:prstGeom>
+          <a:noFill/>
+        </p:spPr>
+        <p:txBody>
+          <a:bodyPr wrap="square" anchor="t">
+            <a:spAutoFit/>
+          </a:bodyPr>
+          <a:lstStyle/>
+          <a:p>
+            <a:pPr algn="l"/>
+            <a:r>
+              <a:rPr sz="1300" b="1">
+                <a:solidFill>
+                  <a:srgbClr val="0F2238"/>
+                </a:solidFill>
+                <a:latin typeface="Aptos"/>
+              </a:rPr>
+              <a:t>Zone de risque</a:t>
+            </a:r>
+          </a:p>
+        </p:txBody>
+      </p:sp>
+      <p:sp>
+        <p:nvSpPr>
+          <p:cNvPr id="8" name="TextBox 7"/>
+          <p:cNvSpPr txBox="1"/>
+          <p:nvPr/>
+        </p:nvSpPr>
+        <p:spPr>
+          <a:xfrm>
+            <a:off x="3429000" y="3532183"/>
+            <a:ext cx="1234440" cy="256032"/>
+          </a:xfrm>
+          <a:prstGeom prst="rect">
+            <a:avLst/>
+          </a:prstGeom>
+          <a:noFill/>
+        </p:spPr>
+        <p:txBody>
+          <a:bodyPr wrap="square" anchor="t">
+            <a:spAutoFit/>
+          </a:bodyPr>
+          <a:lstStyle/>
+          <a:p>
+            <a:pPr algn="l"/>
+            <a:r>
+              <a:rPr sz="1100" b="1" dirty="0">
+                <a:solidFill>
+                  <a:srgbClr val="626F7B"/>
+                </a:solidFill>
+                <a:latin typeface="Aptos"/>
+              </a:rPr>
+              <a:t>Classification</a:t>
+            </a:r>
+          </a:p>
+        </p:txBody>
+      </p:sp>
+      <p:sp>
+        <p:nvSpPr>
+          <p:cNvPr id="9" name="TextBox 8"/>
+          <p:cNvSpPr txBox="1"/>
+          <p:nvPr/>
+        </p:nvSpPr>
+        <p:spPr>
+          <a:xfrm>
+            <a:off x="4800600" y="3532183"/>
+            <a:ext cx="6217920" cy="261610"/>
+          </a:xfrm>
+          <a:prstGeom prst="rect">
+            <a:avLst/>
+          </a:prstGeom>
+          <a:noFill/>
+        </p:spPr>
+        <p:txBody>
+          <a:bodyPr wrap="square" anchor="t">
+            <a:spAutoFit/>
+          </a:bodyPr>
+          <a:lstStyle/>
+          <a:p>
+            <a:pPr algn="l"/>
+            <a:r>
+              <a:rPr sz="1100" b="0" dirty="0">
+                <a:solidFill>
+                  <a:srgbClr val="232B32"/>
+                </a:solidFill>
+                <a:latin typeface="Aptos"/>
+              </a:rPr>
+              <a:t>KNN • Decision Tree • Random Forest</a:t>
+            </a:r>
+            <a:r>
+              <a:rPr lang="fr-CA" sz="1100" b="0" dirty="0">
+                <a:solidFill>
+                  <a:srgbClr val="232B32"/>
+                </a:solidFill>
+                <a:latin typeface="Aptos"/>
+              </a:rPr>
+              <a:t>                                     Classifier le niveau de risque sismique</a:t>
+            </a:r>
+            <a:endParaRPr sz="1100" b="0" dirty="0">
               <a:solidFill>
-                <a:srgbClr val="626F7B"/>
+                <a:srgbClr val="232B32"/>
               </a:solidFill>
               <a:latin typeface="Aptos"/>
             </a:endParaRPr>
@@ -14223,27 +14476,97 @@
       </p:sp>
       <p:sp>
         <p:nvSpPr>
-          <p:cNvPr id="5" name="TextBox 4"/>
-          <p:cNvSpPr txBox="1"/>
-          <p:nvPr/>
-        </p:nvSpPr>
-        <p:spPr>
-          <a:xfrm>
-            <a:off x="11109960" y="393192"/>
-            <a:ext cx="457200" cy="320040"/>
-          </a:xfrm>
-          <a:prstGeom prst="rect">
-            <a:avLst/>
-          </a:prstGeom>
-          <a:noFill/>
-        </p:spPr>
-        <p:txBody>
-          <a:bodyPr wrap="square" anchor="t">
-            <a:spAutoFit/>
-          </a:bodyPr>
-          <a:lstStyle/>
-          <a:p>
-            <a:pPr algn="r"/>
+          <p:cNvPr id="10" name="TextBox 9"/>
+          <p:cNvSpPr txBox="1"/>
+          <p:nvPr/>
+        </p:nvSpPr>
+        <p:spPr>
+          <a:xfrm>
+            <a:off x="658368" y="3913744"/>
+            <a:ext cx="411480" cy="256032"/>
+          </a:xfrm>
+          <a:prstGeom prst="rect">
+            <a:avLst/>
+          </a:prstGeom>
+          <a:noFill/>
+        </p:spPr>
+        <p:txBody>
+          <a:bodyPr wrap="square" anchor="t">
+            <a:spAutoFit/>
+          </a:bodyPr>
+          <a:lstStyle/>
+          <a:p>
+            <a:pPr algn="l"/>
+            <a:r>
+              <a:rPr sz="1200" b="1" dirty="0">
+                <a:solidFill>
+                  <a:srgbClr val="36A2BF"/>
+                </a:solidFill>
+                <a:latin typeface="Aptos"/>
+              </a:rPr>
+              <a:t>03</a:t>
+            </a:r>
+          </a:p>
+        </p:txBody>
+      </p:sp>
+      <p:sp>
+        <p:nvSpPr>
+          <p:cNvPr id="11" name="TextBox 10"/>
+          <p:cNvSpPr txBox="1"/>
+          <p:nvPr/>
+        </p:nvSpPr>
+        <p:spPr>
+          <a:xfrm>
+            <a:off x="1170432" y="3913744"/>
+            <a:ext cx="2148840" cy="256032"/>
+          </a:xfrm>
+          <a:prstGeom prst="rect">
+            <a:avLst/>
+          </a:prstGeom>
+          <a:noFill/>
+        </p:spPr>
+        <p:txBody>
+          <a:bodyPr wrap="square" anchor="t">
+            <a:spAutoFit/>
+          </a:bodyPr>
+          <a:lstStyle/>
+          <a:p>
+            <a:pPr algn="l"/>
+            <a:r>
+              <a:rPr sz="1300" b="1">
+                <a:solidFill>
+                  <a:srgbClr val="0F2238"/>
+                </a:solidFill>
+                <a:latin typeface="Aptos"/>
+              </a:rPr>
+              <a:t>Sévérité / significance</a:t>
+            </a:r>
+          </a:p>
+        </p:txBody>
+      </p:sp>
+      <p:sp>
+        <p:nvSpPr>
+          <p:cNvPr id="12" name="TextBox 11"/>
+          <p:cNvSpPr txBox="1"/>
+          <p:nvPr/>
+        </p:nvSpPr>
+        <p:spPr>
+          <a:xfrm>
+            <a:off x="3429000" y="3913744"/>
+            <a:ext cx="1234440" cy="256032"/>
+          </a:xfrm>
+          <a:prstGeom prst="rect">
+            <a:avLst/>
+          </a:prstGeom>
+          <a:noFill/>
+        </p:spPr>
+        <p:txBody>
+          <a:bodyPr wrap="square" anchor="t">
+            <a:spAutoFit/>
+          </a:bodyPr>
+          <a:lstStyle/>
+          <a:p>
+            <a:pPr algn="l"/>
             <a:r>
               <a:rPr sz="1100" b="1">
                 <a:solidFill>
@@ -14251,20 +14574,119 @@
                 </a:solidFill>
                 <a:latin typeface="Aptos"/>
               </a:rPr>
-              <a:t>02</a:t>
-            </a:r>
-          </a:p>
-        </p:txBody>
-      </p:sp>
-      <p:sp>
-        <p:nvSpPr>
-          <p:cNvPr id="6" name="TextBox 5"/>
-          <p:cNvSpPr txBox="1"/>
-          <p:nvPr/>
-        </p:nvSpPr>
-        <p:spPr>
-          <a:xfrm>
-            <a:off x="658368" y="1572768"/>
+              <a:t>Régression</a:t>
+            </a:r>
+          </a:p>
+        </p:txBody>
+      </p:sp>
+      <p:sp>
+        <p:nvSpPr>
+          <p:cNvPr id="13" name="TextBox 12"/>
+          <p:cNvSpPr txBox="1"/>
+          <p:nvPr/>
+        </p:nvSpPr>
+        <p:spPr>
+          <a:xfrm>
+            <a:off x="4800600" y="3913744"/>
+            <a:ext cx="6217920" cy="261610"/>
+          </a:xfrm>
+          <a:prstGeom prst="rect">
+            <a:avLst/>
+          </a:prstGeom>
+          <a:noFill/>
+        </p:spPr>
+        <p:txBody>
+          <a:bodyPr wrap="square" anchor="t">
+            <a:spAutoFit/>
+          </a:bodyPr>
+          <a:lstStyle/>
+          <a:p>
+            <a:pPr algn="l"/>
+            <a:r>
+              <a:rPr sz="1100" b="0" dirty="0">
+                <a:solidFill>
+                  <a:srgbClr val="232B32"/>
+                </a:solidFill>
+                <a:latin typeface="Aptos"/>
+              </a:rPr>
+              <a:t>KNN • Decision Tree • Random Forest</a:t>
+            </a:r>
+            <a:r>
+              <a:rPr lang="fr-CA" sz="1100" b="0" dirty="0">
+                <a:solidFill>
+                  <a:srgbClr val="232B32"/>
+                </a:solidFill>
+                <a:latin typeface="Aptos"/>
+              </a:rPr>
+              <a:t>                                   </a:t>
+            </a:r>
+            <a:r>
+              <a:rPr lang="fr-CA" sz="1100" dirty="0">
+                <a:solidFill>
+                  <a:srgbClr val="232B32"/>
+                </a:solidFill>
+                <a:latin typeface="Aptos"/>
+              </a:rPr>
+              <a:t>   P</a:t>
+            </a:r>
+            <a:r>
+              <a:rPr lang="en-CA" sz="1100" dirty="0" err="1">
+                <a:solidFill>
+                  <a:srgbClr val="232B32"/>
+                </a:solidFill>
+                <a:latin typeface="Aptos"/>
+              </a:rPr>
+              <a:t>rédire</a:t>
+            </a:r>
+            <a:r>
+              <a:rPr lang="en-CA" sz="1100" dirty="0">
+                <a:solidFill>
+                  <a:srgbClr val="232B32"/>
+                </a:solidFill>
+                <a:latin typeface="Aptos"/>
+              </a:rPr>
+              <a:t> </a:t>
+            </a:r>
+            <a:r>
+              <a:rPr lang="en-CA" sz="1100" dirty="0" err="1">
+                <a:solidFill>
+                  <a:srgbClr val="232B32"/>
+                </a:solidFill>
+                <a:latin typeface="Aptos"/>
+              </a:rPr>
+              <a:t>l’importance</a:t>
+            </a:r>
+            <a:r>
+              <a:rPr lang="en-CA" sz="1100" dirty="0">
+                <a:solidFill>
+                  <a:srgbClr val="232B32"/>
+                </a:solidFill>
+                <a:latin typeface="Aptos"/>
+              </a:rPr>
+              <a:t> (significance)</a:t>
+            </a:r>
+            <a:r>
+              <a:rPr lang="en-CA" sz="1100" dirty="0"/>
+              <a:t> </a:t>
+            </a:r>
+            <a:endParaRPr sz="1100" b="0" dirty="0">
+              <a:solidFill>
+                <a:srgbClr val="232B32"/>
+              </a:solidFill>
+              <a:latin typeface="Aptos"/>
+            </a:endParaRPr>
+          </a:p>
+        </p:txBody>
+      </p:sp>
+      <p:sp>
+        <p:nvSpPr>
+          <p:cNvPr id="14" name="TextBox 13"/>
+          <p:cNvSpPr txBox="1"/>
+          <p:nvPr/>
+        </p:nvSpPr>
+        <p:spPr>
+          <a:xfrm>
+            <a:off x="658368" y="4378413"/>
             <a:ext cx="411480" cy="256032"/>
           </a:xfrm>
           <a:prstGeom prst="rect">
@@ -14280,26 +14702,545 @@
           <a:p>
             <a:pPr algn="l"/>
             <a:r>
+              <a:rPr sz="1200" b="1" dirty="0">
+                <a:solidFill>
+                  <a:srgbClr val="36A2BF"/>
+                </a:solidFill>
+                <a:latin typeface="Aptos"/>
+              </a:rPr>
+              <a:t>04</a:t>
+            </a:r>
+          </a:p>
+        </p:txBody>
+      </p:sp>
+      <p:sp>
+        <p:nvSpPr>
+          <p:cNvPr id="15" name="TextBox 14"/>
+          <p:cNvSpPr txBox="1"/>
+          <p:nvPr/>
+        </p:nvSpPr>
+        <p:spPr>
+          <a:xfrm>
+            <a:off x="1170432" y="4378413"/>
+            <a:ext cx="2148840" cy="256032"/>
+          </a:xfrm>
+          <a:prstGeom prst="rect">
+            <a:avLst/>
+          </a:prstGeom>
+          <a:noFill/>
+        </p:spPr>
+        <p:txBody>
+          <a:bodyPr wrap="square" anchor="t">
+            <a:spAutoFit/>
+          </a:bodyPr>
+          <a:lstStyle/>
+          <a:p>
+            <a:pPr algn="l"/>
+            <a:r>
+              <a:rPr sz="1300" b="1">
+                <a:solidFill>
+                  <a:srgbClr val="0F2238"/>
+                </a:solidFill>
+                <a:latin typeface="Aptos"/>
+              </a:rPr>
+              <a:t>Facteur de risque</a:t>
+            </a:r>
+          </a:p>
+        </p:txBody>
+      </p:sp>
+      <p:sp>
+        <p:nvSpPr>
+          <p:cNvPr id="16" name="TextBox 15"/>
+          <p:cNvSpPr txBox="1"/>
+          <p:nvPr/>
+        </p:nvSpPr>
+        <p:spPr>
+          <a:xfrm>
+            <a:off x="3429000" y="4378413"/>
+            <a:ext cx="1234440" cy="256032"/>
+          </a:xfrm>
+          <a:prstGeom prst="rect">
+            <a:avLst/>
+          </a:prstGeom>
+          <a:noFill/>
+        </p:spPr>
+        <p:txBody>
+          <a:bodyPr wrap="square" anchor="t">
+            <a:spAutoFit/>
+          </a:bodyPr>
+          <a:lstStyle/>
+          <a:p>
+            <a:pPr algn="l"/>
+            <a:r>
+              <a:rPr sz="1100" b="1">
+                <a:solidFill>
+                  <a:srgbClr val="626F7B"/>
+                </a:solidFill>
+                <a:latin typeface="Aptos"/>
+              </a:rPr>
+              <a:t>Classification</a:t>
+            </a:r>
+          </a:p>
+        </p:txBody>
+      </p:sp>
+      <p:sp>
+        <p:nvSpPr>
+          <p:cNvPr id="17" name="TextBox 16"/>
+          <p:cNvSpPr txBox="1"/>
+          <p:nvPr/>
+        </p:nvSpPr>
+        <p:spPr>
+          <a:xfrm>
+            <a:off x="4800600" y="4378413"/>
+            <a:ext cx="6217920" cy="261610"/>
+          </a:xfrm>
+          <a:prstGeom prst="rect">
+            <a:avLst/>
+          </a:prstGeom>
+          <a:noFill/>
+        </p:spPr>
+        <p:txBody>
+          <a:bodyPr wrap="square" anchor="t">
+            <a:spAutoFit/>
+          </a:bodyPr>
+          <a:lstStyle/>
+          <a:p>
+            <a:pPr algn="l"/>
+            <a:r>
+              <a:rPr sz="1100" b="0" dirty="0" err="1">
+                <a:solidFill>
+                  <a:srgbClr val="232B32"/>
+                </a:solidFill>
+                <a:latin typeface="Aptos"/>
+              </a:rPr>
+              <a:t>LightGBM</a:t>
+            </a:r>
+            <a:r>
+              <a:rPr sz="1100" b="0" dirty="0">
+                <a:solidFill>
+                  <a:srgbClr val="232B32"/>
+                </a:solidFill>
+                <a:latin typeface="Aptos"/>
+              </a:rPr>
+              <a:t> • </a:t>
+            </a:r>
+            <a:r>
+              <a:rPr sz="1100" b="0" dirty="0" err="1">
+                <a:solidFill>
+                  <a:srgbClr val="232B32"/>
+                </a:solidFill>
+                <a:latin typeface="Aptos"/>
+              </a:rPr>
+              <a:t>XGBoost</a:t>
+            </a:r>
+            <a:r>
+              <a:rPr sz="1100" b="0" dirty="0">
+                <a:solidFill>
+                  <a:srgbClr val="232B32"/>
+                </a:solidFill>
+                <a:latin typeface="Aptos"/>
+              </a:rPr>
+              <a:t> • Random Forest</a:t>
+            </a:r>
+            <a:r>
+              <a:rPr lang="fr-CA" sz="1100" b="0" dirty="0">
+                <a:solidFill>
+                  <a:srgbClr val="232B32"/>
+                </a:solidFill>
+                <a:latin typeface="Aptos"/>
+              </a:rPr>
+              <a:t>                                    Identifier les principaux facteurs de risque</a:t>
+            </a:r>
+            <a:endParaRPr sz="1100" b="0" dirty="0">
+              <a:solidFill>
+                <a:srgbClr val="232B32"/>
+              </a:solidFill>
+              <a:latin typeface="Aptos"/>
+            </a:endParaRPr>
+          </a:p>
+        </p:txBody>
+      </p:sp>
+      <p:sp>
+        <p:nvSpPr>
+          <p:cNvPr id="18" name="TextBox 17"/>
+          <p:cNvSpPr txBox="1"/>
+          <p:nvPr/>
+        </p:nvSpPr>
+        <p:spPr>
+          <a:xfrm>
+            <a:off x="658368" y="4795606"/>
+            <a:ext cx="411480" cy="256032"/>
+          </a:xfrm>
+          <a:prstGeom prst="rect">
+            <a:avLst/>
+          </a:prstGeom>
+          <a:noFill/>
+        </p:spPr>
+        <p:txBody>
+          <a:bodyPr wrap="square" anchor="t">
+            <a:spAutoFit/>
+          </a:bodyPr>
+          <a:lstStyle/>
+          <a:p>
+            <a:pPr algn="l"/>
+            <a:r>
+              <a:rPr sz="1200" b="1" dirty="0">
+                <a:solidFill>
+                  <a:srgbClr val="36A2BF"/>
+                </a:solidFill>
+                <a:latin typeface="Aptos"/>
+              </a:rPr>
+              <a:t>05</a:t>
+            </a:r>
+          </a:p>
+        </p:txBody>
+      </p:sp>
+      <p:sp>
+        <p:nvSpPr>
+          <p:cNvPr id="19" name="TextBox 18"/>
+          <p:cNvSpPr txBox="1"/>
+          <p:nvPr/>
+        </p:nvSpPr>
+        <p:spPr>
+          <a:xfrm>
+            <a:off x="1170432" y="4795606"/>
+            <a:ext cx="2148840" cy="256032"/>
+          </a:xfrm>
+          <a:prstGeom prst="rect">
+            <a:avLst/>
+          </a:prstGeom>
+          <a:noFill/>
+        </p:spPr>
+        <p:txBody>
+          <a:bodyPr wrap="square" anchor="t">
+            <a:spAutoFit/>
+          </a:bodyPr>
+          <a:lstStyle/>
+          <a:p>
+            <a:pPr algn="l"/>
+            <a:r>
+              <a:rPr sz="1300" b="1">
+                <a:solidFill>
+                  <a:srgbClr val="0F2238"/>
+                </a:solidFill>
+                <a:latin typeface="Aptos"/>
+              </a:rPr>
+              <a:t>Dommages</a:t>
+            </a:r>
+          </a:p>
+        </p:txBody>
+      </p:sp>
+      <p:sp>
+        <p:nvSpPr>
+          <p:cNvPr id="20" name="TextBox 19"/>
+          <p:cNvSpPr txBox="1"/>
+          <p:nvPr/>
+        </p:nvSpPr>
+        <p:spPr>
+          <a:xfrm>
+            <a:off x="3429000" y="4795606"/>
+            <a:ext cx="1234440" cy="256032"/>
+          </a:xfrm>
+          <a:prstGeom prst="rect">
+            <a:avLst/>
+          </a:prstGeom>
+          <a:noFill/>
+        </p:spPr>
+        <p:txBody>
+          <a:bodyPr wrap="square" anchor="t">
+            <a:spAutoFit/>
+          </a:bodyPr>
+          <a:lstStyle/>
+          <a:p>
+            <a:pPr algn="l"/>
+            <a:r>
+              <a:rPr sz="1100" b="1">
+                <a:solidFill>
+                  <a:srgbClr val="626F7B"/>
+                </a:solidFill>
+                <a:latin typeface="Aptos"/>
+              </a:rPr>
+              <a:t>Classification</a:t>
+            </a:r>
+          </a:p>
+        </p:txBody>
+      </p:sp>
+      <p:sp>
+        <p:nvSpPr>
+          <p:cNvPr id="21" name="TextBox 20"/>
+          <p:cNvSpPr txBox="1"/>
+          <p:nvPr/>
+        </p:nvSpPr>
+        <p:spPr>
+          <a:xfrm>
+            <a:off x="4800600" y="4795606"/>
+            <a:ext cx="6217920" cy="261610"/>
+          </a:xfrm>
+          <a:prstGeom prst="rect">
+            <a:avLst/>
+          </a:prstGeom>
+          <a:noFill/>
+        </p:spPr>
+        <p:txBody>
+          <a:bodyPr wrap="square" anchor="t">
+            <a:spAutoFit/>
+          </a:bodyPr>
+          <a:lstStyle/>
+          <a:p>
+            <a:pPr algn="l"/>
+            <a:r>
+              <a:rPr sz="1100" b="0" dirty="0">
+                <a:solidFill>
+                  <a:srgbClr val="232B32"/>
+                </a:solidFill>
+                <a:latin typeface="Aptos"/>
+              </a:rPr>
+              <a:t>KNN • Decision Tree • Random Forest • </a:t>
+            </a:r>
+            <a:r>
+              <a:rPr sz="1100" b="0" dirty="0" err="1">
+                <a:solidFill>
+                  <a:srgbClr val="232B32"/>
+                </a:solidFill>
+                <a:latin typeface="Aptos"/>
+              </a:rPr>
+              <a:t>XGBoost</a:t>
+            </a:r>
+            <a:r>
+              <a:rPr lang="fr-CA" sz="1100" b="0" dirty="0">
+                <a:solidFill>
+                  <a:srgbClr val="232B32"/>
+                </a:solidFill>
+                <a:latin typeface="Aptos"/>
+              </a:rPr>
+              <a:t>               Prédire le niveau de dommages potentiel</a:t>
+            </a:r>
+            <a:endParaRPr sz="1100" b="0" dirty="0">
+              <a:solidFill>
+                <a:srgbClr val="232B32"/>
+              </a:solidFill>
+              <a:latin typeface="Aptos"/>
+            </a:endParaRPr>
+          </a:p>
+        </p:txBody>
+      </p:sp>
+      <p:sp>
+        <p:nvSpPr>
+          <p:cNvPr id="22" name="TextBox 21"/>
+          <p:cNvSpPr txBox="1"/>
+          <p:nvPr/>
+        </p:nvSpPr>
+        <p:spPr>
+          <a:xfrm>
+            <a:off x="658368" y="5260283"/>
+            <a:ext cx="411480" cy="256032"/>
+          </a:xfrm>
+          <a:prstGeom prst="rect">
+            <a:avLst/>
+          </a:prstGeom>
+          <a:noFill/>
+        </p:spPr>
+        <p:txBody>
+          <a:bodyPr wrap="square" anchor="t">
+            <a:spAutoFit/>
+          </a:bodyPr>
+          <a:lstStyle/>
+          <a:p>
+            <a:pPr algn="l"/>
+            <a:r>
+              <a:rPr sz="1200" b="1" dirty="0">
+                <a:solidFill>
+                  <a:srgbClr val="36A2BF"/>
+                </a:solidFill>
+                <a:latin typeface="Aptos"/>
+              </a:rPr>
+              <a:t>06</a:t>
+            </a:r>
+          </a:p>
+        </p:txBody>
+      </p:sp>
+      <p:sp>
+        <p:nvSpPr>
+          <p:cNvPr id="23" name="TextBox 22"/>
+          <p:cNvSpPr txBox="1"/>
+          <p:nvPr/>
+        </p:nvSpPr>
+        <p:spPr>
+          <a:xfrm>
+            <a:off x="1170432" y="5260283"/>
+            <a:ext cx="2148840" cy="256032"/>
+          </a:xfrm>
+          <a:prstGeom prst="rect">
+            <a:avLst/>
+          </a:prstGeom>
+          <a:noFill/>
+        </p:spPr>
+        <p:txBody>
+          <a:bodyPr wrap="square" anchor="t">
+            <a:spAutoFit/>
+          </a:bodyPr>
+          <a:lstStyle/>
+          <a:p>
+            <a:pPr algn="l"/>
+            <a:r>
+              <a:rPr sz="1300" b="1">
+                <a:solidFill>
+                  <a:srgbClr val="0F2238"/>
+                </a:solidFill>
+                <a:latin typeface="Aptos"/>
+              </a:rPr>
+              <a:t>Action</a:t>
+            </a:r>
+          </a:p>
+        </p:txBody>
+      </p:sp>
+      <p:sp>
+        <p:nvSpPr>
+          <p:cNvPr id="24" name="TextBox 23"/>
+          <p:cNvSpPr txBox="1"/>
+          <p:nvPr/>
+        </p:nvSpPr>
+        <p:spPr>
+          <a:xfrm>
+            <a:off x="3429000" y="5260283"/>
+            <a:ext cx="1234440" cy="256032"/>
+          </a:xfrm>
+          <a:prstGeom prst="rect">
+            <a:avLst/>
+          </a:prstGeom>
+          <a:noFill/>
+        </p:spPr>
+        <p:txBody>
+          <a:bodyPr wrap="square" anchor="t">
+            <a:spAutoFit/>
+          </a:bodyPr>
+          <a:lstStyle/>
+          <a:p>
+            <a:pPr algn="l"/>
+            <a:r>
+              <a:rPr sz="1100" b="1">
+                <a:solidFill>
+                  <a:srgbClr val="626F7B"/>
+                </a:solidFill>
+                <a:latin typeface="Aptos"/>
+              </a:rPr>
+              <a:t>Règles</a:t>
+            </a:r>
+          </a:p>
+        </p:txBody>
+      </p:sp>
+      <p:sp>
+        <p:nvSpPr>
+          <p:cNvPr id="25" name="TextBox 24"/>
+          <p:cNvSpPr txBox="1"/>
+          <p:nvPr/>
+        </p:nvSpPr>
+        <p:spPr>
+          <a:xfrm>
+            <a:off x="4800600" y="5260283"/>
+            <a:ext cx="7391400" cy="261610"/>
+          </a:xfrm>
+          <a:prstGeom prst="rect">
+            <a:avLst/>
+          </a:prstGeom>
+          <a:noFill/>
+        </p:spPr>
+        <p:txBody>
+          <a:bodyPr wrap="square" anchor="t">
+            <a:spAutoFit/>
+          </a:bodyPr>
+          <a:lstStyle/>
+          <a:p>
+            <a:pPr algn="l"/>
+            <a:r>
+              <a:rPr sz="1100" b="0" dirty="0" err="1">
+                <a:solidFill>
+                  <a:srgbClr val="232B32"/>
+                </a:solidFill>
+                <a:latin typeface="Aptos"/>
+              </a:rPr>
+              <a:t>Moteur</a:t>
+            </a:r>
+            <a:r>
+              <a:rPr sz="1100" b="0" dirty="0">
+                <a:solidFill>
+                  <a:srgbClr val="232B32"/>
+                </a:solidFill>
+                <a:latin typeface="Aptos"/>
+              </a:rPr>
+              <a:t> </a:t>
+            </a:r>
+            <a:r>
+              <a:rPr sz="1100" b="0" dirty="0" err="1">
+                <a:solidFill>
+                  <a:srgbClr val="232B32"/>
+                </a:solidFill>
+                <a:latin typeface="Aptos"/>
+              </a:rPr>
+              <a:t>déterministe</a:t>
+            </a:r>
+            <a:r>
+              <a:rPr lang="fr-CA" sz="1100" b="0" dirty="0">
+                <a:solidFill>
+                  <a:srgbClr val="232B32"/>
+                </a:solidFill>
+                <a:latin typeface="Aptos"/>
+              </a:rPr>
+              <a:t>                                                                           Recommander une action adaptée au niveau de risque </a:t>
+            </a:r>
+            <a:endParaRPr sz="1100" b="0" dirty="0">
+              <a:solidFill>
+                <a:srgbClr val="232B32"/>
+              </a:solidFill>
+              <a:latin typeface="Aptos"/>
+            </a:endParaRPr>
+          </a:p>
+        </p:txBody>
+      </p:sp>
+      <p:sp>
+        <p:nvSpPr>
+          <p:cNvPr id="26" name="TextBox 25"/>
+          <p:cNvSpPr txBox="1"/>
+          <p:nvPr/>
+        </p:nvSpPr>
+        <p:spPr>
+          <a:xfrm>
+            <a:off x="658368" y="5724963"/>
+            <a:ext cx="411480" cy="256032"/>
+          </a:xfrm>
+          <a:prstGeom prst="rect">
+            <a:avLst/>
+          </a:prstGeom>
+          <a:noFill/>
+        </p:spPr>
+        <p:txBody>
+          <a:bodyPr wrap="square" anchor="t">
+            <a:spAutoFit/>
+          </a:bodyPr>
+          <a:lstStyle/>
+          <a:p>
+            <a:pPr algn="l"/>
+            <a:r>
               <a:rPr sz="1200" b="1">
                 <a:solidFill>
                   <a:srgbClr val="36A2BF"/>
                 </a:solidFill>
                 <a:latin typeface="Aptos"/>
               </a:rPr>
-              <a:t>02</a:t>
-            </a:r>
-          </a:p>
-        </p:txBody>
-      </p:sp>
-      <p:sp>
-        <p:nvSpPr>
-          <p:cNvPr id="7" name="TextBox 6"/>
-          <p:cNvSpPr txBox="1"/>
-          <p:nvPr/>
-        </p:nvSpPr>
-        <p:spPr>
-          <a:xfrm>
-            <a:off x="1170432" y="1572768"/>
+              <a:t>07</a:t>
+            </a:r>
+          </a:p>
+        </p:txBody>
+      </p:sp>
+      <p:sp>
+        <p:nvSpPr>
+          <p:cNvPr id="27" name="TextBox 26"/>
+          <p:cNvSpPr txBox="1"/>
+          <p:nvPr/>
+        </p:nvSpPr>
+        <p:spPr>
+          <a:xfrm>
+            <a:off x="1170432" y="5724963"/>
             <a:ext cx="2148840" cy="256032"/>
           </a:xfrm>
           <a:prstGeom prst="rect">
@@ -14315,26 +15256,205 @@
           <a:p>
             <a:pPr algn="l"/>
             <a:r>
+              <a:rPr sz="1300" b="1" dirty="0" err="1">
+                <a:solidFill>
+                  <a:srgbClr val="0F2238"/>
+                </a:solidFill>
+                <a:latin typeface="Aptos"/>
+              </a:rPr>
+              <a:t>Pertes</a:t>
+            </a:r>
+            <a:r>
+              <a:rPr sz="1300" b="1" dirty="0">
+                <a:solidFill>
+                  <a:srgbClr val="0F2238"/>
+                </a:solidFill>
+                <a:latin typeface="Aptos"/>
+              </a:rPr>
+              <a:t> </a:t>
+            </a:r>
+            <a:r>
+              <a:rPr sz="1300" b="1" dirty="0" err="1">
+                <a:solidFill>
+                  <a:srgbClr val="0F2238"/>
+                </a:solidFill>
+                <a:latin typeface="Aptos"/>
+              </a:rPr>
+              <a:t>économiques</a:t>
+            </a:r>
+            <a:endParaRPr sz="1300" b="1" dirty="0">
+              <a:solidFill>
+                <a:srgbClr val="0F2238"/>
+              </a:solidFill>
+              <a:latin typeface="Aptos"/>
+            </a:endParaRPr>
+          </a:p>
+        </p:txBody>
+      </p:sp>
+      <p:sp>
+        <p:nvSpPr>
+          <p:cNvPr id="28" name="TextBox 27"/>
+          <p:cNvSpPr txBox="1"/>
+          <p:nvPr/>
+        </p:nvSpPr>
+        <p:spPr>
+          <a:xfrm>
+            <a:off x="3429000" y="5724963"/>
+            <a:ext cx="1234440" cy="256032"/>
+          </a:xfrm>
+          <a:prstGeom prst="rect">
+            <a:avLst/>
+          </a:prstGeom>
+          <a:noFill/>
+        </p:spPr>
+        <p:txBody>
+          <a:bodyPr wrap="square" anchor="t">
+            <a:spAutoFit/>
+          </a:bodyPr>
+          <a:lstStyle/>
+          <a:p>
+            <a:pPr algn="l"/>
+            <a:r>
+              <a:rPr sz="1100" b="1">
+                <a:solidFill>
+                  <a:srgbClr val="626F7B"/>
+                </a:solidFill>
+                <a:latin typeface="Aptos"/>
+              </a:rPr>
+              <a:t>Régression</a:t>
+            </a:r>
+          </a:p>
+        </p:txBody>
+      </p:sp>
+      <p:sp>
+        <p:nvSpPr>
+          <p:cNvPr id="29" name="TextBox 28"/>
+          <p:cNvSpPr txBox="1"/>
+          <p:nvPr/>
+        </p:nvSpPr>
+        <p:spPr>
+          <a:xfrm>
+            <a:off x="4800599" y="5724963"/>
+            <a:ext cx="7169727" cy="261610"/>
+          </a:xfrm>
+          <a:prstGeom prst="rect">
+            <a:avLst/>
+          </a:prstGeom>
+          <a:noFill/>
+        </p:spPr>
+        <p:txBody>
+          <a:bodyPr wrap="square" anchor="t">
+            <a:spAutoFit/>
+          </a:bodyPr>
+          <a:lstStyle/>
+          <a:p>
+            <a:pPr algn="l"/>
+            <a:r>
+              <a:rPr sz="1100" b="0" dirty="0">
+                <a:solidFill>
+                  <a:srgbClr val="232B32"/>
+                </a:solidFill>
+                <a:latin typeface="Aptos"/>
+              </a:rPr>
+              <a:t>Linear • Random Forest • Gradient Boosting</a:t>
+            </a:r>
+            <a:r>
+              <a:rPr lang="fr-CA" sz="1100" b="0" dirty="0">
+                <a:solidFill>
+                  <a:srgbClr val="232B32"/>
+                </a:solidFill>
+                <a:latin typeface="Aptos"/>
+              </a:rPr>
+              <a:t>                          Estimer les pertes économiques associées a un séisme</a:t>
+            </a:r>
+            <a:endParaRPr sz="1100" b="0" dirty="0">
+              <a:solidFill>
+                <a:srgbClr val="232B32"/>
+              </a:solidFill>
+              <a:latin typeface="Aptos"/>
+            </a:endParaRPr>
+          </a:p>
+        </p:txBody>
+      </p:sp>
+      <p:sp>
+        <p:nvSpPr>
+          <p:cNvPr id="30" name="TextBox 29"/>
+          <p:cNvSpPr txBox="1"/>
+          <p:nvPr/>
+        </p:nvSpPr>
+        <p:spPr>
+          <a:xfrm>
+            <a:off x="658368" y="6142148"/>
+            <a:ext cx="411480" cy="256032"/>
+          </a:xfrm>
+          <a:prstGeom prst="rect">
+            <a:avLst/>
+          </a:prstGeom>
+          <a:noFill/>
+        </p:spPr>
+        <p:txBody>
+          <a:bodyPr wrap="square" anchor="t">
+            <a:spAutoFit/>
+          </a:bodyPr>
+          <a:lstStyle/>
+          <a:p>
+            <a:pPr algn="l"/>
+            <a:r>
+              <a:rPr sz="1200" b="1">
+                <a:solidFill>
+                  <a:srgbClr val="36A2BF"/>
+                </a:solidFill>
+                <a:latin typeface="Aptos"/>
+              </a:rPr>
+              <a:t>08</a:t>
+            </a:r>
+          </a:p>
+        </p:txBody>
+      </p:sp>
+      <p:sp>
+        <p:nvSpPr>
+          <p:cNvPr id="31" name="TextBox 30"/>
+          <p:cNvSpPr txBox="1"/>
+          <p:nvPr/>
+        </p:nvSpPr>
+        <p:spPr>
+          <a:xfrm>
+            <a:off x="1170432" y="6142148"/>
+            <a:ext cx="2148840" cy="256032"/>
+          </a:xfrm>
+          <a:prstGeom prst="rect">
+            <a:avLst/>
+          </a:prstGeom>
+          <a:noFill/>
+        </p:spPr>
+        <p:txBody>
+          <a:bodyPr wrap="square" anchor="t">
+            <a:spAutoFit/>
+          </a:bodyPr>
+          <a:lstStyle/>
+          <a:p>
+            <a:pPr algn="l"/>
+            <a:r>
               <a:rPr sz="1300" b="1">
                 <a:solidFill>
                   <a:srgbClr val="0F2238"/>
                 </a:solidFill>
                 <a:latin typeface="Aptos"/>
               </a:rPr>
-              <a:t>Zone de risque</a:t>
-            </a:r>
-          </a:p>
-        </p:txBody>
-      </p:sp>
-      <p:sp>
-        <p:nvSpPr>
-          <p:cNvPr id="8" name="TextBox 7"/>
-          <p:cNvSpPr txBox="1"/>
-          <p:nvPr/>
-        </p:nvSpPr>
-        <p:spPr>
-          <a:xfrm>
-            <a:off x="3429000" y="1572768"/>
+              <a:t>Dommages AutoML</a:t>
+            </a:r>
+          </a:p>
+        </p:txBody>
+      </p:sp>
+      <p:sp>
+        <p:nvSpPr>
+          <p:cNvPr id="32" name="TextBox 31"/>
+          <p:cNvSpPr txBox="1"/>
+          <p:nvPr/>
+        </p:nvSpPr>
+        <p:spPr>
+          <a:xfrm>
+            <a:off x="3429000" y="6142148"/>
             <a:ext cx="1234440" cy="256032"/>
           </a:xfrm>
           <a:prstGeom prst="rect">
@@ -14356,882 +15476,59 @@
                 </a:solidFill>
                 <a:latin typeface="Aptos"/>
               </a:rPr>
-              <a:t>Classification</a:t>
-            </a:r>
-          </a:p>
-        </p:txBody>
-      </p:sp>
-      <p:sp>
-        <p:nvSpPr>
-          <p:cNvPr id="9" name="TextBox 8"/>
-          <p:cNvSpPr txBox="1"/>
-          <p:nvPr/>
-        </p:nvSpPr>
-        <p:spPr>
-          <a:xfrm>
-            <a:off x="4800600" y="1572768"/>
-            <a:ext cx="6217920" cy="256032"/>
-          </a:xfrm>
-          <a:prstGeom prst="rect">
-            <a:avLst/>
-          </a:prstGeom>
-          <a:noFill/>
-        </p:spPr>
-        <p:txBody>
-          <a:bodyPr wrap="square" anchor="t">
-            <a:spAutoFit/>
-          </a:bodyPr>
-          <a:lstStyle/>
-          <a:p>
-            <a:pPr algn="l"/>
-            <a:r>
-              <a:rPr sz="1100" b="0">
+              <a:t>AutoML</a:t>
+            </a:r>
+          </a:p>
+        </p:txBody>
+      </p:sp>
+      <p:sp>
+        <p:nvSpPr>
+          <p:cNvPr id="33" name="TextBox 32"/>
+          <p:cNvSpPr txBox="1"/>
+          <p:nvPr/>
+        </p:nvSpPr>
+        <p:spPr>
+          <a:xfrm>
+            <a:off x="4800600" y="6142148"/>
+            <a:ext cx="6217920" cy="261610"/>
+          </a:xfrm>
+          <a:prstGeom prst="rect">
+            <a:avLst/>
+          </a:prstGeom>
+          <a:noFill/>
+        </p:spPr>
+        <p:txBody>
+          <a:bodyPr wrap="square" anchor="t">
+            <a:spAutoFit/>
+          </a:bodyPr>
+          <a:lstStyle/>
+          <a:p>
+            <a:r>
+              <a:rPr sz="1100" b="0" dirty="0">
                 <a:solidFill>
                   <a:srgbClr val="232B32"/>
                 </a:solidFill>
                 <a:latin typeface="Aptos"/>
               </a:rPr>
-              <a:t>KNN • Decision Tree • Random Forest</a:t>
-            </a:r>
-          </a:p>
-        </p:txBody>
-      </p:sp>
-      <p:sp>
-        <p:nvSpPr>
-          <p:cNvPr id="10" name="TextBox 9"/>
-          <p:cNvSpPr txBox="1"/>
-          <p:nvPr/>
-        </p:nvSpPr>
-        <p:spPr>
-          <a:xfrm>
-            <a:off x="658368" y="2203704"/>
-            <a:ext cx="411480" cy="256032"/>
-          </a:xfrm>
-          <a:prstGeom prst="rect">
-            <a:avLst/>
-          </a:prstGeom>
-          <a:noFill/>
-        </p:spPr>
-        <p:txBody>
-          <a:bodyPr wrap="square" anchor="t">
-            <a:spAutoFit/>
-          </a:bodyPr>
-          <a:lstStyle/>
-          <a:p>
-            <a:pPr algn="l"/>
-            <a:r>
-              <a:rPr sz="1200" b="1">
-                <a:solidFill>
-                  <a:srgbClr val="36A2BF"/>
-                </a:solidFill>
-                <a:latin typeface="Aptos"/>
-              </a:rPr>
-              <a:t>03</a:t>
-            </a:r>
-          </a:p>
-        </p:txBody>
-      </p:sp>
-      <p:sp>
-        <p:nvSpPr>
-          <p:cNvPr id="11" name="TextBox 10"/>
-          <p:cNvSpPr txBox="1"/>
-          <p:nvPr/>
-        </p:nvSpPr>
-        <p:spPr>
-          <a:xfrm>
-            <a:off x="1170432" y="2203704"/>
-            <a:ext cx="2148840" cy="256032"/>
-          </a:xfrm>
-          <a:prstGeom prst="rect">
-            <a:avLst/>
-          </a:prstGeom>
-          <a:noFill/>
-        </p:spPr>
-        <p:txBody>
-          <a:bodyPr wrap="square" anchor="t">
-            <a:spAutoFit/>
-          </a:bodyPr>
-          <a:lstStyle/>
-          <a:p>
-            <a:pPr algn="l"/>
-            <a:r>
-              <a:rPr sz="1300" b="1">
-                <a:solidFill>
-                  <a:srgbClr val="0F2238"/>
-                </a:solidFill>
-                <a:latin typeface="Aptos"/>
-              </a:rPr>
-              <a:t>Sévérité / significance</a:t>
-            </a:r>
-          </a:p>
-        </p:txBody>
-      </p:sp>
-      <p:sp>
-        <p:nvSpPr>
-          <p:cNvPr id="12" name="TextBox 11"/>
-          <p:cNvSpPr txBox="1"/>
-          <p:nvPr/>
-        </p:nvSpPr>
-        <p:spPr>
-          <a:xfrm>
-            <a:off x="3429000" y="2203704"/>
-            <a:ext cx="1234440" cy="256032"/>
-          </a:xfrm>
-          <a:prstGeom prst="rect">
-            <a:avLst/>
-          </a:prstGeom>
-          <a:noFill/>
-        </p:spPr>
-        <p:txBody>
-          <a:bodyPr wrap="square" anchor="t">
-            <a:spAutoFit/>
-          </a:bodyPr>
-          <a:lstStyle/>
-          <a:p>
-            <a:pPr algn="l"/>
-            <a:r>
-              <a:rPr sz="1100" b="1">
-                <a:solidFill>
-                  <a:srgbClr val="626F7B"/>
-                </a:solidFill>
-                <a:latin typeface="Aptos"/>
-              </a:rPr>
-              <a:t>Régression</a:t>
-            </a:r>
-          </a:p>
-        </p:txBody>
-      </p:sp>
-      <p:sp>
-        <p:nvSpPr>
-          <p:cNvPr id="13" name="TextBox 12"/>
-          <p:cNvSpPr txBox="1"/>
-          <p:nvPr/>
-        </p:nvSpPr>
-        <p:spPr>
-          <a:xfrm>
-            <a:off x="4800600" y="2203704"/>
-            <a:ext cx="6217920" cy="256032"/>
-          </a:xfrm>
-          <a:prstGeom prst="rect">
-            <a:avLst/>
-          </a:prstGeom>
-          <a:noFill/>
-        </p:spPr>
-        <p:txBody>
-          <a:bodyPr wrap="square" anchor="t">
-            <a:spAutoFit/>
-          </a:bodyPr>
-          <a:lstStyle/>
-          <a:p>
-            <a:pPr algn="l"/>
-            <a:r>
-              <a:rPr sz="1100" b="0">
+              <a:t>H2O </a:t>
+            </a:r>
+            <a:r>
+              <a:rPr sz="1100" b="0" dirty="0" err="1">
                 <a:solidFill>
                   <a:srgbClr val="232B32"/>
                 </a:solidFill>
                 <a:latin typeface="Aptos"/>
               </a:rPr>
-              <a:t>KNN • Decision Tree • Random Forest</a:t>
-            </a:r>
-          </a:p>
-        </p:txBody>
-      </p:sp>
-      <p:sp>
-        <p:nvSpPr>
-          <p:cNvPr id="14" name="TextBox 13"/>
-          <p:cNvSpPr txBox="1"/>
-          <p:nvPr/>
-        </p:nvSpPr>
-        <p:spPr>
-          <a:xfrm>
-            <a:off x="658368" y="2834639"/>
-            <a:ext cx="411480" cy="256032"/>
-          </a:xfrm>
-          <a:prstGeom prst="rect">
-            <a:avLst/>
-          </a:prstGeom>
-          <a:noFill/>
-        </p:spPr>
-        <p:txBody>
-          <a:bodyPr wrap="square" anchor="t">
-            <a:spAutoFit/>
-          </a:bodyPr>
-          <a:lstStyle/>
-          <a:p>
-            <a:pPr algn="l"/>
-            <a:r>
-              <a:rPr sz="1200" b="1">
-                <a:solidFill>
-                  <a:srgbClr val="36A2BF"/>
-                </a:solidFill>
-                <a:latin typeface="Aptos"/>
-              </a:rPr>
-              <a:t>04</a:t>
-            </a:r>
-          </a:p>
-        </p:txBody>
-      </p:sp>
-      <p:sp>
-        <p:nvSpPr>
-          <p:cNvPr id="15" name="TextBox 14"/>
-          <p:cNvSpPr txBox="1"/>
-          <p:nvPr/>
-        </p:nvSpPr>
-        <p:spPr>
-          <a:xfrm>
-            <a:off x="1170432" y="2834639"/>
-            <a:ext cx="2148840" cy="256032"/>
-          </a:xfrm>
-          <a:prstGeom prst="rect">
-            <a:avLst/>
-          </a:prstGeom>
-          <a:noFill/>
-        </p:spPr>
-        <p:txBody>
-          <a:bodyPr wrap="square" anchor="t">
-            <a:spAutoFit/>
-          </a:bodyPr>
-          <a:lstStyle/>
-          <a:p>
-            <a:pPr algn="l"/>
-            <a:r>
-              <a:rPr sz="1300" b="1">
-                <a:solidFill>
-                  <a:srgbClr val="0F2238"/>
-                </a:solidFill>
-                <a:latin typeface="Aptos"/>
-              </a:rPr>
-              <a:t>Facteur de risque</a:t>
-            </a:r>
-          </a:p>
-        </p:txBody>
-      </p:sp>
-      <p:sp>
-        <p:nvSpPr>
-          <p:cNvPr id="16" name="TextBox 15"/>
-          <p:cNvSpPr txBox="1"/>
-          <p:nvPr/>
-        </p:nvSpPr>
-        <p:spPr>
-          <a:xfrm>
-            <a:off x="3429000" y="2834639"/>
-            <a:ext cx="1234440" cy="256032"/>
-          </a:xfrm>
-          <a:prstGeom prst="rect">
-            <a:avLst/>
-          </a:prstGeom>
-          <a:noFill/>
-        </p:spPr>
-        <p:txBody>
-          <a:bodyPr wrap="square" anchor="t">
-            <a:spAutoFit/>
-          </a:bodyPr>
-          <a:lstStyle/>
-          <a:p>
-            <a:pPr algn="l"/>
-            <a:r>
-              <a:rPr sz="1100" b="1">
-                <a:solidFill>
-                  <a:srgbClr val="626F7B"/>
-                </a:solidFill>
-                <a:latin typeface="Aptos"/>
-              </a:rPr>
-              <a:t>Classification</a:t>
-            </a:r>
-          </a:p>
-        </p:txBody>
-      </p:sp>
-      <p:sp>
-        <p:nvSpPr>
-          <p:cNvPr id="17" name="TextBox 16"/>
-          <p:cNvSpPr txBox="1"/>
-          <p:nvPr/>
-        </p:nvSpPr>
-        <p:spPr>
-          <a:xfrm>
-            <a:off x="4800600" y="2834639"/>
-            <a:ext cx="6217920" cy="256032"/>
-          </a:xfrm>
-          <a:prstGeom prst="rect">
-            <a:avLst/>
-          </a:prstGeom>
-          <a:noFill/>
-        </p:spPr>
-        <p:txBody>
-          <a:bodyPr wrap="square" anchor="t">
-            <a:spAutoFit/>
-          </a:bodyPr>
-          <a:lstStyle/>
-          <a:p>
-            <a:pPr algn="l"/>
-            <a:r>
-              <a:rPr sz="1100" b="0">
+              <a:t>AutoML</a:t>
+            </a:r>
+            <a:r>
+              <a:rPr lang="fr-CA" sz="1100" b="0" dirty="0">
                 <a:solidFill>
                   <a:srgbClr val="232B32"/>
                 </a:solidFill>
                 <a:latin typeface="Aptos"/>
               </a:rPr>
-              <a:t>LightGBM • XGBoost • Random Forest</a:t>
-            </a:r>
-          </a:p>
-        </p:txBody>
-      </p:sp>
-      <p:sp>
-        <p:nvSpPr>
-          <p:cNvPr id="18" name="TextBox 17"/>
-          <p:cNvSpPr txBox="1"/>
-          <p:nvPr/>
-        </p:nvSpPr>
-        <p:spPr>
-          <a:xfrm>
-            <a:off x="658368" y="3465576"/>
-            <a:ext cx="411480" cy="256032"/>
-          </a:xfrm>
-          <a:prstGeom prst="rect">
-            <a:avLst/>
-          </a:prstGeom>
-          <a:noFill/>
-        </p:spPr>
-        <p:txBody>
-          <a:bodyPr wrap="square" anchor="t">
-            <a:spAutoFit/>
-          </a:bodyPr>
-          <a:lstStyle/>
-          <a:p>
-            <a:pPr algn="l"/>
-            <a:r>
-              <a:rPr sz="1200" b="1">
-                <a:solidFill>
-                  <a:srgbClr val="36A2BF"/>
-                </a:solidFill>
-                <a:latin typeface="Aptos"/>
-              </a:rPr>
-              <a:t>05</a:t>
-            </a:r>
-          </a:p>
-        </p:txBody>
-      </p:sp>
-      <p:sp>
-        <p:nvSpPr>
-          <p:cNvPr id="19" name="TextBox 18"/>
-          <p:cNvSpPr txBox="1"/>
-          <p:nvPr/>
-        </p:nvSpPr>
-        <p:spPr>
-          <a:xfrm>
-            <a:off x="1170432" y="3465576"/>
-            <a:ext cx="2148840" cy="256032"/>
-          </a:xfrm>
-          <a:prstGeom prst="rect">
-            <a:avLst/>
-          </a:prstGeom>
-          <a:noFill/>
-        </p:spPr>
-        <p:txBody>
-          <a:bodyPr wrap="square" anchor="t">
-            <a:spAutoFit/>
-          </a:bodyPr>
-          <a:lstStyle/>
-          <a:p>
-            <a:pPr algn="l"/>
-            <a:r>
-              <a:rPr sz="1300" b="1">
-                <a:solidFill>
-                  <a:srgbClr val="0F2238"/>
-                </a:solidFill>
-                <a:latin typeface="Aptos"/>
-              </a:rPr>
-              <a:t>Dommages</a:t>
-            </a:r>
-          </a:p>
-        </p:txBody>
-      </p:sp>
-      <p:sp>
-        <p:nvSpPr>
-          <p:cNvPr id="20" name="TextBox 19"/>
-          <p:cNvSpPr txBox="1"/>
-          <p:nvPr/>
-        </p:nvSpPr>
-        <p:spPr>
-          <a:xfrm>
-            <a:off x="3429000" y="3465576"/>
-            <a:ext cx="1234440" cy="256032"/>
-          </a:xfrm>
-          <a:prstGeom prst="rect">
-            <a:avLst/>
-          </a:prstGeom>
-          <a:noFill/>
-        </p:spPr>
-        <p:txBody>
-          <a:bodyPr wrap="square" anchor="t">
-            <a:spAutoFit/>
-          </a:bodyPr>
-          <a:lstStyle/>
-          <a:p>
-            <a:pPr algn="l"/>
-            <a:r>
-              <a:rPr sz="1100" b="1">
-                <a:solidFill>
-                  <a:srgbClr val="626F7B"/>
-                </a:solidFill>
-                <a:latin typeface="Aptos"/>
-              </a:rPr>
-              <a:t>Classification</a:t>
-            </a:r>
-          </a:p>
-        </p:txBody>
-      </p:sp>
-      <p:sp>
-        <p:nvSpPr>
-          <p:cNvPr id="21" name="TextBox 20"/>
-          <p:cNvSpPr txBox="1"/>
-          <p:nvPr/>
-        </p:nvSpPr>
-        <p:spPr>
-          <a:xfrm>
-            <a:off x="4800600" y="3465576"/>
-            <a:ext cx="6217920" cy="256032"/>
-          </a:xfrm>
-          <a:prstGeom prst="rect">
-            <a:avLst/>
-          </a:prstGeom>
-          <a:noFill/>
-        </p:spPr>
-        <p:txBody>
-          <a:bodyPr wrap="square" anchor="t">
-            <a:spAutoFit/>
-          </a:bodyPr>
-          <a:lstStyle/>
-          <a:p>
-            <a:pPr algn="l"/>
-            <a:r>
-              <a:rPr sz="1100" b="0">
-                <a:solidFill>
-                  <a:srgbClr val="232B32"/>
-                </a:solidFill>
-                <a:latin typeface="Aptos"/>
-              </a:rPr>
-              <a:t>KNN • Decision Tree • Random Forest • XGBoost</a:t>
-            </a:r>
-          </a:p>
-        </p:txBody>
-      </p:sp>
-      <p:sp>
-        <p:nvSpPr>
-          <p:cNvPr id="22" name="TextBox 21"/>
-          <p:cNvSpPr txBox="1"/>
-          <p:nvPr/>
-        </p:nvSpPr>
-        <p:spPr>
-          <a:xfrm>
-            <a:off x="658368" y="4096511"/>
-            <a:ext cx="411480" cy="256032"/>
-          </a:xfrm>
-          <a:prstGeom prst="rect">
-            <a:avLst/>
-          </a:prstGeom>
-          <a:noFill/>
-        </p:spPr>
-        <p:txBody>
-          <a:bodyPr wrap="square" anchor="t">
-            <a:spAutoFit/>
-          </a:bodyPr>
-          <a:lstStyle/>
-          <a:p>
-            <a:pPr algn="l"/>
-            <a:r>
-              <a:rPr sz="1200" b="1">
-                <a:solidFill>
-                  <a:srgbClr val="36A2BF"/>
-                </a:solidFill>
-                <a:latin typeface="Aptos"/>
-              </a:rPr>
-              <a:t>06</a:t>
-            </a:r>
-          </a:p>
-        </p:txBody>
-      </p:sp>
-      <p:sp>
-        <p:nvSpPr>
-          <p:cNvPr id="23" name="TextBox 22"/>
-          <p:cNvSpPr txBox="1"/>
-          <p:nvPr/>
-        </p:nvSpPr>
-        <p:spPr>
-          <a:xfrm>
-            <a:off x="1170432" y="4096511"/>
-            <a:ext cx="2148840" cy="256032"/>
-          </a:xfrm>
-          <a:prstGeom prst="rect">
-            <a:avLst/>
-          </a:prstGeom>
-          <a:noFill/>
-        </p:spPr>
-        <p:txBody>
-          <a:bodyPr wrap="square" anchor="t">
-            <a:spAutoFit/>
-          </a:bodyPr>
-          <a:lstStyle/>
-          <a:p>
-            <a:pPr algn="l"/>
-            <a:r>
-              <a:rPr sz="1300" b="1">
-                <a:solidFill>
-                  <a:srgbClr val="0F2238"/>
-                </a:solidFill>
-                <a:latin typeface="Aptos"/>
-              </a:rPr>
-              <a:t>Action</a:t>
-            </a:r>
-          </a:p>
-        </p:txBody>
-      </p:sp>
-      <p:sp>
-        <p:nvSpPr>
-          <p:cNvPr id="24" name="TextBox 23"/>
-          <p:cNvSpPr txBox="1"/>
-          <p:nvPr/>
-        </p:nvSpPr>
-        <p:spPr>
-          <a:xfrm>
-            <a:off x="3429000" y="4096511"/>
-            <a:ext cx="1234440" cy="256032"/>
-          </a:xfrm>
-          <a:prstGeom prst="rect">
-            <a:avLst/>
-          </a:prstGeom>
-          <a:noFill/>
-        </p:spPr>
-        <p:txBody>
-          <a:bodyPr wrap="square" anchor="t">
-            <a:spAutoFit/>
-          </a:bodyPr>
-          <a:lstStyle/>
-          <a:p>
-            <a:pPr algn="l"/>
-            <a:r>
-              <a:rPr sz="1100" b="1">
-                <a:solidFill>
-                  <a:srgbClr val="626F7B"/>
-                </a:solidFill>
-                <a:latin typeface="Aptos"/>
-              </a:rPr>
-              <a:t>Règles</a:t>
-            </a:r>
-          </a:p>
-        </p:txBody>
-      </p:sp>
-      <p:sp>
-        <p:nvSpPr>
-          <p:cNvPr id="25" name="TextBox 24"/>
-          <p:cNvSpPr txBox="1"/>
-          <p:nvPr/>
-        </p:nvSpPr>
-        <p:spPr>
-          <a:xfrm>
-            <a:off x="4800600" y="4096511"/>
-            <a:ext cx="6217920" cy="256032"/>
-          </a:xfrm>
-          <a:prstGeom prst="rect">
-            <a:avLst/>
-          </a:prstGeom>
-          <a:noFill/>
-        </p:spPr>
-        <p:txBody>
-          <a:bodyPr wrap="square" anchor="t">
-            <a:spAutoFit/>
-          </a:bodyPr>
-          <a:lstStyle/>
-          <a:p>
-            <a:pPr algn="l"/>
-            <a:r>
-              <a:rPr sz="1100" b="0">
-                <a:solidFill>
-                  <a:srgbClr val="232B32"/>
-                </a:solidFill>
-                <a:latin typeface="Aptos"/>
-              </a:rPr>
-              <a:t>Moteur déterministe</a:t>
-            </a:r>
-          </a:p>
-        </p:txBody>
-      </p:sp>
-      <p:sp>
-        <p:nvSpPr>
-          <p:cNvPr id="26" name="TextBox 25"/>
-          <p:cNvSpPr txBox="1"/>
-          <p:nvPr/>
-        </p:nvSpPr>
-        <p:spPr>
-          <a:xfrm>
-            <a:off x="658368" y="4727448"/>
-            <a:ext cx="411480" cy="256032"/>
-          </a:xfrm>
-          <a:prstGeom prst="rect">
-            <a:avLst/>
-          </a:prstGeom>
-          <a:noFill/>
-        </p:spPr>
-        <p:txBody>
-          <a:bodyPr wrap="square" anchor="t">
-            <a:spAutoFit/>
-          </a:bodyPr>
-          <a:lstStyle/>
-          <a:p>
-            <a:pPr algn="l"/>
-            <a:r>
-              <a:rPr sz="1200" b="1">
-                <a:solidFill>
-                  <a:srgbClr val="36A2BF"/>
-                </a:solidFill>
-                <a:latin typeface="Aptos"/>
-              </a:rPr>
-              <a:t>07</a:t>
-            </a:r>
-          </a:p>
-        </p:txBody>
-      </p:sp>
-      <p:sp>
-        <p:nvSpPr>
-          <p:cNvPr id="27" name="TextBox 26"/>
-          <p:cNvSpPr txBox="1"/>
-          <p:nvPr/>
-        </p:nvSpPr>
-        <p:spPr>
-          <a:xfrm>
-            <a:off x="1170432" y="4727448"/>
-            <a:ext cx="2148840" cy="256032"/>
-          </a:xfrm>
-          <a:prstGeom prst="rect">
-            <a:avLst/>
-          </a:prstGeom>
-          <a:noFill/>
-        </p:spPr>
-        <p:txBody>
-          <a:bodyPr wrap="square" anchor="t">
-            <a:spAutoFit/>
-          </a:bodyPr>
-          <a:lstStyle/>
-          <a:p>
-            <a:pPr algn="l"/>
-            <a:r>
-              <a:rPr sz="1300" b="1">
-                <a:solidFill>
-                  <a:srgbClr val="0F2238"/>
-                </a:solidFill>
-                <a:latin typeface="Aptos"/>
-              </a:rPr>
-              <a:t>Pertes économiques</a:t>
-            </a:r>
-          </a:p>
-        </p:txBody>
-      </p:sp>
-      <p:sp>
-        <p:nvSpPr>
-          <p:cNvPr id="28" name="TextBox 27"/>
-          <p:cNvSpPr txBox="1"/>
-          <p:nvPr/>
-        </p:nvSpPr>
-        <p:spPr>
-          <a:xfrm>
-            <a:off x="3429000" y="4727448"/>
-            <a:ext cx="1234440" cy="256032"/>
-          </a:xfrm>
-          <a:prstGeom prst="rect">
-            <a:avLst/>
-          </a:prstGeom>
-          <a:noFill/>
-        </p:spPr>
-        <p:txBody>
-          <a:bodyPr wrap="square" anchor="t">
-            <a:spAutoFit/>
-          </a:bodyPr>
-          <a:lstStyle/>
-          <a:p>
-            <a:pPr algn="l"/>
-            <a:r>
-              <a:rPr sz="1100" b="1">
-                <a:solidFill>
-                  <a:srgbClr val="626F7B"/>
-                </a:solidFill>
-                <a:latin typeface="Aptos"/>
-              </a:rPr>
-              <a:t>Régression</a:t>
-            </a:r>
-          </a:p>
-        </p:txBody>
-      </p:sp>
-      <p:sp>
-        <p:nvSpPr>
-          <p:cNvPr id="29" name="TextBox 28"/>
-          <p:cNvSpPr txBox="1"/>
-          <p:nvPr/>
-        </p:nvSpPr>
-        <p:spPr>
-          <a:xfrm>
-            <a:off x="4800600" y="4727448"/>
-            <a:ext cx="6217920" cy="256032"/>
-          </a:xfrm>
-          <a:prstGeom prst="rect">
-            <a:avLst/>
-          </a:prstGeom>
-          <a:noFill/>
-        </p:spPr>
-        <p:txBody>
-          <a:bodyPr wrap="square" anchor="t">
-            <a:spAutoFit/>
-          </a:bodyPr>
-          <a:lstStyle/>
-          <a:p>
-            <a:pPr algn="l"/>
-            <a:r>
-              <a:rPr sz="1100" b="0">
-                <a:solidFill>
-                  <a:srgbClr val="232B32"/>
-                </a:solidFill>
-                <a:latin typeface="Aptos"/>
-              </a:rPr>
-              <a:t>Linear • Random Forest • Gradient Boosting</a:t>
-            </a:r>
-          </a:p>
-        </p:txBody>
-      </p:sp>
-      <p:sp>
-        <p:nvSpPr>
-          <p:cNvPr id="30" name="TextBox 29"/>
-          <p:cNvSpPr txBox="1"/>
-          <p:nvPr/>
-        </p:nvSpPr>
-        <p:spPr>
-          <a:xfrm>
-            <a:off x="658368" y="5358383"/>
-            <a:ext cx="411480" cy="256032"/>
-          </a:xfrm>
-          <a:prstGeom prst="rect">
-            <a:avLst/>
-          </a:prstGeom>
-          <a:noFill/>
-        </p:spPr>
-        <p:txBody>
-          <a:bodyPr wrap="square" anchor="t">
-            <a:spAutoFit/>
-          </a:bodyPr>
-          <a:lstStyle/>
-          <a:p>
-            <a:pPr algn="l"/>
-            <a:r>
-              <a:rPr sz="1200" b="1">
-                <a:solidFill>
-                  <a:srgbClr val="36A2BF"/>
-                </a:solidFill>
-                <a:latin typeface="Aptos"/>
-              </a:rPr>
-              <a:t>08</a:t>
-            </a:r>
-          </a:p>
-        </p:txBody>
-      </p:sp>
-      <p:sp>
-        <p:nvSpPr>
-          <p:cNvPr id="31" name="TextBox 30"/>
-          <p:cNvSpPr txBox="1"/>
-          <p:nvPr/>
-        </p:nvSpPr>
-        <p:spPr>
-          <a:xfrm>
-            <a:off x="1170432" y="5358383"/>
-            <a:ext cx="2148840" cy="256032"/>
-          </a:xfrm>
-          <a:prstGeom prst="rect">
-            <a:avLst/>
-          </a:prstGeom>
-          <a:noFill/>
-        </p:spPr>
-        <p:txBody>
-          <a:bodyPr wrap="square" anchor="t">
-            <a:spAutoFit/>
-          </a:bodyPr>
-          <a:lstStyle/>
-          <a:p>
-            <a:pPr algn="l"/>
-            <a:r>
-              <a:rPr sz="1300" b="1">
-                <a:solidFill>
-                  <a:srgbClr val="0F2238"/>
-                </a:solidFill>
-                <a:latin typeface="Aptos"/>
-              </a:rPr>
-              <a:t>Dommages AutoML</a:t>
-            </a:r>
-          </a:p>
-        </p:txBody>
-      </p:sp>
-      <p:sp>
-        <p:nvSpPr>
-          <p:cNvPr id="32" name="TextBox 31"/>
-          <p:cNvSpPr txBox="1"/>
-          <p:nvPr/>
-        </p:nvSpPr>
-        <p:spPr>
-          <a:xfrm>
-            <a:off x="3429000" y="5358383"/>
-            <a:ext cx="1234440" cy="256032"/>
-          </a:xfrm>
-          <a:prstGeom prst="rect">
-            <a:avLst/>
-          </a:prstGeom>
-          <a:noFill/>
-        </p:spPr>
-        <p:txBody>
-          <a:bodyPr wrap="square" anchor="t">
-            <a:spAutoFit/>
-          </a:bodyPr>
-          <a:lstStyle/>
-          <a:p>
-            <a:pPr algn="l"/>
-            <a:r>
-              <a:rPr sz="1100" b="1">
-                <a:solidFill>
-                  <a:srgbClr val="626F7B"/>
-                </a:solidFill>
-                <a:latin typeface="Aptos"/>
-              </a:rPr>
-              <a:t>AutoML</a:t>
-            </a:r>
-          </a:p>
-        </p:txBody>
-      </p:sp>
-      <p:sp>
-        <p:nvSpPr>
-          <p:cNvPr id="33" name="TextBox 32"/>
-          <p:cNvSpPr txBox="1"/>
-          <p:nvPr/>
-        </p:nvSpPr>
-        <p:spPr>
-          <a:xfrm>
-            <a:off x="4800600" y="5358383"/>
-            <a:ext cx="6217920" cy="256032"/>
-          </a:xfrm>
-          <a:prstGeom prst="rect">
-            <a:avLst/>
-          </a:prstGeom>
-          <a:noFill/>
-        </p:spPr>
-        <p:txBody>
-          <a:bodyPr wrap="square" anchor="t">
-            <a:spAutoFit/>
-          </a:bodyPr>
-          <a:lstStyle/>
-          <a:p>
-            <a:pPr algn="l"/>
-            <a:r>
-              <a:rPr sz="1100" b="0">
-                <a:solidFill>
-                  <a:srgbClr val="232B32"/>
-                </a:solidFill>
-                <a:latin typeface="Aptos"/>
-              </a:rPr>
-              <a:t>H2O AutoML</a:t>
+              <a:t>                                                                                           Prédire le niveau de dommages potentiel</a:t>
             </a:r>
           </a:p>
         </p:txBody>
@@ -15268,6 +15565,109 @@
               </a:rPr>
               <a:t>Sources : notebooks 02 à 08 fournis.</a:t>
             </a:r>
+          </a:p>
+        </p:txBody>
+      </p:sp>
+      <p:sp>
+        <p:nvSpPr>
+          <p:cNvPr id="38" name="TextBox 5">
+            <a:extLst>
+              <a:ext uri="{FF2B5EF4-FFF2-40B4-BE49-F238E27FC236}">
+                <a16:creationId xmlns:a16="http://schemas.microsoft.com/office/drawing/2014/main" id="{B0AF6C08-F0D5-060B-CD8E-8C1E04D3DE0F}"/>
+              </a:ext>
+            </a:extLst>
+          </p:cNvPr>
+          <p:cNvSpPr txBox="1"/>
+          <p:nvPr/>
+        </p:nvSpPr>
+        <p:spPr>
+          <a:xfrm>
+            <a:off x="632639" y="3126441"/>
+            <a:ext cx="411480" cy="276999"/>
+          </a:xfrm>
+          <a:prstGeom prst="rect">
+            <a:avLst/>
+          </a:prstGeom>
+          <a:noFill/>
+        </p:spPr>
+        <p:txBody>
+          <a:bodyPr wrap="square" anchor="t">
+            <a:spAutoFit/>
+          </a:bodyPr>
+          <a:lstStyle/>
+          <a:p>
+            <a:pPr algn="l"/>
+            <a:r>
+              <a:rPr sz="1200" b="1" dirty="0">
+                <a:solidFill>
+                  <a:srgbClr val="36A2BF"/>
+                </a:solidFill>
+                <a:latin typeface="Aptos"/>
+              </a:rPr>
+              <a:t>0</a:t>
+            </a:r>
+            <a:r>
+              <a:rPr lang="fr-CA" sz="1200" b="1" dirty="0">
+                <a:solidFill>
+                  <a:srgbClr val="36A2BF"/>
+                </a:solidFill>
+                <a:latin typeface="Aptos"/>
+              </a:rPr>
+              <a:t>1</a:t>
+            </a:r>
+            <a:endParaRPr sz="1200" b="1" dirty="0">
+              <a:solidFill>
+                <a:srgbClr val="36A2BF"/>
+              </a:solidFill>
+              <a:latin typeface="Aptos"/>
+            </a:endParaRPr>
+          </a:p>
+        </p:txBody>
+      </p:sp>
+      <p:sp>
+        <p:nvSpPr>
+          <p:cNvPr id="39" name="TextBox 6">
+            <a:extLst>
+              <a:ext uri="{FF2B5EF4-FFF2-40B4-BE49-F238E27FC236}">
+                <a16:creationId xmlns:a16="http://schemas.microsoft.com/office/drawing/2014/main" id="{D0A57EE8-C0FD-FFED-329A-AA6E71FB191E}"/>
+              </a:ext>
+            </a:extLst>
+          </p:cNvPr>
+          <p:cNvSpPr txBox="1"/>
+          <p:nvPr/>
+        </p:nvSpPr>
+        <p:spPr>
+          <a:xfrm>
+            <a:off x="1144703" y="3126441"/>
+            <a:ext cx="2148840" cy="292388"/>
+          </a:xfrm>
+          <a:prstGeom prst="rect">
+            <a:avLst/>
+          </a:prstGeom>
+          <a:noFill/>
+        </p:spPr>
+        <p:txBody>
+          <a:bodyPr wrap="square" anchor="t">
+            <a:spAutoFit/>
+          </a:bodyPr>
+          <a:lstStyle/>
+          <a:p>
+            <a:pPr algn="l"/>
+            <a:r>
+              <a:rPr lang="fr-CA" sz="1300" b="1" dirty="0">
+                <a:solidFill>
+                  <a:srgbClr val="0F2238"/>
+                </a:solidFill>
+                <a:latin typeface="Aptos"/>
+              </a:rPr>
+              <a:t>EDA</a:t>
+            </a:r>
+            <a:endParaRPr sz="1300" b="1" dirty="0">
+              <a:solidFill>
+                <a:srgbClr val="0F2238"/>
+              </a:solidFill>
+              <a:latin typeface="Aptos"/>
+            </a:endParaRPr>
           </a:p>
         </p:txBody>
       </p:sp>
@@ -17532,7 +17932,7 @@
               <a:t> de </a:t>
             </a:r>
             <a:r>
-              <a:rPr lang="en-CA" sz="1200" dirty="0" err="1"/>
+              <a:rPr lang="fr-CA" sz="1200" dirty="0"/>
               <a:t>régression</a:t>
             </a:r>
             <a:r>
@@ -19055,7 +19455,19 @@
               <a:rPr lang="fr-CA" sz="1200" b="0" dirty="0">
                 <a:latin typeface="Aptos"/>
               </a:rPr>
-              <a:t>es séismes en 5 catégories hiérarchisées (Risque Tsunami, Forte Secousse, Forte Exposition, Faible Profondeur, Risque Modéré ou Faible)</a:t>
+              <a:t>es séismes en 5 catégories hiérarchisées (</a:t>
+            </a:r>
+            <a:r>
+              <a:rPr lang="fr-CA" sz="1200" b="1" dirty="0">
+                <a:latin typeface="Aptos"/>
+              </a:rPr>
+              <a:t>Risque Tsunami, Forte Secousse, Forte Exposition, Faible Profondeur, Risque Modéré ou Faible</a:t>
+            </a:r>
+            <a:r>
+              <a:rPr lang="fr-CA" sz="1200" b="0" dirty="0">
+                <a:latin typeface="Aptos"/>
+              </a:rPr>
+              <a:t>)</a:t>
             </a:r>
           </a:p>
           <a:p>
